--- a/public/cours/vtc/F_Locale_3.pptx
+++ b/public/cours/vtc/F_Locale_3.pptx
@@ -5,7 +5,7 @@
     <p:sldMasterId id="2147483648" r:id="rId1"/>
   </p:sldMasterIdLst>
   <p:notesMasterIdLst>
-    <p:notesMasterId r:id="rId12"/>
+    <p:notesMasterId r:id="rId14"/>
   </p:notesMasterIdLst>
   <p:sldIdLst>
     <p:sldId id="256" r:id="rId2"/>
@@ -18,6 +18,8 @@
     <p:sldId id="263" r:id="rId9"/>
     <p:sldId id="264" r:id="rId10"/>
     <p:sldId id="265" r:id="rId11"/>
+    <p:sldId id="266" r:id="rId12"/>
+    <p:sldId id="267" r:id="rId13"/>
   </p:sldIdLst>
   <p:sldSz cx="9144000" cy="5143500" type="screen16x9"/>
   <p:notesSz cx="5143500" cy="9144000"/>
@@ -119,6 +121,43 @@
     </p:ext>
   </p:extLst>
 </p:presentation>
+</file>
+
+<file path=ppt/revisionInfo.xml><?xml version="1.0" encoding="utf-8"?>
+<p1510:revInfo xmlns:a="http://schemas.openxmlformats.org/drawingml/2006/main" xmlns:r="http://schemas.openxmlformats.org/officeDocument/2006/relationships" xmlns:p1510="http://schemas.microsoft.com/office/powerpoint/2015/10/main">
+  <p1510:revLst>
+    <p1510:client id="{E965BBA5-AAC2-453F-AFB5-BF12AA15B6B0}" v="1" dt="2026-09-08T13:11:12.824"/>
+  </p1510:revLst>
+</p1510:revInfo>
+</file>
+
+<file path=ppt/changesInfos/changesInfo1.xml><?xml version="1.0" encoding="utf-8"?>
+<pc:chgInfo xmlns:a="http://schemas.openxmlformats.org/drawingml/2006/main" xmlns:r="http://schemas.openxmlformats.org/officeDocument/2006/relationships" xmlns:ac="http://schemas.microsoft.com/office/drawing/2013/main/command" xmlns:pc="http://schemas.microsoft.com/office/powerpoint/2013/main/command">
+  <pc:docChgLst>
+    <pc:chgData name="naoufal guenichi" userId="858fd4b3-0f44-4d07-ab42-9c2b2bf873b3" providerId="ADAL" clId="{5ADB1776-59AF-4A69-8422-CB66C8AF09C6}"/>
+    <pc:docChg chg="custSel modSld">
+      <pc:chgData name="naoufal guenichi" userId="858fd4b3-0f44-4d07-ab42-9c2b2bf873b3" providerId="ADAL" clId="{5ADB1776-59AF-4A69-8422-CB66C8AF09C6}" dt="2026-09-08T13:11:16.218" v="3" actId="1076"/>
+      <pc:docMkLst>
+        <pc:docMk/>
+      </pc:docMkLst>
+      <pc:sldChg chg="modSp mod">
+        <pc:chgData name="naoufal guenichi" userId="858fd4b3-0f44-4d07-ab42-9c2b2bf873b3" providerId="ADAL" clId="{5ADB1776-59AF-4A69-8422-CB66C8AF09C6}" dt="2026-09-08T13:11:16.218" v="3" actId="1076"/>
+        <pc:sldMkLst>
+          <pc:docMk/>
+          <pc:sldMk cId="0" sldId="260"/>
+        </pc:sldMkLst>
+        <pc:spChg chg="mod">
+          <ac:chgData name="naoufal guenichi" userId="858fd4b3-0f44-4d07-ab42-9c2b2bf873b3" providerId="ADAL" clId="{5ADB1776-59AF-4A69-8422-CB66C8AF09C6}" dt="2026-09-08T13:11:16.218" v="3" actId="1076"/>
+          <ac:spMkLst>
+            <pc:docMk/>
+            <pc:sldMk cId="0" sldId="260"/>
+            <ac:spMk id="24" creationId="{00000000-0000-0000-0000-000000000000}"/>
+          </ac:spMkLst>
+        </pc:spChg>
+      </pc:sldChg>
+    </pc:docChg>
+  </pc:docChgLst>
+</pc:chgInfo>
 </file>
 
 <file path=ppt/notesMasters/notesMaster1.xml><?xml version="1.0" encoding="utf-8"?>
@@ -2348,6 +2387,962 @@
 </p:sld>
 </file>
 
+<file path=ppt/slides/slide11.xml><?xml version="1.0" encoding="utf-8"?>
+<p:sld xmlns:a="http://schemas.openxmlformats.org/drawingml/2006/main" xmlns:r="http://schemas.openxmlformats.org/officeDocument/2006/relationships" xmlns:p="http://schemas.openxmlformats.org/presentationml/2006/main">
+  <p:cSld>
+    <p:spTree>
+      <p:nvGrpSpPr>
+        <p:cNvPr id="1" name=""/>
+        <p:cNvGrpSpPr/>
+        <p:nvPr/>
+      </p:nvGrpSpPr>
+      <p:grpSpPr>
+        <a:xfrm>
+          <a:off x="0" y="0"/>
+          <a:ext cx="0" cy="0"/>
+          <a:chOff x="0" y="0"/>
+          <a:chExt cx="0" cy="0"/>
+        </a:xfrm>
+      </p:grpSpPr>
+      <p:sp>
+        <p:nvSpPr>
+          <p:cNvPr id="2" name="TextBox 1"/>
+          <p:cNvSpPr txBox="1"/>
+          <p:nvPr/>
+        </p:nvSpPr>
+        <p:spPr>
+          <a:xfrm>
+            <a:off x="438912" y="164592"/>
+            <a:ext cx="2926080" cy="274320"/>
+          </a:xfrm>
+          <a:prstGeom prst="rect">
+            <a:avLst/>
+          </a:prstGeom>
+          <a:noFill/>
+        </p:spPr>
+        <p:txBody>
+          <a:bodyPr wrap="square" anchor="ctr">
+            <a:spAutoFit/>
+          </a:bodyPr>
+          <a:lstStyle/>
+          <a:p>
+            <a:pPr algn="l"/>
+            <a:r>
+              <a:rPr sz="1100" b="1">
+                <a:solidFill>
+                  <a:srgbClr val="E8B22D"/>
+                </a:solidFill>
+                <a:latin typeface="Calibri"/>
+              </a:rPr>
+              <a:t>PARTIE 3 — COURS</a:t>
+            </a:r>
+          </a:p>
+        </p:txBody>
+      </p:sp>
+      <p:sp>
+        <p:nvSpPr>
+          <p:cNvPr id="3" name="TextBox 2"/>
+          <p:cNvSpPr txBox="1"/>
+          <p:nvPr/>
+        </p:nvSpPr>
+        <p:spPr>
+          <a:xfrm>
+            <a:off x="438912" y="530352"/>
+            <a:ext cx="7498079" cy="502920"/>
+          </a:xfrm>
+          <a:prstGeom prst="rect">
+            <a:avLst/>
+          </a:prstGeom>
+          <a:noFill/>
+        </p:spPr>
+        <p:txBody>
+          <a:bodyPr wrap="square" anchor="ctr">
+            <a:spAutoFit/>
+          </a:bodyPr>
+          <a:lstStyle/>
+          <a:p>
+            <a:pPr algn="l"/>
+            <a:r>
+              <a:rPr sz="2500" b="1">
+                <a:solidFill>
+                  <a:srgbClr val="1C202B"/>
+                </a:solidFill>
+                <a:latin typeface="Georgia"/>
+              </a:rPr>
+              <a:t>Accord préalable CPAM — exemples très simples</a:t>
+            </a:r>
+          </a:p>
+        </p:txBody>
+      </p:sp>
+      <p:sp>
+        <p:nvSpPr>
+          <p:cNvPr id="4" name="Rectangle 3"/>
+          <p:cNvSpPr/>
+          <p:nvPr/>
+        </p:nvSpPr>
+        <p:spPr>
+          <a:xfrm>
+            <a:off x="411480" y="1188720"/>
+            <a:ext cx="3657600" cy="1325880"/>
+          </a:xfrm>
+          <a:prstGeom prst="rect">
+            <a:avLst/>
+          </a:prstGeom>
+          <a:solidFill>
+            <a:srgbClr val="EBF4FC"/>
+          </a:solidFill>
+          <a:ln>
+            <a:solidFill>
+              <a:srgbClr val="EBF4FC"/>
+            </a:solidFill>
+          </a:ln>
+        </p:spPr>
+        <p:style>
+          <a:lnRef idx="1">
+            <a:schemeClr val="accent1"/>
+          </a:lnRef>
+          <a:fillRef idx="3">
+            <a:schemeClr val="accent1"/>
+          </a:fillRef>
+          <a:effectRef idx="2">
+            <a:schemeClr val="accent1"/>
+          </a:effectRef>
+          <a:fontRef idx="minor">
+            <a:schemeClr val="lt1"/>
+          </a:fontRef>
+        </p:style>
+        <p:txBody>
+          <a:bodyPr rtlCol="0" anchor="ctr"/>
+          <a:lstStyle/>
+          <a:p>
+            <a:pPr algn="ctr"/>
+            <a:endParaRPr/>
+          </a:p>
+        </p:txBody>
+      </p:sp>
+      <p:sp>
+        <p:nvSpPr>
+          <p:cNvPr id="5" name="TextBox 4"/>
+          <p:cNvSpPr txBox="1"/>
+          <p:nvPr/>
+        </p:nvSpPr>
+        <p:spPr>
+          <a:xfrm>
+            <a:off x="594360" y="1353312"/>
+            <a:ext cx="3291840" cy="228600"/>
+          </a:xfrm>
+          <a:prstGeom prst="rect">
+            <a:avLst/>
+          </a:prstGeom>
+          <a:noFill/>
+        </p:spPr>
+        <p:txBody>
+          <a:bodyPr wrap="square" anchor="ctr">
+            <a:spAutoFit/>
+          </a:bodyPr>
+          <a:lstStyle/>
+          <a:p>
+            <a:pPr algn="l"/>
+            <a:r>
+              <a:rPr sz="1400" b="1">
+                <a:solidFill>
+                  <a:srgbClr val="2B6FB8"/>
+                </a:solidFill>
+                <a:latin typeface="Calibri"/>
+              </a:rPr>
+              <a:t>CAS A — 1 trajet longue distance</a:t>
+            </a:r>
+          </a:p>
+        </p:txBody>
+      </p:sp>
+      <p:sp>
+        <p:nvSpPr>
+          <p:cNvPr id="6" name="TextBox 5"/>
+          <p:cNvSpPr txBox="1"/>
+          <p:nvPr/>
+        </p:nvSpPr>
+        <p:spPr>
+          <a:xfrm>
+            <a:off x="594360" y="1673352"/>
+            <a:ext cx="3246120" cy="621792"/>
+          </a:xfrm>
+          <a:prstGeom prst="rect">
+            <a:avLst/>
+          </a:prstGeom>
+          <a:noFill/>
+        </p:spPr>
+        <p:txBody>
+          <a:bodyPr wrap="square" anchor="ctr">
+            <a:spAutoFit/>
+          </a:bodyPr>
+          <a:lstStyle/>
+          <a:p>
+            <a:pPr algn="l"/>
+            <a:r>
+              <a:rPr sz="1200" b="0">
+                <a:solidFill>
+                  <a:srgbClr val="1C202B"/>
+                </a:solidFill>
+                <a:latin typeface="Calibri"/>
+              </a:rPr>
+              <a:t>Lyon → destination à 160 km ALLER.
+→ Plus de 150 km aller.
+→ Accord préalable nécessaire.</a:t>
+            </a:r>
+          </a:p>
+        </p:txBody>
+      </p:sp>
+      <p:sp>
+        <p:nvSpPr>
+          <p:cNvPr id="7" name="Rectangle 6"/>
+          <p:cNvSpPr/>
+          <p:nvPr/>
+        </p:nvSpPr>
+        <p:spPr>
+          <a:xfrm>
+            <a:off x="4251960" y="1188720"/>
+            <a:ext cx="3657600" cy="1325880"/>
+          </a:xfrm>
+          <a:prstGeom prst="rect">
+            <a:avLst/>
+          </a:prstGeom>
+          <a:solidFill>
+            <a:srgbClr val="ECF7F1"/>
+          </a:solidFill>
+          <a:ln>
+            <a:solidFill>
+              <a:srgbClr val="ECF7F1"/>
+            </a:solidFill>
+          </a:ln>
+        </p:spPr>
+        <p:style>
+          <a:lnRef idx="1">
+            <a:schemeClr val="accent1"/>
+          </a:lnRef>
+          <a:fillRef idx="3">
+            <a:schemeClr val="accent1"/>
+          </a:fillRef>
+          <a:effectRef idx="2">
+            <a:schemeClr val="accent1"/>
+          </a:effectRef>
+          <a:fontRef idx="minor">
+            <a:schemeClr val="lt1"/>
+          </a:fontRef>
+        </p:style>
+        <p:txBody>
+          <a:bodyPr rtlCol="0" anchor="ctr"/>
+          <a:lstStyle/>
+          <a:p>
+            <a:pPr algn="ctr"/>
+            <a:endParaRPr/>
+          </a:p>
+        </p:txBody>
+      </p:sp>
+      <p:sp>
+        <p:nvSpPr>
+          <p:cNvPr id="8" name="TextBox 7"/>
+          <p:cNvSpPr txBox="1"/>
+          <p:nvPr/>
+        </p:nvSpPr>
+        <p:spPr>
+          <a:xfrm>
+            <a:off x="4434840" y="1353312"/>
+            <a:ext cx="3291840" cy="228600"/>
+          </a:xfrm>
+          <a:prstGeom prst="rect">
+            <a:avLst/>
+          </a:prstGeom>
+          <a:noFill/>
+        </p:spPr>
+        <p:txBody>
+          <a:bodyPr wrap="square" anchor="ctr">
+            <a:spAutoFit/>
+          </a:bodyPr>
+          <a:lstStyle/>
+          <a:p>
+            <a:pPr algn="l"/>
+            <a:r>
+              <a:rPr sz="1400" b="1">
+                <a:solidFill>
+                  <a:srgbClr val="266F4C"/>
+                </a:solidFill>
+                <a:latin typeface="Calibri"/>
+              </a:rPr>
+              <a:t>CAS B — transports en série</a:t>
+            </a:r>
+          </a:p>
+        </p:txBody>
+      </p:sp>
+      <p:sp>
+        <p:nvSpPr>
+          <p:cNvPr id="9" name="TextBox 8"/>
+          <p:cNvSpPr txBox="1"/>
+          <p:nvPr/>
+        </p:nvSpPr>
+        <p:spPr>
+          <a:xfrm>
+            <a:off x="4434840" y="1673352"/>
+            <a:ext cx="3246120" cy="621792"/>
+          </a:xfrm>
+          <a:prstGeom prst="rect">
+            <a:avLst/>
+          </a:prstGeom>
+          <a:noFill/>
+        </p:spPr>
+        <p:txBody>
+          <a:bodyPr wrap="square" anchor="ctr">
+            <a:spAutoFit/>
+          </a:bodyPr>
+          <a:lstStyle/>
+          <a:p>
+            <a:pPr algn="l"/>
+            <a:r>
+              <a:rPr sz="1200" b="0">
+                <a:solidFill>
+                  <a:srgbClr val="1C202B"/>
+                </a:solidFill>
+                <a:latin typeface="Calibri"/>
+              </a:rPr>
+              <a:t>Même traitement : 4 rendez-vous.
+Chaque aller fait 60 km, sur 2 mois.
+→ Accord préalable en principe nécessaire.</a:t>
+            </a:r>
+          </a:p>
+        </p:txBody>
+      </p:sp>
+      <p:sp>
+        <p:nvSpPr>
+          <p:cNvPr id="10" name="Rectangle 9"/>
+          <p:cNvSpPr/>
+          <p:nvPr/>
+        </p:nvSpPr>
+        <p:spPr>
+          <a:xfrm>
+            <a:off x="411480" y="2724912"/>
+            <a:ext cx="7498079" cy="1051560"/>
+          </a:xfrm>
+          <a:prstGeom prst="rect">
+            <a:avLst/>
+          </a:prstGeom>
+          <a:solidFill>
+            <a:srgbClr val="FFFFFF"/>
+          </a:solidFill>
+          <a:ln>
+            <a:solidFill>
+              <a:srgbClr val="FFFFFF"/>
+            </a:solidFill>
+          </a:ln>
+        </p:spPr>
+        <p:style>
+          <a:lnRef idx="1">
+            <a:schemeClr val="accent1"/>
+          </a:lnRef>
+          <a:fillRef idx="3">
+            <a:schemeClr val="accent1"/>
+          </a:fillRef>
+          <a:effectRef idx="2">
+            <a:schemeClr val="accent1"/>
+          </a:effectRef>
+          <a:fontRef idx="minor">
+            <a:schemeClr val="lt1"/>
+          </a:fontRef>
+        </p:style>
+        <p:txBody>
+          <a:bodyPr rtlCol="0" anchor="ctr"/>
+          <a:lstStyle/>
+          <a:p>
+            <a:pPr algn="ctr"/>
+            <a:endParaRPr/>
+          </a:p>
+        </p:txBody>
+      </p:sp>
+      <p:sp>
+        <p:nvSpPr>
+          <p:cNvPr id="11" name="TextBox 10"/>
+          <p:cNvSpPr txBox="1"/>
+          <p:nvPr/>
+        </p:nvSpPr>
+        <p:spPr>
+          <a:xfrm>
+            <a:off x="594360" y="2816352"/>
+            <a:ext cx="7132320" cy="201168"/>
+          </a:xfrm>
+          <a:prstGeom prst="rect">
+            <a:avLst/>
+          </a:prstGeom>
+          <a:noFill/>
+        </p:spPr>
+        <p:txBody>
+          <a:bodyPr wrap="square" anchor="ctr">
+            <a:spAutoFit/>
+          </a:bodyPr>
+          <a:lstStyle/>
+          <a:p>
+            <a:pPr algn="l"/>
+            <a:r>
+              <a:rPr sz="1300" b="1">
+                <a:solidFill>
+                  <a:srgbClr val="CA521E"/>
+                </a:solidFill>
+                <a:latin typeface="Calibri"/>
+              </a:rPr>
+              <a:t>CONTRE-EXEMPLES</a:t>
+            </a:r>
+          </a:p>
+        </p:txBody>
+      </p:sp>
+      <p:sp>
+        <p:nvSpPr>
+          <p:cNvPr id="12" name="TextBox 11"/>
+          <p:cNvSpPr txBox="1"/>
+          <p:nvPr/>
+        </p:nvSpPr>
+        <p:spPr>
+          <a:xfrm>
+            <a:off x="594360" y="3099816"/>
+            <a:ext cx="7086600" cy="502920"/>
+          </a:xfrm>
+          <a:prstGeom prst="rect">
+            <a:avLst/>
+          </a:prstGeom>
+          <a:noFill/>
+        </p:spPr>
+        <p:txBody>
+          <a:bodyPr wrap="square" anchor="ctr">
+            <a:spAutoFit/>
+          </a:bodyPr>
+          <a:lstStyle/>
+          <a:p>
+            <a:pPr algn="l"/>
+            <a:r>
+              <a:rPr sz="1100" b="0">
+                <a:solidFill>
+                  <a:srgbClr val="1C202B"/>
+                </a:solidFill>
+                <a:latin typeface="Calibri"/>
+              </a:rPr>
+              <a:t>• 1 trajet de 100 km aller → pas de DAP pour le critère « &gt;150 km ».
+• 4 trajets de 30 km aller → pas le critère « série &gt;50 km ».
+• Exception : Ameli indique que la DAP n’est pas nécessaire pour les séries liées à une ALD.</a:t>
+            </a:r>
+          </a:p>
+        </p:txBody>
+      </p:sp>
+      <p:sp>
+        <p:nvSpPr>
+          <p:cNvPr id="13" name="TextBox 12"/>
+          <p:cNvSpPr txBox="1"/>
+          <p:nvPr/>
+        </p:nvSpPr>
+        <p:spPr>
+          <a:xfrm>
+            <a:off x="411480" y="4407408"/>
+            <a:ext cx="7498079" cy="164592"/>
+          </a:xfrm>
+          <a:prstGeom prst="rect">
+            <a:avLst/>
+          </a:prstGeom>
+          <a:noFill/>
+        </p:spPr>
+        <p:txBody>
+          <a:bodyPr wrap="square" anchor="ctr">
+            <a:spAutoFit/>
+          </a:bodyPr>
+          <a:lstStyle/>
+          <a:p>
+            <a:pPr algn="l"/>
+            <a:r>
+              <a:rPr sz="800" b="0">
+                <a:solidFill>
+                  <a:srgbClr val="465269"/>
+                </a:solidFill>
+                <a:latin typeface="Calibri"/>
+              </a:rPr>
+              <a:t>FTRANSPORT - SERVICES PRO  •  Convention CPAM — exemples pédagogiques</a:t>
+            </a:r>
+          </a:p>
+        </p:txBody>
+      </p:sp>
+      <p:sp>
+        <p:nvSpPr>
+          <p:cNvPr id="14" name="TextBox 13"/>
+          <p:cNvSpPr txBox="1"/>
+          <p:nvPr/>
+        </p:nvSpPr>
+        <p:spPr>
+          <a:xfrm>
+            <a:off x="7817327" y="4389120"/>
+            <a:ext cx="293400" cy="182880"/>
+          </a:xfrm>
+          <a:prstGeom prst="rect">
+            <a:avLst/>
+          </a:prstGeom>
+          <a:noFill/>
+        </p:spPr>
+        <p:txBody>
+          <a:bodyPr wrap="square" anchor="ctr">
+            <a:spAutoFit/>
+          </a:bodyPr>
+          <a:lstStyle/>
+          <a:p>
+            <a:pPr algn="r"/>
+            <a:r>
+              <a:rPr sz="800" b="0">
+                <a:solidFill>
+                  <a:srgbClr val="465269"/>
+                </a:solidFill>
+                <a:latin typeface="Calibri"/>
+              </a:rPr>
+              <a:t>11</a:t>
+            </a:r>
+          </a:p>
+        </p:txBody>
+      </p:sp>
+    </p:spTree>
+  </p:cSld>
+  <p:clrMapOvr>
+    <a:masterClrMapping/>
+  </p:clrMapOvr>
+</p:sld>
+</file>
+
+<file path=ppt/slides/slide12.xml><?xml version="1.0" encoding="utf-8"?>
+<p:sld xmlns:a="http://schemas.openxmlformats.org/drawingml/2006/main" xmlns:r="http://schemas.openxmlformats.org/officeDocument/2006/relationships" xmlns:p="http://schemas.openxmlformats.org/presentationml/2006/main">
+  <p:cSld>
+    <p:spTree>
+      <p:nvGrpSpPr>
+        <p:cNvPr id="1" name=""/>
+        <p:cNvGrpSpPr/>
+        <p:nvPr/>
+      </p:nvGrpSpPr>
+      <p:grpSpPr>
+        <a:xfrm>
+          <a:off x="0" y="0"/>
+          <a:ext cx="0" cy="0"/>
+          <a:chOff x="0" y="0"/>
+          <a:chExt cx="0" cy="0"/>
+        </a:xfrm>
+      </p:grpSpPr>
+      <p:sp>
+        <p:nvSpPr>
+          <p:cNvPr id="2" name="TextBox 1"/>
+          <p:cNvSpPr txBox="1"/>
+          <p:nvPr/>
+        </p:nvSpPr>
+        <p:spPr>
+          <a:xfrm>
+            <a:off x="438912" y="164592"/>
+            <a:ext cx="2926080" cy="274320"/>
+          </a:xfrm>
+          <a:prstGeom prst="rect">
+            <a:avLst/>
+          </a:prstGeom>
+          <a:noFill/>
+        </p:spPr>
+        <p:txBody>
+          <a:bodyPr wrap="square" anchor="ctr">
+            <a:spAutoFit/>
+          </a:bodyPr>
+          <a:lstStyle/>
+          <a:p>
+            <a:pPr algn="l"/>
+            <a:r>
+              <a:rPr sz="1100" b="1">
+                <a:solidFill>
+                  <a:srgbClr val="E8B22D"/>
+                </a:solidFill>
+                <a:latin typeface="Calibri"/>
+              </a:rPr>
+              <a:t>PARTIE 3 — COURS</a:t>
+            </a:r>
+          </a:p>
+        </p:txBody>
+      </p:sp>
+      <p:sp>
+        <p:nvSpPr>
+          <p:cNvPr id="3" name="TextBox 2"/>
+          <p:cNvSpPr txBox="1"/>
+          <p:nvPr/>
+        </p:nvSpPr>
+        <p:spPr>
+          <a:xfrm>
+            <a:off x="438912" y="530352"/>
+            <a:ext cx="7498079" cy="502920"/>
+          </a:xfrm>
+          <a:prstGeom prst="rect">
+            <a:avLst/>
+          </a:prstGeom>
+          <a:noFill/>
+        </p:spPr>
+        <p:txBody>
+          <a:bodyPr wrap="square" anchor="ctr">
+            <a:spAutoFit/>
+          </a:bodyPr>
+          <a:lstStyle/>
+          <a:p>
+            <a:pPr algn="l"/>
+            <a:r>
+              <a:rPr sz="2500" b="1">
+                <a:solidFill>
+                  <a:srgbClr val="1C202B"/>
+                </a:solidFill>
+                <a:latin typeface="Georgia"/>
+              </a:rPr>
+              <a:t>Ne pas mélanger : −5 % et +25/+50 %</a:t>
+            </a:r>
+          </a:p>
+        </p:txBody>
+      </p:sp>
+      <p:sp>
+        <p:nvSpPr>
+          <p:cNvPr id="4" name="Rectangle 3"/>
+          <p:cNvSpPr/>
+          <p:nvPr/>
+        </p:nvSpPr>
+        <p:spPr>
+          <a:xfrm>
+            <a:off x="411480" y="1234440"/>
+            <a:ext cx="3611880" cy="2423160"/>
+          </a:xfrm>
+          <a:prstGeom prst="rect">
+            <a:avLst/>
+          </a:prstGeom>
+          <a:solidFill>
+            <a:srgbClr val="EBF4FC"/>
+          </a:solidFill>
+          <a:ln>
+            <a:solidFill>
+              <a:srgbClr val="EBF4FC"/>
+            </a:solidFill>
+          </a:ln>
+        </p:spPr>
+        <p:style>
+          <a:lnRef idx="1">
+            <a:schemeClr val="accent1"/>
+          </a:lnRef>
+          <a:fillRef idx="3">
+            <a:schemeClr val="accent1"/>
+          </a:fillRef>
+          <a:effectRef idx="2">
+            <a:schemeClr val="accent1"/>
+          </a:effectRef>
+          <a:fontRef idx="minor">
+            <a:schemeClr val="lt1"/>
+          </a:fontRef>
+        </p:style>
+        <p:txBody>
+          <a:bodyPr rtlCol="0" anchor="ctr"/>
+          <a:lstStyle/>
+          <a:p>
+            <a:pPr algn="ctr"/>
+            <a:endParaRPr/>
+          </a:p>
+        </p:txBody>
+      </p:sp>
+      <p:sp>
+        <p:nvSpPr>
+          <p:cNvPr id="5" name="TextBox 4"/>
+          <p:cNvSpPr txBox="1"/>
+          <p:nvPr/>
+        </p:nvSpPr>
+        <p:spPr>
+          <a:xfrm>
+            <a:off x="621792" y="1417320"/>
+            <a:ext cx="3200400" cy="274320"/>
+          </a:xfrm>
+          <a:prstGeom prst="rect">
+            <a:avLst/>
+          </a:prstGeom>
+          <a:noFill/>
+        </p:spPr>
+        <p:txBody>
+          <a:bodyPr wrap="square" anchor="ctr">
+            <a:spAutoFit/>
+          </a:bodyPr>
+          <a:lstStyle/>
+          <a:p>
+            <a:pPr algn="l"/>
+            <a:r>
+              <a:rPr sz="1700" b="1">
+                <a:solidFill>
+                  <a:srgbClr val="2B6FB8"/>
+                </a:solidFill>
+                <a:latin typeface="Calibri"/>
+              </a:rPr>
+              <a:t>−5 % = TRANSPORT PARTAGÉ</a:t>
+            </a:r>
+          </a:p>
+        </p:txBody>
+      </p:sp>
+      <p:sp>
+        <p:nvSpPr>
+          <p:cNvPr id="6" name="TextBox 5"/>
+          <p:cNvSpPr txBox="1"/>
+          <p:nvPr/>
+        </p:nvSpPr>
+        <p:spPr>
+          <a:xfrm>
+            <a:off x="621792" y="1810512"/>
+            <a:ext cx="3154680" cy="1481328"/>
+          </a:xfrm>
+          <a:prstGeom prst="rect">
+            <a:avLst/>
+          </a:prstGeom>
+          <a:noFill/>
+        </p:spPr>
+        <p:txBody>
+          <a:bodyPr wrap="square" anchor="ctr">
+            <a:spAutoFit/>
+          </a:bodyPr>
+          <a:lstStyle/>
+          <a:p>
+            <a:pPr algn="l"/>
+            <a:r>
+              <a:rPr sz="1200" b="0">
+                <a:solidFill>
+                  <a:srgbClr val="1C202B"/>
+                </a:solidFill>
+                <a:latin typeface="Calibri"/>
+              </a:rPr>
+              <a:t>A et B partagent une partie de la course. Puis A reste seul sur une longue distance.
+→ Le −5 % concerne la facture de A si le seuil local est atteint.
+→ Ce n’est PAS une majoration d’hospitalisation.</a:t>
+            </a:r>
+          </a:p>
+        </p:txBody>
+      </p:sp>
+      <p:sp>
+        <p:nvSpPr>
+          <p:cNvPr id="7" name="Rectangle 6"/>
+          <p:cNvSpPr/>
+          <p:nvPr/>
+        </p:nvSpPr>
+        <p:spPr>
+          <a:xfrm>
+            <a:off x="4251960" y="1234440"/>
+            <a:ext cx="3611880" cy="2423160"/>
+          </a:xfrm>
+          <a:prstGeom prst="rect">
+            <a:avLst/>
+          </a:prstGeom>
+          <a:solidFill>
+            <a:srgbClr val="FDF2EA"/>
+          </a:solidFill>
+          <a:ln>
+            <a:solidFill>
+              <a:srgbClr val="FDF2EA"/>
+            </a:solidFill>
+          </a:ln>
+        </p:spPr>
+        <p:style>
+          <a:lnRef idx="1">
+            <a:schemeClr val="accent1"/>
+          </a:lnRef>
+          <a:fillRef idx="3">
+            <a:schemeClr val="accent1"/>
+          </a:fillRef>
+          <a:effectRef idx="2">
+            <a:schemeClr val="accent1"/>
+          </a:effectRef>
+          <a:fontRef idx="minor">
+            <a:schemeClr val="lt1"/>
+          </a:fontRef>
+        </p:style>
+        <p:txBody>
+          <a:bodyPr rtlCol="0" anchor="ctr"/>
+          <a:lstStyle/>
+          <a:p>
+            <a:pPr algn="ctr"/>
+            <a:endParaRPr/>
+          </a:p>
+        </p:txBody>
+      </p:sp>
+      <p:sp>
+        <p:nvSpPr>
+          <p:cNvPr id="8" name="TextBox 7"/>
+          <p:cNvSpPr txBox="1"/>
+          <p:nvPr/>
+        </p:nvSpPr>
+        <p:spPr>
+          <a:xfrm>
+            <a:off x="4462272" y="1417320"/>
+            <a:ext cx="3200400" cy="274320"/>
+          </a:xfrm>
+          <a:prstGeom prst="rect">
+            <a:avLst/>
+          </a:prstGeom>
+          <a:noFill/>
+        </p:spPr>
+        <p:txBody>
+          <a:bodyPr wrap="square" anchor="ctr">
+            <a:spAutoFit/>
+          </a:bodyPr>
+          <a:lstStyle/>
+          <a:p>
+            <a:pPr algn="l"/>
+            <a:r>
+              <a:rPr sz="1700" b="1">
+                <a:solidFill>
+                  <a:srgbClr val="CA521E"/>
+                </a:solidFill>
+                <a:latin typeface="Calibri"/>
+              </a:rPr>
+              <a:t>+25/+50 % = HOSPITALISATION</a:t>
+            </a:r>
+          </a:p>
+        </p:txBody>
+      </p:sp>
+      <p:sp>
+        <p:nvSpPr>
+          <p:cNvPr id="9" name="TextBox 8"/>
+          <p:cNvSpPr txBox="1"/>
+          <p:nvPr/>
+        </p:nvSpPr>
+        <p:spPr>
+          <a:xfrm>
+            <a:off x="4462272" y="1810512"/>
+            <a:ext cx="3154680" cy="1481328"/>
+          </a:xfrm>
+          <a:prstGeom prst="rect">
+            <a:avLst/>
+          </a:prstGeom>
+          <a:noFill/>
+        </p:spPr>
+        <p:txBody>
+          <a:bodyPr wrap="square" anchor="ctr">
+            <a:spAutoFit/>
+          </a:bodyPr>
+          <a:lstStyle/>
+          <a:p>
+            <a:pPr algn="l"/>
+            <a:r>
+              <a:rPr sz="1200" b="0">
+                <a:solidFill>
+                  <a:srgbClr val="1C202B"/>
+                </a:solidFill>
+                <a:latin typeface="Calibri"/>
+              </a:rPr>
+              <a:t>Tu prends un patient pour une entrée/sortie d’hospitalisation et l’aller ou le retour se fait à vide.
+→ &lt;50 km en charge : +25 %.
+→ ≥50 km : +50 %.
+→ Sur le tarif kilométrique.</a:t>
+            </a:r>
+          </a:p>
+        </p:txBody>
+      </p:sp>
+      <p:sp>
+        <p:nvSpPr>
+          <p:cNvPr id="10" name="TextBox 9"/>
+          <p:cNvSpPr txBox="1"/>
+          <p:nvPr/>
+        </p:nvSpPr>
+        <p:spPr>
+          <a:xfrm>
+            <a:off x="502920" y="3822191"/>
+            <a:ext cx="7269480" cy="320040"/>
+          </a:xfrm>
+          <a:prstGeom prst="rect">
+            <a:avLst/>
+          </a:prstGeom>
+          <a:noFill/>
+        </p:spPr>
+        <p:txBody>
+          <a:bodyPr wrap="square" anchor="ctr">
+            <a:spAutoFit/>
+          </a:bodyPr>
+          <a:lstStyle/>
+          <a:p>
+            <a:pPr algn="ctr"/>
+            <a:r>
+              <a:rPr sz="1100" b="1">
+                <a:solidFill>
+                  <a:srgbClr val="1C202B"/>
+                </a:solidFill>
+                <a:latin typeface="Calibri"/>
+              </a:rPr>
+              <a:t>Deux mécanismes différents : l’un réduit une facture de transport partagé, l’autre majore le kilométrique d’hospitalisation.</a:t>
+            </a:r>
+          </a:p>
+        </p:txBody>
+      </p:sp>
+      <p:sp>
+        <p:nvSpPr>
+          <p:cNvPr id="11" name="TextBox 10"/>
+          <p:cNvSpPr txBox="1"/>
+          <p:nvPr/>
+        </p:nvSpPr>
+        <p:spPr>
+          <a:xfrm>
+            <a:off x="411480" y="4407408"/>
+            <a:ext cx="7498079" cy="164592"/>
+          </a:xfrm>
+          <a:prstGeom prst="rect">
+            <a:avLst/>
+          </a:prstGeom>
+          <a:noFill/>
+        </p:spPr>
+        <p:txBody>
+          <a:bodyPr wrap="square" anchor="ctr">
+            <a:spAutoFit/>
+          </a:bodyPr>
+          <a:lstStyle/>
+          <a:p>
+            <a:pPr algn="l"/>
+            <a:r>
+              <a:rPr sz="800" b="0">
+                <a:solidFill>
+                  <a:srgbClr val="465269"/>
+                </a:solidFill>
+                <a:latin typeface="Calibri"/>
+              </a:rPr>
+              <a:t>FTRANSPORT - SERVICES PRO  •  Convention CPAM — exemples pédagogiques</a:t>
+            </a:r>
+          </a:p>
+        </p:txBody>
+      </p:sp>
+      <p:sp>
+        <p:nvSpPr>
+          <p:cNvPr id="12" name="TextBox 11"/>
+          <p:cNvSpPr txBox="1"/>
+          <p:nvPr/>
+        </p:nvSpPr>
+        <p:spPr>
+          <a:xfrm>
+            <a:off x="7817327" y="4389120"/>
+            <a:ext cx="293400" cy="182880"/>
+          </a:xfrm>
+          <a:prstGeom prst="rect">
+            <a:avLst/>
+          </a:prstGeom>
+          <a:noFill/>
+        </p:spPr>
+        <p:txBody>
+          <a:bodyPr wrap="square" anchor="ctr">
+            <a:spAutoFit/>
+          </a:bodyPr>
+          <a:lstStyle/>
+          <a:p>
+            <a:pPr algn="r"/>
+            <a:r>
+              <a:rPr sz="800" b="0">
+                <a:solidFill>
+                  <a:srgbClr val="465269"/>
+                </a:solidFill>
+                <a:latin typeface="Calibri"/>
+              </a:rPr>
+              <a:t>12</a:t>
+            </a:r>
+          </a:p>
+        </p:txBody>
+      </p:sp>
+    </p:spTree>
+  </p:cSld>
+  <p:clrMapOvr>
+    <a:masterClrMapping/>
+  </p:clrMapOvr>
+</p:sld>
+</file>
+
 <file path=ppt/slides/slide2.xml><?xml version="1.0" encoding="utf-8"?>
 <p:sld xmlns:a="http://schemas.openxmlformats.org/drawingml/2006/main" xmlns:r="http://schemas.openxmlformats.org/officeDocument/2006/relationships" xmlns:p="http://schemas.openxmlformats.org/presentationml/2006/main">
   <p:cSld name="Slide 2">
@@ -6027,119 +7022,84 @@
       </p:grpSpPr>
       <p:sp>
         <p:nvSpPr>
-          <p:cNvPr id="2" name="Shape 0"/>
-          <p:cNvSpPr/>
-          <p:nvPr/>
-        </p:nvSpPr>
-        <p:spPr>
-          <a:xfrm>
-            <a:off x="0" y="0"/>
-            <a:ext cx="9144000" cy="502920"/>
-          </a:xfrm>
-          <a:prstGeom prst="rect">
-            <a:avLst/>
-          </a:prstGeom>
-          <a:solidFill>
-            <a:srgbClr val="283A5E"/>
-          </a:solidFill>
-          <a:ln/>
-        </p:spPr>
-        <p:txBody>
-          <a:bodyPr/>
-          <a:lstStyle/>
-          <a:p>
-            <a:endParaRPr lang="fr-FR"/>
-          </a:p>
-        </p:txBody>
-      </p:sp>
-      <p:sp>
-        <p:nvSpPr>
-          <p:cNvPr id="3" name="Text 1"/>
-          <p:cNvSpPr/>
-          <p:nvPr/>
-        </p:nvSpPr>
-        <p:spPr>
-          <a:xfrm>
-            <a:off x="457200" y="0"/>
-            <a:ext cx="8229600" cy="502920"/>
-          </a:xfrm>
-          <a:prstGeom prst="rect">
-            <a:avLst/>
-          </a:prstGeom>
-          <a:noFill/>
-          <a:ln/>
-        </p:spPr>
-        <p:txBody>
-          <a:bodyPr wrap="square" rtlCol="0" anchor="ctr"/>
-          <a:lstStyle/>
-          <a:p>
-            <a:pPr marL="0" indent="0">
-              <a:buNone/>
-            </a:pPr>
-            <a:r>
-              <a:rPr lang="en-US" sz="900" b="1" kern="0" spc="200" dirty="0">
-                <a:solidFill>
-                  <a:srgbClr val="D4A843"/>
-                </a:solidFill>
-                <a:latin typeface="Calibri" pitchFamily="34" charset="0"/>
-                <a:ea typeface="Calibri" pitchFamily="34" charset="-122"/>
-                <a:cs typeface="Calibri" pitchFamily="34" charset="-120"/>
+          <p:cNvPr id="2" name="TextBox 1"/>
+          <p:cNvSpPr txBox="1"/>
+          <p:nvPr/>
+        </p:nvSpPr>
+        <p:spPr>
+          <a:xfrm>
+            <a:off x="438912" y="164592"/>
+            <a:ext cx="2926080" cy="274320"/>
+          </a:xfrm>
+          <a:prstGeom prst="rect">
+            <a:avLst/>
+          </a:prstGeom>
+          <a:noFill/>
+        </p:spPr>
+        <p:txBody>
+          <a:bodyPr wrap="square" anchor="ctr">
+            <a:spAutoFit/>
+          </a:bodyPr>
+          <a:lstStyle/>
+          <a:p>
+            <a:pPr algn="l"/>
+            <a:r>
+              <a:rPr sz="1100" b="1">
+                <a:solidFill>
+                  <a:srgbClr val="E8B22D"/>
+                </a:solidFill>
+                <a:latin typeface="Calibri"/>
               </a:rPr>
               <a:t>PARTIE 3 — COURS</a:t>
             </a:r>
-            <a:endParaRPr lang="en-US" sz="900" dirty="0"/>
-          </a:p>
-        </p:txBody>
-      </p:sp>
-      <p:sp>
-        <p:nvSpPr>
-          <p:cNvPr id="4" name="Text 2"/>
-          <p:cNvSpPr/>
-          <p:nvPr/>
-        </p:nvSpPr>
-        <p:spPr>
-          <a:xfrm>
-            <a:off x="457200" y="640080"/>
-            <a:ext cx="8229600" cy="411480"/>
-          </a:xfrm>
-          <a:prstGeom prst="rect">
-            <a:avLst/>
-          </a:prstGeom>
-          <a:noFill/>
-          <a:ln/>
-        </p:spPr>
-        <p:txBody>
-          <a:bodyPr wrap="square" rtlCol="0" anchor="ctr"/>
-          <a:lstStyle/>
-          <a:p>
-            <a:pPr marL="0" indent="0">
-              <a:buNone/>
-            </a:pPr>
-            <a:r>
-              <a:rPr lang="en-US" sz="1800" b="1" dirty="0">
-                <a:solidFill>
-                  <a:srgbClr val="1A202C"/>
-                </a:solidFill>
-                <a:latin typeface="Georgia" pitchFamily="34" charset="0"/>
-                <a:ea typeface="Georgia" pitchFamily="34" charset="-122"/>
-                <a:cs typeface="Georgia" pitchFamily="34" charset="-120"/>
-              </a:rPr>
-              <a:t>Abattements — Transport partagé</a:t>
-            </a:r>
-            <a:endParaRPr lang="en-US" sz="1800" dirty="0"/>
-          </a:p>
-        </p:txBody>
-      </p:sp>
-      <p:sp>
-        <p:nvSpPr>
-          <p:cNvPr id="5" name="Shape 3"/>
-          <p:cNvSpPr/>
-          <p:nvPr/>
-        </p:nvSpPr>
-        <p:spPr>
-          <a:xfrm>
-            <a:off x="457200" y="1188720"/>
-            <a:ext cx="1965960" cy="1828800"/>
+          </a:p>
+        </p:txBody>
+      </p:sp>
+      <p:sp>
+        <p:nvSpPr>
+          <p:cNvPr id="3" name="TextBox 2"/>
+          <p:cNvSpPr txBox="1"/>
+          <p:nvPr/>
+        </p:nvSpPr>
+        <p:spPr>
+          <a:xfrm>
+            <a:off x="438912" y="530352"/>
+            <a:ext cx="7498079" cy="502920"/>
+          </a:xfrm>
+          <a:prstGeom prst="rect">
+            <a:avLst/>
+          </a:prstGeom>
+          <a:noFill/>
+        </p:spPr>
+        <p:txBody>
+          <a:bodyPr wrap="square" anchor="ctr">
+            <a:spAutoFit/>
+          </a:bodyPr>
+          <a:lstStyle/>
+          <a:p>
+            <a:pPr algn="l"/>
+            <a:r>
+              <a:rPr sz="2500" b="1">
+                <a:solidFill>
+                  <a:srgbClr val="1C202B"/>
+                </a:solidFill>
+                <a:latin typeface="Georgia"/>
+              </a:rPr>
+              <a:t>Transport partagé — comprendre les abattements</a:t>
+            </a:r>
+          </a:p>
+        </p:txBody>
+      </p:sp>
+      <p:sp>
+        <p:nvSpPr>
+          <p:cNvPr id="4" name="Rectangle 3"/>
+          <p:cNvSpPr/>
+          <p:nvPr/>
+        </p:nvSpPr>
+        <p:spPr>
+          <a:xfrm>
+            <a:off x="365760" y="1234440"/>
+            <a:ext cx="1828800" cy="1143000"/>
           </a:xfrm>
           <a:prstGeom prst="rect">
             <a:avLst/>
@@ -6147,177 +7107,196 @@
           <a:solidFill>
             <a:srgbClr val="FFFFFF"/>
           </a:solidFill>
-          <a:ln/>
-          <a:effectLst>
-            <a:outerShdw blurRad="50800" dist="25400" dir="8100000" algn="bl" rotWithShape="0">
-              <a:srgbClr val="000000">
-                <a:alpha val="8000"/>
-              </a:srgbClr>
-            </a:outerShdw>
-          </a:effectLst>
-        </p:spPr>
-        <p:txBody>
-          <a:bodyPr/>
-          <a:lstStyle/>
-          <a:p>
-            <a:endParaRPr lang="fr-FR"/>
-          </a:p>
-        </p:txBody>
-      </p:sp>
-      <p:sp>
-        <p:nvSpPr>
-          <p:cNvPr id="6" name="Shape 4"/>
-          <p:cNvSpPr/>
-          <p:nvPr/>
-        </p:nvSpPr>
-        <p:spPr>
-          <a:xfrm>
-            <a:off x="457200" y="1188720"/>
-            <a:ext cx="1965960" cy="54864"/>
+          <a:ln>
+            <a:solidFill>
+              <a:srgbClr val="FFFFFF"/>
+            </a:solidFill>
+          </a:ln>
+        </p:spPr>
+        <p:style>
+          <a:lnRef idx="1">
+            <a:schemeClr val="accent1"/>
+          </a:lnRef>
+          <a:fillRef idx="3">
+            <a:schemeClr val="accent1"/>
+          </a:fillRef>
+          <a:effectRef idx="2">
+            <a:schemeClr val="accent1"/>
+          </a:effectRef>
+          <a:fontRef idx="minor">
+            <a:schemeClr val="lt1"/>
+          </a:fontRef>
+        </p:style>
+        <p:txBody>
+          <a:bodyPr rtlCol="0" anchor="ctr"/>
+          <a:lstStyle/>
+          <a:p>
+            <a:pPr algn="ctr"/>
+            <a:endParaRPr/>
+          </a:p>
+        </p:txBody>
+      </p:sp>
+      <p:sp>
+        <p:nvSpPr>
+          <p:cNvPr id="5" name="Rectangle 4"/>
+          <p:cNvSpPr/>
+          <p:nvPr/>
+        </p:nvSpPr>
+        <p:spPr>
+          <a:xfrm>
+            <a:off x="365760" y="1234440"/>
+            <a:ext cx="1828800" cy="64008"/>
           </a:xfrm>
           <a:prstGeom prst="rect">
             <a:avLst/>
           </a:prstGeom>
           <a:solidFill>
-            <a:srgbClr val="0D9488"/>
+            <a:srgbClr val="0F978B"/>
           </a:solidFill>
-          <a:ln/>
-        </p:spPr>
-        <p:txBody>
-          <a:bodyPr/>
-          <a:lstStyle/>
-          <a:p>
-            <a:endParaRPr lang="fr-FR"/>
-          </a:p>
-        </p:txBody>
-      </p:sp>
-      <p:sp>
-        <p:nvSpPr>
-          <p:cNvPr id="7" name="Text 5"/>
-          <p:cNvSpPr/>
-          <p:nvPr/>
-        </p:nvSpPr>
-        <p:spPr>
-          <a:xfrm>
-            <a:off x="457200" y="1371600"/>
-            <a:ext cx="1965960" cy="640080"/>
-          </a:xfrm>
-          <a:prstGeom prst="rect">
-            <a:avLst/>
-          </a:prstGeom>
-          <a:noFill/>
-          <a:ln/>
-        </p:spPr>
-        <p:txBody>
-          <a:bodyPr wrap="square" rtlCol="0" anchor="ctr"/>
-          <a:lstStyle/>
-          <a:p>
-            <a:pPr marL="0" indent="0" algn="ctr">
-              <a:buNone/>
-            </a:pPr>
-            <a:r>
-              <a:rPr lang="en-US" sz="3600" b="1" dirty="0">
-                <a:solidFill>
-                  <a:srgbClr val="0D9488"/>
-                </a:solidFill>
-                <a:latin typeface="Georgia" pitchFamily="34" charset="0"/>
-                <a:ea typeface="Georgia" pitchFamily="34" charset="-122"/>
-                <a:cs typeface="Georgia" pitchFamily="34" charset="-120"/>
-              </a:rPr>
-              <a:t>23%</a:t>
-            </a:r>
-            <a:endParaRPr lang="en-US" sz="3600" dirty="0"/>
-          </a:p>
-        </p:txBody>
-      </p:sp>
-      <p:sp>
-        <p:nvSpPr>
-          <p:cNvPr id="8" name="Text 6"/>
-          <p:cNvSpPr/>
-          <p:nvPr/>
-        </p:nvSpPr>
-        <p:spPr>
-          <a:xfrm>
-            <a:off x="548640" y="2103120"/>
-            <a:ext cx="1783080" cy="457200"/>
-          </a:xfrm>
-          <a:prstGeom prst="rect">
-            <a:avLst/>
-          </a:prstGeom>
-          <a:noFill/>
-          <a:ln/>
-        </p:spPr>
-        <p:txBody>
-          <a:bodyPr wrap="square" rtlCol="0" anchor="ctr"/>
-          <a:lstStyle/>
-          <a:p>
-            <a:pPr marL="0" indent="0" algn="ctr">
-              <a:buNone/>
-            </a:pPr>
-            <a:r>
-              <a:rPr lang="en-US" sz="1000" b="1" dirty="0">
-                <a:solidFill>
-                  <a:srgbClr val="1A202C"/>
-                </a:solidFill>
-                <a:latin typeface="Calibri" pitchFamily="34" charset="0"/>
-                <a:ea typeface="Calibri" pitchFamily="34" charset="-122"/>
-                <a:cs typeface="Calibri" pitchFamily="34" charset="-120"/>
+          <a:ln>
+            <a:solidFill>
+              <a:srgbClr val="0F978B"/>
+            </a:solidFill>
+          </a:ln>
+        </p:spPr>
+        <p:style>
+          <a:lnRef idx="1">
+            <a:schemeClr val="accent1"/>
+          </a:lnRef>
+          <a:fillRef idx="3">
+            <a:schemeClr val="accent1"/>
+          </a:fillRef>
+          <a:effectRef idx="2">
+            <a:schemeClr val="accent1"/>
+          </a:effectRef>
+          <a:fontRef idx="minor">
+            <a:schemeClr val="lt1"/>
+          </a:fontRef>
+        </p:style>
+        <p:txBody>
+          <a:bodyPr rtlCol="0" anchor="ctr"/>
+          <a:lstStyle/>
+          <a:p>
+            <a:pPr algn="ctr"/>
+            <a:endParaRPr/>
+          </a:p>
+        </p:txBody>
+      </p:sp>
+      <p:sp>
+        <p:nvSpPr>
+          <p:cNvPr id="6" name="TextBox 5"/>
+          <p:cNvSpPr txBox="1"/>
+          <p:nvPr/>
+        </p:nvSpPr>
+        <p:spPr>
+          <a:xfrm>
+            <a:off x="438912" y="1399032"/>
+            <a:ext cx="1682496" cy="228600"/>
+          </a:xfrm>
+          <a:prstGeom prst="rect">
+            <a:avLst/>
+          </a:prstGeom>
+          <a:noFill/>
+        </p:spPr>
+        <p:txBody>
+          <a:bodyPr wrap="square" anchor="ctr">
+            <a:spAutoFit/>
+          </a:bodyPr>
+          <a:lstStyle/>
+          <a:p>
+            <a:pPr algn="ctr"/>
+            <a:r>
+              <a:rPr sz="1200" b="1">
+                <a:solidFill>
+                  <a:srgbClr val="1C202B"/>
+                </a:solidFill>
+                <a:latin typeface="Calibri"/>
               </a:rPr>
               <a:t>2 patients</a:t>
             </a:r>
-            <a:endParaRPr lang="en-US" sz="1000" dirty="0"/>
-          </a:p>
-        </p:txBody>
-      </p:sp>
-      <p:sp>
-        <p:nvSpPr>
-          <p:cNvPr id="9" name="Text 7"/>
-          <p:cNvSpPr/>
-          <p:nvPr/>
-        </p:nvSpPr>
-        <p:spPr>
-          <a:xfrm>
-            <a:off x="548640" y="2514600"/>
-            <a:ext cx="1783080" cy="274320"/>
-          </a:xfrm>
-          <a:prstGeom prst="rect">
-            <a:avLst/>
-          </a:prstGeom>
-          <a:noFill/>
-          <a:ln/>
-        </p:spPr>
-        <p:txBody>
-          <a:bodyPr wrap="square" rtlCol="0" anchor="ctr"/>
-          <a:lstStyle/>
-          <a:p>
-            <a:pPr marL="0" indent="0" algn="ctr">
-              <a:buNone/>
-            </a:pPr>
-            <a:r>
-              <a:rPr lang="en-US" sz="800" dirty="0">
-                <a:solidFill>
-                  <a:srgbClr val="4A5568"/>
-                </a:solidFill>
-                <a:latin typeface="Calibri" pitchFamily="34" charset="0"/>
-                <a:ea typeface="Calibri" pitchFamily="34" charset="-122"/>
-                <a:cs typeface="Calibri" pitchFamily="34" charset="-120"/>
-              </a:rPr>
-              <a:t>d'abattement</a:t>
-            </a:r>
-            <a:endParaRPr lang="en-US" sz="800" dirty="0"/>
-          </a:p>
-        </p:txBody>
-      </p:sp>
-      <p:sp>
-        <p:nvSpPr>
-          <p:cNvPr id="10" name="Shape 8"/>
-          <p:cNvSpPr/>
-          <p:nvPr/>
-        </p:nvSpPr>
-        <p:spPr>
-          <a:xfrm>
-            <a:off x="2606040" y="1188720"/>
-            <a:ext cx="1965960" cy="1828800"/>
+          </a:p>
+        </p:txBody>
+      </p:sp>
+      <p:sp>
+        <p:nvSpPr>
+          <p:cNvPr id="7" name="TextBox 6"/>
+          <p:cNvSpPr txBox="1"/>
+          <p:nvPr/>
+        </p:nvSpPr>
+        <p:spPr>
+          <a:xfrm>
+            <a:off x="438912" y="1645920"/>
+            <a:ext cx="1682496" cy="411480"/>
+          </a:xfrm>
+          <a:prstGeom prst="rect">
+            <a:avLst/>
+          </a:prstGeom>
+          <a:noFill/>
+        </p:spPr>
+        <p:txBody>
+          <a:bodyPr wrap="square" anchor="ctr">
+            <a:spAutoFit/>
+          </a:bodyPr>
+          <a:lstStyle/>
+          <a:p>
+            <a:pPr algn="ctr"/>
+            <a:r>
+              <a:rPr sz="2900" b="1">
+                <a:solidFill>
+                  <a:srgbClr val="0F978B"/>
+                </a:solidFill>
+                <a:latin typeface="Calibri"/>
+              </a:rPr>
+              <a:t>−23 %</a:t>
+            </a:r>
+          </a:p>
+        </p:txBody>
+      </p:sp>
+      <p:sp>
+        <p:nvSpPr>
+          <p:cNvPr id="8" name="TextBox 7"/>
+          <p:cNvSpPr txBox="1"/>
+          <p:nvPr/>
+        </p:nvSpPr>
+        <p:spPr>
+          <a:xfrm>
+            <a:off x="438912" y="2057400"/>
+            <a:ext cx="1682496" cy="164592"/>
+          </a:xfrm>
+          <a:prstGeom prst="rect">
+            <a:avLst/>
+          </a:prstGeom>
+          <a:noFill/>
+        </p:spPr>
+        <p:txBody>
+          <a:bodyPr wrap="square" anchor="ctr">
+            <a:spAutoFit/>
+          </a:bodyPr>
+          <a:lstStyle/>
+          <a:p>
+            <a:pPr algn="ctr"/>
+            <a:r>
+              <a:rPr sz="900" b="0">
+                <a:solidFill>
+                  <a:srgbClr val="465269"/>
+                </a:solidFill>
+                <a:latin typeface="Calibri"/>
+              </a:rPr>
+              <a:t>sur chaque facture</a:t>
+            </a:r>
+          </a:p>
+        </p:txBody>
+      </p:sp>
+      <p:sp>
+        <p:nvSpPr>
+          <p:cNvPr id="9" name="Rectangle 8"/>
+          <p:cNvSpPr/>
+          <p:nvPr/>
+        </p:nvSpPr>
+        <p:spPr>
+          <a:xfrm>
+            <a:off x="2331720" y="1234440"/>
+            <a:ext cx="1828800" cy="1143000"/>
           </a:xfrm>
           <a:prstGeom prst="rect">
             <a:avLst/>
@@ -6325,177 +7304,196 @@
           <a:solidFill>
             <a:srgbClr val="FFFFFF"/>
           </a:solidFill>
-          <a:ln/>
-          <a:effectLst>
-            <a:outerShdw blurRad="50800" dist="25400" dir="8100000" algn="bl" rotWithShape="0">
-              <a:srgbClr val="000000">
-                <a:alpha val="8000"/>
-              </a:srgbClr>
-            </a:outerShdw>
-          </a:effectLst>
-        </p:spPr>
-        <p:txBody>
-          <a:bodyPr/>
-          <a:lstStyle/>
-          <a:p>
-            <a:endParaRPr lang="fr-FR"/>
-          </a:p>
-        </p:txBody>
-      </p:sp>
-      <p:sp>
-        <p:nvSpPr>
-          <p:cNvPr id="11" name="Shape 9"/>
-          <p:cNvSpPr/>
-          <p:nvPr/>
-        </p:nvSpPr>
-        <p:spPr>
-          <a:xfrm>
-            <a:off x="2606040" y="1188720"/>
-            <a:ext cx="1965960" cy="54864"/>
+          <a:ln>
+            <a:solidFill>
+              <a:srgbClr val="FFFFFF"/>
+            </a:solidFill>
+          </a:ln>
+        </p:spPr>
+        <p:style>
+          <a:lnRef idx="1">
+            <a:schemeClr val="accent1"/>
+          </a:lnRef>
+          <a:fillRef idx="3">
+            <a:schemeClr val="accent1"/>
+          </a:fillRef>
+          <a:effectRef idx="2">
+            <a:schemeClr val="accent1"/>
+          </a:effectRef>
+          <a:fontRef idx="minor">
+            <a:schemeClr val="lt1"/>
+          </a:fontRef>
+        </p:style>
+        <p:txBody>
+          <a:bodyPr rtlCol="0" anchor="ctr"/>
+          <a:lstStyle/>
+          <a:p>
+            <a:pPr algn="ctr"/>
+            <a:endParaRPr/>
+          </a:p>
+        </p:txBody>
+      </p:sp>
+      <p:sp>
+        <p:nvSpPr>
+          <p:cNvPr id="10" name="Rectangle 9"/>
+          <p:cNvSpPr/>
+          <p:nvPr/>
+        </p:nvSpPr>
+        <p:spPr>
+          <a:xfrm>
+            <a:off x="2331720" y="1234440"/>
+            <a:ext cx="1828800" cy="64008"/>
           </a:xfrm>
           <a:prstGeom prst="rect">
             <a:avLst/>
           </a:prstGeom>
           <a:solidFill>
-            <a:srgbClr val="2B6CB0"/>
+            <a:srgbClr val="2B6FB8"/>
           </a:solidFill>
-          <a:ln/>
-        </p:spPr>
-        <p:txBody>
-          <a:bodyPr/>
-          <a:lstStyle/>
-          <a:p>
-            <a:endParaRPr lang="fr-FR"/>
-          </a:p>
-        </p:txBody>
-      </p:sp>
-      <p:sp>
-        <p:nvSpPr>
-          <p:cNvPr id="12" name="Text 10"/>
-          <p:cNvSpPr/>
-          <p:nvPr/>
-        </p:nvSpPr>
-        <p:spPr>
-          <a:xfrm>
-            <a:off x="2606040" y="1371600"/>
-            <a:ext cx="1965960" cy="640080"/>
-          </a:xfrm>
-          <a:prstGeom prst="rect">
-            <a:avLst/>
-          </a:prstGeom>
-          <a:noFill/>
-          <a:ln/>
-        </p:spPr>
-        <p:txBody>
-          <a:bodyPr wrap="square" rtlCol="0" anchor="ctr"/>
-          <a:lstStyle/>
-          <a:p>
-            <a:pPr marL="0" indent="0" algn="ctr">
-              <a:buNone/>
-            </a:pPr>
-            <a:r>
-              <a:rPr lang="en-US" sz="3600" b="1" dirty="0">
-                <a:solidFill>
-                  <a:srgbClr val="2B6CB0"/>
-                </a:solidFill>
-                <a:latin typeface="Georgia" pitchFamily="34" charset="0"/>
-                <a:ea typeface="Georgia" pitchFamily="34" charset="-122"/>
-                <a:cs typeface="Georgia" pitchFamily="34" charset="-120"/>
-              </a:rPr>
-              <a:t>35%</a:t>
-            </a:r>
-            <a:endParaRPr lang="en-US" sz="3600" dirty="0"/>
-          </a:p>
-        </p:txBody>
-      </p:sp>
-      <p:sp>
-        <p:nvSpPr>
-          <p:cNvPr id="13" name="Text 11"/>
-          <p:cNvSpPr/>
-          <p:nvPr/>
-        </p:nvSpPr>
-        <p:spPr>
-          <a:xfrm>
-            <a:off x="2697480" y="2103120"/>
-            <a:ext cx="1783080" cy="457200"/>
-          </a:xfrm>
-          <a:prstGeom prst="rect">
-            <a:avLst/>
-          </a:prstGeom>
-          <a:noFill/>
-          <a:ln/>
-        </p:spPr>
-        <p:txBody>
-          <a:bodyPr wrap="square" rtlCol="0" anchor="ctr"/>
-          <a:lstStyle/>
-          <a:p>
-            <a:pPr marL="0" indent="0" algn="ctr">
-              <a:buNone/>
-            </a:pPr>
-            <a:r>
-              <a:rPr lang="en-US" sz="1000" b="1" dirty="0">
-                <a:solidFill>
-                  <a:srgbClr val="1A202C"/>
-                </a:solidFill>
-                <a:latin typeface="Calibri" pitchFamily="34" charset="0"/>
-                <a:ea typeface="Calibri" pitchFamily="34" charset="-122"/>
-                <a:cs typeface="Calibri" pitchFamily="34" charset="-120"/>
+          <a:ln>
+            <a:solidFill>
+              <a:srgbClr val="2B6FB8"/>
+            </a:solidFill>
+          </a:ln>
+        </p:spPr>
+        <p:style>
+          <a:lnRef idx="1">
+            <a:schemeClr val="accent1"/>
+          </a:lnRef>
+          <a:fillRef idx="3">
+            <a:schemeClr val="accent1"/>
+          </a:fillRef>
+          <a:effectRef idx="2">
+            <a:schemeClr val="accent1"/>
+          </a:effectRef>
+          <a:fontRef idx="minor">
+            <a:schemeClr val="lt1"/>
+          </a:fontRef>
+        </p:style>
+        <p:txBody>
+          <a:bodyPr rtlCol="0" anchor="ctr"/>
+          <a:lstStyle/>
+          <a:p>
+            <a:pPr algn="ctr"/>
+            <a:endParaRPr/>
+          </a:p>
+        </p:txBody>
+      </p:sp>
+      <p:sp>
+        <p:nvSpPr>
+          <p:cNvPr id="11" name="TextBox 10"/>
+          <p:cNvSpPr txBox="1"/>
+          <p:nvPr/>
+        </p:nvSpPr>
+        <p:spPr>
+          <a:xfrm>
+            <a:off x="2404872" y="1399032"/>
+            <a:ext cx="1682496" cy="228600"/>
+          </a:xfrm>
+          <a:prstGeom prst="rect">
+            <a:avLst/>
+          </a:prstGeom>
+          <a:noFill/>
+        </p:spPr>
+        <p:txBody>
+          <a:bodyPr wrap="square" anchor="ctr">
+            <a:spAutoFit/>
+          </a:bodyPr>
+          <a:lstStyle/>
+          <a:p>
+            <a:pPr algn="ctr"/>
+            <a:r>
+              <a:rPr sz="1200" b="1">
+                <a:solidFill>
+                  <a:srgbClr val="1C202B"/>
+                </a:solidFill>
+                <a:latin typeface="Calibri"/>
               </a:rPr>
               <a:t>3 patients</a:t>
             </a:r>
-            <a:endParaRPr lang="en-US" sz="1000" dirty="0"/>
-          </a:p>
-        </p:txBody>
-      </p:sp>
-      <p:sp>
-        <p:nvSpPr>
-          <p:cNvPr id="14" name="Text 12"/>
-          <p:cNvSpPr/>
-          <p:nvPr/>
-        </p:nvSpPr>
-        <p:spPr>
-          <a:xfrm>
-            <a:off x="2697480" y="2514600"/>
-            <a:ext cx="1783080" cy="274320"/>
-          </a:xfrm>
-          <a:prstGeom prst="rect">
-            <a:avLst/>
-          </a:prstGeom>
-          <a:noFill/>
-          <a:ln/>
-        </p:spPr>
-        <p:txBody>
-          <a:bodyPr wrap="square" rtlCol="0" anchor="ctr"/>
-          <a:lstStyle/>
-          <a:p>
-            <a:pPr marL="0" indent="0" algn="ctr">
-              <a:buNone/>
-            </a:pPr>
-            <a:r>
-              <a:rPr lang="en-US" sz="800" dirty="0">
-                <a:solidFill>
-                  <a:srgbClr val="4A5568"/>
-                </a:solidFill>
-                <a:latin typeface="Calibri" pitchFamily="34" charset="0"/>
-                <a:ea typeface="Calibri" pitchFamily="34" charset="-122"/>
-                <a:cs typeface="Calibri" pitchFamily="34" charset="-120"/>
-              </a:rPr>
-              <a:t>d'abattement</a:t>
-            </a:r>
-            <a:endParaRPr lang="en-US" sz="800" dirty="0"/>
-          </a:p>
-        </p:txBody>
-      </p:sp>
-      <p:sp>
-        <p:nvSpPr>
-          <p:cNvPr id="15" name="Shape 13"/>
-          <p:cNvSpPr/>
-          <p:nvPr/>
-        </p:nvSpPr>
-        <p:spPr>
-          <a:xfrm>
-            <a:off x="4754880" y="1188720"/>
-            <a:ext cx="1965960" cy="1828800"/>
+          </a:p>
+        </p:txBody>
+      </p:sp>
+      <p:sp>
+        <p:nvSpPr>
+          <p:cNvPr id="12" name="TextBox 11"/>
+          <p:cNvSpPr txBox="1"/>
+          <p:nvPr/>
+        </p:nvSpPr>
+        <p:spPr>
+          <a:xfrm>
+            <a:off x="2404872" y="1645920"/>
+            <a:ext cx="1682496" cy="411480"/>
+          </a:xfrm>
+          <a:prstGeom prst="rect">
+            <a:avLst/>
+          </a:prstGeom>
+          <a:noFill/>
+        </p:spPr>
+        <p:txBody>
+          <a:bodyPr wrap="square" anchor="ctr">
+            <a:spAutoFit/>
+          </a:bodyPr>
+          <a:lstStyle/>
+          <a:p>
+            <a:pPr algn="ctr"/>
+            <a:r>
+              <a:rPr sz="2900" b="1">
+                <a:solidFill>
+                  <a:srgbClr val="2B6FB8"/>
+                </a:solidFill>
+                <a:latin typeface="Calibri"/>
+              </a:rPr>
+              <a:t>−35 %</a:t>
+            </a:r>
+          </a:p>
+        </p:txBody>
+      </p:sp>
+      <p:sp>
+        <p:nvSpPr>
+          <p:cNvPr id="13" name="TextBox 12"/>
+          <p:cNvSpPr txBox="1"/>
+          <p:nvPr/>
+        </p:nvSpPr>
+        <p:spPr>
+          <a:xfrm>
+            <a:off x="2404872" y="2057400"/>
+            <a:ext cx="1682496" cy="164592"/>
+          </a:xfrm>
+          <a:prstGeom prst="rect">
+            <a:avLst/>
+          </a:prstGeom>
+          <a:noFill/>
+        </p:spPr>
+        <p:txBody>
+          <a:bodyPr wrap="square" anchor="ctr">
+            <a:spAutoFit/>
+          </a:bodyPr>
+          <a:lstStyle/>
+          <a:p>
+            <a:pPr algn="ctr"/>
+            <a:r>
+              <a:rPr sz="900" b="0">
+                <a:solidFill>
+                  <a:srgbClr val="465269"/>
+                </a:solidFill>
+                <a:latin typeface="Calibri"/>
+              </a:rPr>
+              <a:t>sur chaque facture</a:t>
+            </a:r>
+          </a:p>
+        </p:txBody>
+      </p:sp>
+      <p:sp>
+        <p:nvSpPr>
+          <p:cNvPr id="14" name="Rectangle 13"/>
+          <p:cNvSpPr/>
+          <p:nvPr/>
+        </p:nvSpPr>
+        <p:spPr>
+          <a:xfrm>
+            <a:off x="4297680" y="1234440"/>
+            <a:ext cx="1828800" cy="1143000"/>
           </a:xfrm>
           <a:prstGeom prst="rect">
             <a:avLst/>
@@ -6503,177 +7501,196 @@
           <a:solidFill>
             <a:srgbClr val="FFFFFF"/>
           </a:solidFill>
-          <a:ln/>
-          <a:effectLst>
-            <a:outerShdw blurRad="50800" dist="25400" dir="8100000" algn="bl" rotWithShape="0">
-              <a:srgbClr val="000000">
-                <a:alpha val="8000"/>
-              </a:srgbClr>
-            </a:outerShdw>
-          </a:effectLst>
-        </p:spPr>
-        <p:txBody>
-          <a:bodyPr/>
-          <a:lstStyle/>
-          <a:p>
-            <a:endParaRPr lang="fr-FR"/>
-          </a:p>
-        </p:txBody>
-      </p:sp>
-      <p:sp>
-        <p:nvSpPr>
-          <p:cNvPr id="16" name="Shape 14"/>
-          <p:cNvSpPr/>
-          <p:nvPr/>
-        </p:nvSpPr>
-        <p:spPr>
-          <a:xfrm>
-            <a:off x="4754880" y="1188720"/>
-            <a:ext cx="1965960" cy="54864"/>
+          <a:ln>
+            <a:solidFill>
+              <a:srgbClr val="FFFFFF"/>
+            </a:solidFill>
+          </a:ln>
+        </p:spPr>
+        <p:style>
+          <a:lnRef idx="1">
+            <a:schemeClr val="accent1"/>
+          </a:lnRef>
+          <a:fillRef idx="3">
+            <a:schemeClr val="accent1"/>
+          </a:fillRef>
+          <a:effectRef idx="2">
+            <a:schemeClr val="accent1"/>
+          </a:effectRef>
+          <a:fontRef idx="minor">
+            <a:schemeClr val="lt1"/>
+          </a:fontRef>
+        </p:style>
+        <p:txBody>
+          <a:bodyPr rtlCol="0" anchor="ctr"/>
+          <a:lstStyle/>
+          <a:p>
+            <a:pPr algn="ctr"/>
+            <a:endParaRPr/>
+          </a:p>
+        </p:txBody>
+      </p:sp>
+      <p:sp>
+        <p:nvSpPr>
+          <p:cNvPr id="15" name="Rectangle 14"/>
+          <p:cNvSpPr/>
+          <p:nvPr/>
+        </p:nvSpPr>
+        <p:spPr>
+          <a:xfrm>
+            <a:off x="4297680" y="1234440"/>
+            <a:ext cx="1828800" cy="64008"/>
           </a:xfrm>
           <a:prstGeom prst="rect">
             <a:avLst/>
           </a:prstGeom>
           <a:solidFill>
-            <a:srgbClr val="283A5E"/>
+            <a:srgbClr val="283D63"/>
           </a:solidFill>
-          <a:ln/>
-        </p:spPr>
-        <p:txBody>
-          <a:bodyPr/>
-          <a:lstStyle/>
-          <a:p>
-            <a:endParaRPr lang="fr-FR"/>
-          </a:p>
-        </p:txBody>
-      </p:sp>
-      <p:sp>
-        <p:nvSpPr>
-          <p:cNvPr id="17" name="Text 15"/>
-          <p:cNvSpPr/>
-          <p:nvPr/>
-        </p:nvSpPr>
-        <p:spPr>
-          <a:xfrm>
-            <a:off x="4754880" y="1371600"/>
-            <a:ext cx="1965960" cy="640080"/>
-          </a:xfrm>
-          <a:prstGeom prst="rect">
-            <a:avLst/>
-          </a:prstGeom>
-          <a:noFill/>
-          <a:ln/>
-        </p:spPr>
-        <p:txBody>
-          <a:bodyPr wrap="square" rtlCol="0" anchor="ctr"/>
-          <a:lstStyle/>
-          <a:p>
-            <a:pPr marL="0" indent="0" algn="ctr">
-              <a:buNone/>
-            </a:pPr>
-            <a:r>
-              <a:rPr lang="en-US" sz="3600" b="1" dirty="0">
-                <a:solidFill>
-                  <a:srgbClr val="283A5E"/>
-                </a:solidFill>
-                <a:latin typeface="Georgia" pitchFamily="34" charset="0"/>
-                <a:ea typeface="Georgia" pitchFamily="34" charset="-122"/>
-                <a:cs typeface="Georgia" pitchFamily="34" charset="-120"/>
-              </a:rPr>
-              <a:t>37%</a:t>
-            </a:r>
-            <a:endParaRPr lang="en-US" sz="3600" dirty="0"/>
-          </a:p>
-        </p:txBody>
-      </p:sp>
-      <p:sp>
-        <p:nvSpPr>
-          <p:cNvPr id="18" name="Text 16"/>
-          <p:cNvSpPr/>
-          <p:nvPr/>
-        </p:nvSpPr>
-        <p:spPr>
-          <a:xfrm>
-            <a:off x="4846320" y="2103120"/>
-            <a:ext cx="1783080" cy="457200"/>
-          </a:xfrm>
-          <a:prstGeom prst="rect">
-            <a:avLst/>
-          </a:prstGeom>
-          <a:noFill/>
-          <a:ln/>
-        </p:spPr>
-        <p:txBody>
-          <a:bodyPr wrap="square" rtlCol="0" anchor="ctr"/>
-          <a:lstStyle/>
-          <a:p>
-            <a:pPr marL="0" indent="0" algn="ctr">
-              <a:buNone/>
-            </a:pPr>
-            <a:r>
-              <a:rPr lang="en-US" sz="1000" b="1" dirty="0">
-                <a:solidFill>
-                  <a:srgbClr val="1A202C"/>
-                </a:solidFill>
-                <a:latin typeface="Calibri" pitchFamily="34" charset="0"/>
-                <a:ea typeface="Calibri" pitchFamily="34" charset="-122"/>
-                <a:cs typeface="Calibri" pitchFamily="34" charset="-120"/>
-              </a:rPr>
-              <a:t>4+ patients</a:t>
-            </a:r>
-            <a:endParaRPr lang="en-US" sz="1000" dirty="0"/>
-          </a:p>
-        </p:txBody>
-      </p:sp>
-      <p:sp>
-        <p:nvSpPr>
-          <p:cNvPr id="19" name="Text 17"/>
-          <p:cNvSpPr/>
-          <p:nvPr/>
-        </p:nvSpPr>
-        <p:spPr>
-          <a:xfrm>
-            <a:off x="4846320" y="2514600"/>
-            <a:ext cx="1783080" cy="274320"/>
-          </a:xfrm>
-          <a:prstGeom prst="rect">
-            <a:avLst/>
-          </a:prstGeom>
-          <a:noFill/>
-          <a:ln/>
-        </p:spPr>
-        <p:txBody>
-          <a:bodyPr wrap="square" rtlCol="0" anchor="ctr"/>
-          <a:lstStyle/>
-          <a:p>
-            <a:pPr marL="0" indent="0" algn="ctr">
-              <a:buNone/>
-            </a:pPr>
-            <a:r>
-              <a:rPr lang="en-US" sz="800" dirty="0">
-                <a:solidFill>
-                  <a:srgbClr val="4A5568"/>
-                </a:solidFill>
-                <a:latin typeface="Calibri" pitchFamily="34" charset="0"/>
-                <a:ea typeface="Calibri" pitchFamily="34" charset="-122"/>
-                <a:cs typeface="Calibri" pitchFamily="34" charset="-120"/>
-              </a:rPr>
-              <a:t>d'abattement</a:t>
-            </a:r>
-            <a:endParaRPr lang="en-US" sz="800" dirty="0"/>
-          </a:p>
-        </p:txBody>
-      </p:sp>
-      <p:sp>
-        <p:nvSpPr>
-          <p:cNvPr id="20" name="Shape 18"/>
-          <p:cNvSpPr/>
-          <p:nvPr/>
-        </p:nvSpPr>
-        <p:spPr>
-          <a:xfrm>
-            <a:off x="6903720" y="1188720"/>
-            <a:ext cx="1965960" cy="1828800"/>
+          <a:ln>
+            <a:solidFill>
+              <a:srgbClr val="283D63"/>
+            </a:solidFill>
+          </a:ln>
+        </p:spPr>
+        <p:style>
+          <a:lnRef idx="1">
+            <a:schemeClr val="accent1"/>
+          </a:lnRef>
+          <a:fillRef idx="3">
+            <a:schemeClr val="accent1"/>
+          </a:fillRef>
+          <a:effectRef idx="2">
+            <a:schemeClr val="accent1"/>
+          </a:effectRef>
+          <a:fontRef idx="minor">
+            <a:schemeClr val="lt1"/>
+          </a:fontRef>
+        </p:style>
+        <p:txBody>
+          <a:bodyPr rtlCol="0" anchor="ctr"/>
+          <a:lstStyle/>
+          <a:p>
+            <a:pPr algn="ctr"/>
+            <a:endParaRPr/>
+          </a:p>
+        </p:txBody>
+      </p:sp>
+      <p:sp>
+        <p:nvSpPr>
+          <p:cNvPr id="16" name="TextBox 15"/>
+          <p:cNvSpPr txBox="1"/>
+          <p:nvPr/>
+        </p:nvSpPr>
+        <p:spPr>
+          <a:xfrm>
+            <a:off x="4370832" y="1399032"/>
+            <a:ext cx="1682496" cy="228600"/>
+          </a:xfrm>
+          <a:prstGeom prst="rect">
+            <a:avLst/>
+          </a:prstGeom>
+          <a:noFill/>
+        </p:spPr>
+        <p:txBody>
+          <a:bodyPr wrap="square" anchor="ctr">
+            <a:spAutoFit/>
+          </a:bodyPr>
+          <a:lstStyle/>
+          <a:p>
+            <a:pPr algn="ctr"/>
+            <a:r>
+              <a:rPr sz="1200" b="1">
+                <a:solidFill>
+                  <a:srgbClr val="1C202B"/>
+                </a:solidFill>
+                <a:latin typeface="Calibri"/>
+              </a:rPr>
+              <a:t>4 patients ou +</a:t>
+            </a:r>
+          </a:p>
+        </p:txBody>
+      </p:sp>
+      <p:sp>
+        <p:nvSpPr>
+          <p:cNvPr id="17" name="TextBox 16"/>
+          <p:cNvSpPr txBox="1"/>
+          <p:nvPr/>
+        </p:nvSpPr>
+        <p:spPr>
+          <a:xfrm>
+            <a:off x="4370832" y="1645920"/>
+            <a:ext cx="1682496" cy="411480"/>
+          </a:xfrm>
+          <a:prstGeom prst="rect">
+            <a:avLst/>
+          </a:prstGeom>
+          <a:noFill/>
+        </p:spPr>
+        <p:txBody>
+          <a:bodyPr wrap="square" anchor="ctr">
+            <a:spAutoFit/>
+          </a:bodyPr>
+          <a:lstStyle/>
+          <a:p>
+            <a:pPr algn="ctr"/>
+            <a:r>
+              <a:rPr sz="2900" b="1">
+                <a:solidFill>
+                  <a:srgbClr val="283D63"/>
+                </a:solidFill>
+                <a:latin typeface="Calibri"/>
+              </a:rPr>
+              <a:t>−37 %</a:t>
+            </a:r>
+          </a:p>
+        </p:txBody>
+      </p:sp>
+      <p:sp>
+        <p:nvSpPr>
+          <p:cNvPr id="18" name="TextBox 17"/>
+          <p:cNvSpPr txBox="1"/>
+          <p:nvPr/>
+        </p:nvSpPr>
+        <p:spPr>
+          <a:xfrm>
+            <a:off x="4370832" y="2057400"/>
+            <a:ext cx="1682496" cy="164592"/>
+          </a:xfrm>
+          <a:prstGeom prst="rect">
+            <a:avLst/>
+          </a:prstGeom>
+          <a:noFill/>
+        </p:spPr>
+        <p:txBody>
+          <a:bodyPr wrap="square" anchor="ctr">
+            <a:spAutoFit/>
+          </a:bodyPr>
+          <a:lstStyle/>
+          <a:p>
+            <a:pPr algn="ctr"/>
+            <a:r>
+              <a:rPr sz="900" b="0">
+                <a:solidFill>
+                  <a:srgbClr val="465269"/>
+                </a:solidFill>
+                <a:latin typeface="Calibri"/>
+              </a:rPr>
+              <a:t>sur chaque facture</a:t>
+            </a:r>
+          </a:p>
+        </p:txBody>
+      </p:sp>
+      <p:sp>
+        <p:nvSpPr>
+          <p:cNvPr id="19" name="Rectangle 18"/>
+          <p:cNvSpPr/>
+          <p:nvPr/>
+        </p:nvSpPr>
+        <p:spPr>
+          <a:xfrm>
+            <a:off x="6263640" y="1234440"/>
+            <a:ext cx="1828800" cy="1143000"/>
           </a:xfrm>
           <a:prstGeom prst="rect">
             <a:avLst/>
@@ -6681,492 +7698,444 @@
           <a:solidFill>
             <a:srgbClr val="FFFFFF"/>
           </a:solidFill>
-          <a:ln/>
-          <a:effectLst>
-            <a:outerShdw blurRad="50800" dist="25400" dir="8100000" algn="bl" rotWithShape="0">
-              <a:srgbClr val="000000">
-                <a:alpha val="8000"/>
-              </a:srgbClr>
-            </a:outerShdw>
-          </a:effectLst>
-        </p:spPr>
-        <p:txBody>
-          <a:bodyPr/>
-          <a:lstStyle/>
-          <a:p>
-            <a:endParaRPr lang="fr-FR"/>
-          </a:p>
-        </p:txBody>
-      </p:sp>
-      <p:sp>
-        <p:nvSpPr>
-          <p:cNvPr id="21" name="Shape 19"/>
-          <p:cNvSpPr/>
-          <p:nvPr/>
-        </p:nvSpPr>
-        <p:spPr>
-          <a:xfrm>
-            <a:off x="6903720" y="1188720"/>
-            <a:ext cx="1965960" cy="54864"/>
+          <a:ln>
+            <a:solidFill>
+              <a:srgbClr val="FFFFFF"/>
+            </a:solidFill>
+          </a:ln>
+        </p:spPr>
+        <p:style>
+          <a:lnRef idx="1">
+            <a:schemeClr val="accent1"/>
+          </a:lnRef>
+          <a:fillRef idx="3">
+            <a:schemeClr val="accent1"/>
+          </a:fillRef>
+          <a:effectRef idx="2">
+            <a:schemeClr val="accent1"/>
+          </a:effectRef>
+          <a:fontRef idx="minor">
+            <a:schemeClr val="lt1"/>
+          </a:fontRef>
+        </p:style>
+        <p:txBody>
+          <a:bodyPr rtlCol="0" anchor="ctr"/>
+          <a:lstStyle/>
+          <a:p>
+            <a:pPr algn="ctr"/>
+            <a:endParaRPr/>
+          </a:p>
+        </p:txBody>
+      </p:sp>
+      <p:sp>
+        <p:nvSpPr>
+          <p:cNvPr id="20" name="Rectangle 19"/>
+          <p:cNvSpPr/>
+          <p:nvPr/>
+        </p:nvSpPr>
+        <p:spPr>
+          <a:xfrm>
+            <a:off x="6263640" y="1234440"/>
+            <a:ext cx="1828800" cy="64008"/>
           </a:xfrm>
           <a:prstGeom prst="rect">
             <a:avLst/>
           </a:prstGeom>
           <a:solidFill>
-            <a:srgbClr val="C05621"/>
+            <a:srgbClr val="CA521E"/>
           </a:solidFill>
-          <a:ln/>
-        </p:spPr>
-        <p:txBody>
-          <a:bodyPr/>
-          <a:lstStyle/>
-          <a:p>
-            <a:endParaRPr lang="fr-FR"/>
-          </a:p>
-        </p:txBody>
-      </p:sp>
-      <p:sp>
-        <p:nvSpPr>
-          <p:cNvPr id="22" name="Text 20"/>
-          <p:cNvSpPr/>
-          <p:nvPr/>
-        </p:nvSpPr>
-        <p:spPr>
-          <a:xfrm>
-            <a:off x="6903720" y="1371600"/>
-            <a:ext cx="1965960" cy="640080"/>
-          </a:xfrm>
-          <a:prstGeom prst="rect">
-            <a:avLst/>
-          </a:prstGeom>
-          <a:noFill/>
-          <a:ln/>
-        </p:spPr>
-        <p:txBody>
-          <a:bodyPr wrap="square" rtlCol="0" anchor="ctr"/>
-          <a:lstStyle/>
-          <a:p>
-            <a:pPr marL="0" indent="0" algn="ctr">
-              <a:buNone/>
-            </a:pPr>
-            <a:r>
-              <a:rPr lang="en-US" sz="3600" b="1" dirty="0">
-                <a:solidFill>
-                  <a:srgbClr val="C05621"/>
-                </a:solidFill>
-                <a:latin typeface="Georgia" pitchFamily="34" charset="0"/>
-                <a:ea typeface="Georgia" pitchFamily="34" charset="-122"/>
-                <a:cs typeface="Georgia" pitchFamily="34" charset="-120"/>
-              </a:rPr>
-              <a:t>5%</a:t>
-            </a:r>
-            <a:endParaRPr lang="en-US" sz="3600" dirty="0"/>
-          </a:p>
-        </p:txBody>
-      </p:sp>
-      <p:sp>
-        <p:nvSpPr>
-          <p:cNvPr id="23" name="Text 21"/>
-          <p:cNvSpPr/>
-          <p:nvPr/>
-        </p:nvSpPr>
-        <p:spPr>
-          <a:xfrm>
-            <a:off x="6995160" y="2103120"/>
-            <a:ext cx="1783080" cy="457200"/>
-          </a:xfrm>
-          <a:prstGeom prst="rect">
-            <a:avLst/>
-          </a:prstGeom>
-          <a:noFill/>
-          <a:ln/>
-        </p:spPr>
-        <p:txBody>
-          <a:bodyPr wrap="square" rtlCol="0" anchor="ctr"/>
-          <a:lstStyle/>
-          <a:p>
-            <a:pPr marL="0" indent="0" algn="ctr">
-              <a:buNone/>
-            </a:pPr>
-            <a:r>
-              <a:rPr lang="en-US" sz="1000" b="1" dirty="0">
-                <a:solidFill>
-                  <a:srgbClr val="1A202C"/>
-                </a:solidFill>
-                <a:latin typeface="Calibri" pitchFamily="34" charset="0"/>
-                <a:ea typeface="Calibri" pitchFamily="34" charset="-122"/>
-                <a:cs typeface="Calibri" pitchFamily="34" charset="-120"/>
-              </a:rPr>
-              <a:t>Longue distance</a:t>
-            </a:r>
-            <a:endParaRPr lang="en-US" sz="1000" dirty="0"/>
-          </a:p>
-          <a:p>
-            <a:pPr marL="0" indent="0" algn="ctr">
-              <a:buNone/>
-            </a:pPr>
-            <a:r>
-              <a:rPr lang="en-US" sz="1000" b="1" dirty="0">
-                <a:solidFill>
-                  <a:srgbClr val="1A202C"/>
-                </a:solidFill>
-                <a:latin typeface="Calibri" pitchFamily="34" charset="0"/>
-                <a:ea typeface="Calibri" pitchFamily="34" charset="-122"/>
-                <a:cs typeface="Calibri" pitchFamily="34" charset="-120"/>
-              </a:rPr>
-              <a:t>(≥ 30 km seul)</a:t>
-            </a:r>
-            <a:endParaRPr lang="en-US" sz="1000" dirty="0"/>
-          </a:p>
-        </p:txBody>
-      </p:sp>
-      <p:sp>
-        <p:nvSpPr>
-          <p:cNvPr id="24" name="Text 22"/>
-          <p:cNvSpPr/>
-          <p:nvPr/>
-        </p:nvSpPr>
-        <p:spPr>
-          <a:xfrm>
-            <a:off x="6995160" y="2514600"/>
-            <a:ext cx="1783080" cy="274320"/>
-          </a:xfrm>
-          <a:prstGeom prst="rect">
-            <a:avLst/>
-          </a:prstGeom>
-          <a:noFill/>
-          <a:ln/>
-        </p:spPr>
-        <p:txBody>
-          <a:bodyPr wrap="square" rtlCol="0" anchor="ctr"/>
-          <a:lstStyle/>
-          <a:p>
-            <a:pPr marL="0" indent="0" algn="ctr">
-              <a:buNone/>
-            </a:pPr>
-            <a:r>
-              <a:rPr lang="en-US" sz="800" dirty="0">
-                <a:solidFill>
-                  <a:srgbClr val="4A5568"/>
-                </a:solidFill>
-                <a:latin typeface="Calibri" pitchFamily="34" charset="0"/>
-                <a:ea typeface="Calibri" pitchFamily="34" charset="-122"/>
-                <a:cs typeface="Calibri" pitchFamily="34" charset="-120"/>
-              </a:rPr>
-              <a:t>d'abattement</a:t>
-            </a:r>
-            <a:endParaRPr lang="en-US" sz="800" dirty="0"/>
-          </a:p>
-        </p:txBody>
-      </p:sp>
-      <p:sp>
-        <p:nvSpPr>
-          <p:cNvPr id="25" name="Shape 23"/>
-          <p:cNvSpPr/>
-          <p:nvPr/>
-        </p:nvSpPr>
-        <p:spPr>
-          <a:xfrm>
-            <a:off x="457200" y="3246120"/>
-            <a:ext cx="8229600" cy="1280160"/>
+          <a:ln>
+            <a:solidFill>
+              <a:srgbClr val="CA521E"/>
+            </a:solidFill>
+          </a:ln>
+        </p:spPr>
+        <p:style>
+          <a:lnRef idx="1">
+            <a:schemeClr val="accent1"/>
+          </a:lnRef>
+          <a:fillRef idx="3">
+            <a:schemeClr val="accent1"/>
+          </a:fillRef>
+          <a:effectRef idx="2">
+            <a:schemeClr val="accent1"/>
+          </a:effectRef>
+          <a:fontRef idx="minor">
+            <a:schemeClr val="lt1"/>
+          </a:fontRef>
+        </p:style>
+        <p:txBody>
+          <a:bodyPr rtlCol="0" anchor="ctr"/>
+          <a:lstStyle/>
+          <a:p>
+            <a:pPr algn="ctr"/>
+            <a:endParaRPr/>
+          </a:p>
+        </p:txBody>
+      </p:sp>
+      <p:sp>
+        <p:nvSpPr>
+          <p:cNvPr id="21" name="TextBox 20"/>
+          <p:cNvSpPr txBox="1"/>
+          <p:nvPr/>
+        </p:nvSpPr>
+        <p:spPr>
+          <a:xfrm>
+            <a:off x="6336792" y="1399032"/>
+            <a:ext cx="1682496" cy="228600"/>
+          </a:xfrm>
+          <a:prstGeom prst="rect">
+            <a:avLst/>
+          </a:prstGeom>
+          <a:noFill/>
+        </p:spPr>
+        <p:txBody>
+          <a:bodyPr wrap="square" anchor="ctr">
+            <a:spAutoFit/>
+          </a:bodyPr>
+          <a:lstStyle/>
+          <a:p>
+            <a:pPr algn="ctr"/>
+            <a:r>
+              <a:rPr sz="1200" b="1">
+                <a:solidFill>
+                  <a:srgbClr val="1C202B"/>
+                </a:solidFill>
+                <a:latin typeface="Calibri"/>
+              </a:rPr>
+              <a:t>Cas longue distance</a:t>
+            </a:r>
+          </a:p>
+        </p:txBody>
+      </p:sp>
+      <p:sp>
+        <p:nvSpPr>
+          <p:cNvPr id="22" name="TextBox 21"/>
+          <p:cNvSpPr txBox="1"/>
+          <p:nvPr/>
+        </p:nvSpPr>
+        <p:spPr>
+          <a:xfrm>
+            <a:off x="6336792" y="1645920"/>
+            <a:ext cx="1682496" cy="411480"/>
+          </a:xfrm>
+          <a:prstGeom prst="rect">
+            <a:avLst/>
+          </a:prstGeom>
+          <a:noFill/>
+        </p:spPr>
+        <p:txBody>
+          <a:bodyPr wrap="square" anchor="ctr">
+            <a:spAutoFit/>
+          </a:bodyPr>
+          <a:lstStyle/>
+          <a:p>
+            <a:pPr algn="ctr"/>
+            <a:r>
+              <a:rPr sz="2900" b="1">
+                <a:solidFill>
+                  <a:srgbClr val="CA521E"/>
+                </a:solidFill>
+                <a:latin typeface="Calibri"/>
+              </a:rPr>
+              <a:t>−5 %</a:t>
+            </a:r>
+          </a:p>
+        </p:txBody>
+      </p:sp>
+      <p:sp>
+        <p:nvSpPr>
+          <p:cNvPr id="23" name="TextBox 22"/>
+          <p:cNvSpPr txBox="1"/>
+          <p:nvPr/>
+        </p:nvSpPr>
+        <p:spPr>
+          <a:xfrm>
+            <a:off x="6336792" y="2057400"/>
+            <a:ext cx="1682496" cy="164592"/>
+          </a:xfrm>
+          <a:prstGeom prst="rect">
+            <a:avLst/>
+          </a:prstGeom>
+          <a:noFill/>
+        </p:spPr>
+        <p:txBody>
+          <a:bodyPr wrap="square" anchor="ctr">
+            <a:spAutoFit/>
+          </a:bodyPr>
+          <a:lstStyle/>
+          <a:p>
+            <a:pPr algn="ctr"/>
+            <a:r>
+              <a:rPr sz="900" b="0">
+                <a:solidFill>
+                  <a:srgbClr val="465269"/>
+                </a:solidFill>
+                <a:latin typeface="Calibri"/>
+              </a:rPr>
+              <a:t>patient concerné seulement</a:t>
+            </a:r>
+          </a:p>
+        </p:txBody>
+      </p:sp>
+      <p:sp>
+        <p:nvSpPr>
+          <p:cNvPr id="24" name="Rectangle 23"/>
+          <p:cNvSpPr/>
+          <p:nvPr/>
+        </p:nvSpPr>
+        <p:spPr>
+          <a:xfrm>
+            <a:off x="365760" y="2578608"/>
+            <a:ext cx="7726679" cy="1417320"/>
           </a:xfrm>
           <a:prstGeom prst="rect">
             <a:avLst/>
           </a:prstGeom>
           <a:solidFill>
-            <a:srgbClr val="FFFFFF"/>
+            <a:srgbClr val="EBF4FC"/>
           </a:solidFill>
-          <a:ln/>
-          <a:effectLst>
-            <a:outerShdw blurRad="50800" dist="25400" dir="8100000" algn="bl" rotWithShape="0">
-              <a:srgbClr val="000000">
-                <a:alpha val="8000"/>
-              </a:srgbClr>
-            </a:outerShdw>
-          </a:effectLst>
-        </p:spPr>
-        <p:txBody>
-          <a:bodyPr/>
-          <a:lstStyle/>
-          <a:p>
-            <a:endParaRPr lang="fr-FR"/>
-          </a:p>
-        </p:txBody>
-      </p:sp>
-      <p:pic>
-        <p:nvPicPr>
-          <p:cNvPr id="26" name="Image 0" descr="preencoded.png"/>
-          <p:cNvPicPr>
-            <a:picLocks noChangeAspect="1"/>
-          </p:cNvPicPr>
-          <p:nvPr/>
-        </p:nvPicPr>
-        <p:blipFill>
-          <a:blip r:embed="rId3"/>
-          <a:stretch>
-            <a:fillRect/>
-          </a:stretch>
-        </p:blipFill>
-        <p:spPr>
-          <a:xfrm>
-            <a:off x="640080" y="3383280"/>
-            <a:ext cx="274320" cy="274320"/>
-          </a:xfrm>
-          <a:prstGeom prst="rect">
-            <a:avLst/>
-          </a:prstGeom>
-        </p:spPr>
-      </p:pic>
-      <p:sp>
-        <p:nvSpPr>
-          <p:cNvPr id="27" name="Text 24"/>
-          <p:cNvSpPr/>
-          <p:nvPr/>
-        </p:nvSpPr>
-        <p:spPr>
-          <a:xfrm>
-            <a:off x="1005840" y="3337560"/>
-            <a:ext cx="4572000" cy="320040"/>
-          </a:xfrm>
-          <a:prstGeom prst="rect">
-            <a:avLst/>
-          </a:prstGeom>
-          <a:noFill/>
-          <a:ln/>
-        </p:spPr>
-        <p:txBody>
-          <a:bodyPr wrap="square" lIns="0" tIns="0" rIns="0" bIns="0" rtlCol="0" anchor="ctr"/>
-          <a:lstStyle/>
-          <a:p>
-            <a:pPr marL="0" indent="0">
-              <a:buNone/>
-            </a:pPr>
-            <a:r>
-              <a:rPr lang="en-US" sz="1100" b="1" dirty="0">
-                <a:solidFill>
-                  <a:srgbClr val="C05621"/>
-                </a:solidFill>
-                <a:latin typeface="Calibri" pitchFamily="34" charset="0"/>
-                <a:ea typeface="Calibri" pitchFamily="34" charset="-122"/>
-                <a:cs typeface="Calibri" pitchFamily="34" charset="-120"/>
-              </a:rPr>
-              <a:t>Abattement réduit 5% — Conditions cumulatives</a:t>
-            </a:r>
-            <a:endParaRPr lang="en-US" sz="1100" dirty="0"/>
-          </a:p>
-        </p:txBody>
-      </p:sp>
-      <p:sp>
-        <p:nvSpPr>
-          <p:cNvPr id="28" name="Text 25"/>
-          <p:cNvSpPr/>
-          <p:nvPr/>
-        </p:nvSpPr>
-        <p:spPr>
-          <a:xfrm>
-            <a:off x="640080" y="3749040"/>
-            <a:ext cx="7772400" cy="685800"/>
-          </a:xfrm>
-          <a:prstGeom prst="rect">
-            <a:avLst/>
-          </a:prstGeom>
-          <a:noFill/>
-          <a:ln/>
-        </p:spPr>
-        <p:txBody>
-          <a:bodyPr wrap="square" rtlCol="0" anchor="ctr"/>
-          <a:lstStyle/>
-          <a:p>
-            <a:pPr marL="342900" indent="-342900">
-              <a:spcAft>
-                <a:spcPts val="300"/>
-              </a:spcAft>
-              <a:buSzPct val="100000"/>
-              <a:buChar char="•"/>
-            </a:pPr>
-            <a:r>
-              <a:rPr lang="en-US" sz="850" dirty="0">
-                <a:solidFill>
-                  <a:srgbClr val="1A202C"/>
-                </a:solidFill>
-                <a:latin typeface="Calibri" pitchFamily="34" charset="0"/>
-                <a:ea typeface="Calibri" pitchFamily="34" charset="-122"/>
-                <a:cs typeface="Calibri" pitchFamily="34" charset="-120"/>
-              </a:rPr>
-              <a:t>Le transport est un transport partagé (≥ 2 patients sur une partie du trajet)
-</a:t>
-            </a:r>
-            <a:endParaRPr lang="en-US" sz="850" dirty="0"/>
-          </a:p>
-          <a:p>
-            <a:pPr marL="342900" indent="-342900">
-              <a:spcAft>
-                <a:spcPts val="300"/>
-              </a:spcAft>
-              <a:buSzPct val="100000"/>
-              <a:buChar char="•"/>
-            </a:pPr>
-            <a:r>
-              <a:rPr lang="en-US" sz="850" dirty="0">
-                <a:solidFill>
-                  <a:srgbClr val="1A202C"/>
-                </a:solidFill>
-                <a:latin typeface="Calibri" pitchFamily="34" charset="0"/>
-                <a:ea typeface="Calibri" pitchFamily="34" charset="-122"/>
-                <a:cs typeface="Calibri" pitchFamily="34" charset="-120"/>
-              </a:rPr>
-              <a:t>L'un des patients est seul dans le véhicule sur une distance ≥ 30 km
-</a:t>
-            </a:r>
-            <a:endParaRPr lang="en-US" sz="850" dirty="0"/>
-          </a:p>
-          <a:p>
-            <a:pPr marL="342900" indent="-342900">
-              <a:spcAft>
-                <a:spcPts val="300"/>
-              </a:spcAft>
-              <a:buSzPct val="100000"/>
-              <a:buChar char="•"/>
-            </a:pPr>
-            <a:r>
-              <a:rPr lang="en-US" sz="850" b="1" dirty="0">
-                <a:solidFill>
-                  <a:srgbClr val="C53030"/>
-                </a:solidFill>
-                <a:latin typeface="Calibri" pitchFamily="34" charset="0"/>
-                <a:ea typeface="Calibri" pitchFamily="34" charset="-122"/>
-                <a:cs typeface="Calibri" pitchFamily="34" charset="-120"/>
-              </a:rPr>
-              <a:t>Le patient concerné par la longue distance → abattement limité à 5%
-</a:t>
-            </a:r>
-            <a:endParaRPr lang="en-US" sz="850" dirty="0"/>
-          </a:p>
-          <a:p>
-            <a:pPr marL="342900" indent="-342900">
-              <a:spcAft>
-                <a:spcPts val="300"/>
-              </a:spcAft>
-              <a:buSzPct val="100000"/>
-              <a:buChar char="•"/>
-            </a:pPr>
-            <a:r>
-              <a:rPr lang="en-US" sz="850" dirty="0">
-                <a:solidFill>
-                  <a:srgbClr val="1A202C"/>
-                </a:solidFill>
-                <a:latin typeface="Calibri" pitchFamily="34" charset="0"/>
-                <a:ea typeface="Calibri" pitchFamily="34" charset="-122"/>
-                <a:cs typeface="Calibri" pitchFamily="34" charset="-120"/>
-              </a:rPr>
-              <a:t>Les autres patients conservent l'abattement normal (23%, 35% ou 37%)</a:t>
-            </a:r>
-            <a:endParaRPr lang="en-US" sz="850" dirty="0"/>
-          </a:p>
-        </p:txBody>
-      </p:sp>
-      <p:sp>
-        <p:nvSpPr>
-          <p:cNvPr id="29" name="Shape 26"/>
-          <p:cNvSpPr/>
-          <p:nvPr/>
-        </p:nvSpPr>
-        <p:spPr>
-          <a:xfrm>
-            <a:off x="0" y="4823460"/>
-            <a:ext cx="9144000" cy="320040"/>
-          </a:xfrm>
-          <a:prstGeom prst="rect">
-            <a:avLst/>
-          </a:prstGeom>
-          <a:solidFill>
-            <a:srgbClr val="1E2A3A"/>
-          </a:solidFill>
-          <a:ln/>
-        </p:spPr>
-        <p:txBody>
-          <a:bodyPr/>
-          <a:lstStyle/>
-          <a:p>
-            <a:endParaRPr lang="fr-FR"/>
-          </a:p>
-        </p:txBody>
-      </p:sp>
-      <p:sp>
-        <p:nvSpPr>
-          <p:cNvPr id="30" name="Text 27"/>
-          <p:cNvSpPr/>
-          <p:nvPr/>
-        </p:nvSpPr>
-        <p:spPr>
-          <a:xfrm>
-            <a:off x="457200" y="4823460"/>
-            <a:ext cx="7315200" cy="320040"/>
-          </a:xfrm>
-          <a:prstGeom prst="rect">
-            <a:avLst/>
-          </a:prstGeom>
-          <a:noFill/>
-          <a:ln/>
-        </p:spPr>
-        <p:txBody>
-          <a:bodyPr wrap="square" rtlCol="0" anchor="ctr"/>
-          <a:lstStyle/>
-          <a:p>
-            <a:pPr marL="0" indent="0">
-              <a:buNone/>
-            </a:pPr>
-            <a:r>
-              <a:rPr lang="en-US" sz="700" dirty="0">
-                <a:solidFill>
-                  <a:srgbClr val="718096"/>
-                </a:solidFill>
-                <a:latin typeface="Calibri" pitchFamily="34" charset="0"/>
-                <a:ea typeface="Calibri" pitchFamily="34" charset="-122"/>
-                <a:cs typeface="Calibri" pitchFamily="34" charset="-120"/>
-              </a:rPr>
-              <a:t>FTRANSPORT - SERVICES PRO  •  Formation certifiée Qualiopi  •  Éligible CPF  •  Lyon</a:t>
-            </a:r>
-            <a:endParaRPr lang="en-US" sz="700" dirty="0"/>
-          </a:p>
-        </p:txBody>
-      </p:sp>
-      <p:sp>
-        <p:nvSpPr>
-          <p:cNvPr id="31" name="Text 28"/>
-          <p:cNvSpPr/>
-          <p:nvPr/>
-        </p:nvSpPr>
-        <p:spPr>
-          <a:xfrm>
-            <a:off x="8229600" y="4823460"/>
-            <a:ext cx="640080" cy="320040"/>
-          </a:xfrm>
-          <a:prstGeom prst="rect">
-            <a:avLst/>
-          </a:prstGeom>
-          <a:noFill/>
-          <a:ln/>
-        </p:spPr>
-        <p:txBody>
-          <a:bodyPr wrap="square" rtlCol="0" anchor="ctr"/>
-          <a:lstStyle/>
-          <a:p>
-            <a:pPr marL="0" indent="0" algn="r">
-              <a:buNone/>
-            </a:pPr>
-            <a:r>
-              <a:rPr lang="en-US" sz="800" b="1" dirty="0">
-                <a:solidFill>
-                  <a:srgbClr val="FFFFFF"/>
-                </a:solidFill>
-                <a:latin typeface="Calibri" pitchFamily="34" charset="0"/>
-                <a:ea typeface="Calibri" pitchFamily="34" charset="-122"/>
-                <a:cs typeface="Calibri" pitchFamily="34" charset="-120"/>
+          <a:ln>
+            <a:solidFill>
+              <a:srgbClr val="EBF4FC"/>
+            </a:solidFill>
+          </a:ln>
+        </p:spPr>
+        <p:style>
+          <a:lnRef idx="1">
+            <a:schemeClr val="accent1"/>
+          </a:lnRef>
+          <a:fillRef idx="3">
+            <a:schemeClr val="accent1"/>
+          </a:fillRef>
+          <a:effectRef idx="2">
+            <a:schemeClr val="accent1"/>
+          </a:effectRef>
+          <a:fontRef idx="minor">
+            <a:schemeClr val="lt1"/>
+          </a:fontRef>
+        </p:style>
+        <p:txBody>
+          <a:bodyPr rtlCol="0" anchor="ctr"/>
+          <a:lstStyle/>
+          <a:p>
+            <a:pPr algn="ctr"/>
+            <a:endParaRPr/>
+          </a:p>
+        </p:txBody>
+      </p:sp>
+      <p:sp>
+        <p:nvSpPr>
+          <p:cNvPr id="25" name="TextBox 24"/>
+          <p:cNvSpPr txBox="1"/>
+          <p:nvPr/>
+        </p:nvSpPr>
+        <p:spPr>
+          <a:xfrm>
+            <a:off x="566928" y="2688336"/>
+            <a:ext cx="3246120" cy="256032"/>
+          </a:xfrm>
+          <a:prstGeom prst="rect">
+            <a:avLst/>
+          </a:prstGeom>
+          <a:noFill/>
+        </p:spPr>
+        <p:txBody>
+          <a:bodyPr wrap="square" anchor="ctr">
+            <a:spAutoFit/>
+          </a:bodyPr>
+          <a:lstStyle/>
+          <a:p>
+            <a:pPr algn="l"/>
+            <a:r>
+              <a:rPr sz="1400" b="1">
+                <a:solidFill>
+                  <a:srgbClr val="2B6FB8"/>
+                </a:solidFill>
+                <a:latin typeface="Calibri"/>
+              </a:rPr>
+              <a:t>EXEMPLE — départs différents</a:t>
+            </a:r>
+          </a:p>
+        </p:txBody>
+      </p:sp>
+      <p:sp>
+        <p:nvSpPr>
+          <p:cNvPr id="26" name="TextBox 25"/>
+          <p:cNvSpPr txBox="1"/>
+          <p:nvPr/>
+        </p:nvSpPr>
+        <p:spPr>
+          <a:xfrm>
+            <a:off x="566928" y="2999232"/>
+            <a:ext cx="3246120" cy="749808"/>
+          </a:xfrm>
+          <a:prstGeom prst="rect">
+            <a:avLst/>
+          </a:prstGeom>
+          <a:noFill/>
+        </p:spPr>
+        <p:txBody>
+          <a:bodyPr wrap="square" anchor="ctr">
+            <a:spAutoFit/>
+          </a:bodyPr>
+          <a:lstStyle/>
+          <a:p>
+            <a:pPr algn="l"/>
+            <a:r>
+              <a:rPr sz="1100" b="0">
+                <a:solidFill>
+                  <a:srgbClr val="1C202B"/>
+                </a:solidFill>
+                <a:latin typeface="Calibri"/>
+              </a:rPr>
+              <a:t>A monte à Saint-Priest → on prend B à Bron → les deux vont à l’hôpital.
+✓ Transport partagé même avec des départs différents.
+✓ 2 factures : une pour A, une pour B.</a:t>
+            </a:r>
+          </a:p>
+        </p:txBody>
+      </p:sp>
+      <p:sp>
+        <p:nvSpPr>
+          <p:cNvPr id="27" name="TextBox 26"/>
+          <p:cNvSpPr txBox="1"/>
+          <p:nvPr/>
+        </p:nvSpPr>
+        <p:spPr>
+          <a:xfrm>
+            <a:off x="4069080" y="2688336"/>
+            <a:ext cx="3703320" cy="256032"/>
+          </a:xfrm>
+          <a:prstGeom prst="rect">
+            <a:avLst/>
+          </a:prstGeom>
+          <a:noFill/>
+        </p:spPr>
+        <p:txBody>
+          <a:bodyPr wrap="square" anchor="ctr">
+            <a:spAutoFit/>
+          </a:bodyPr>
+          <a:lstStyle/>
+          <a:p>
+            <a:pPr algn="l"/>
+            <a:r>
+              <a:rPr sz="1400" b="1">
+                <a:solidFill>
+                  <a:srgbClr val="CA521E"/>
+                </a:solidFill>
+                <a:latin typeface="Calibri"/>
+              </a:rPr>
+              <a:t>CAS PARTICULIER DU −5 %</a:t>
+            </a:r>
+          </a:p>
+        </p:txBody>
+      </p:sp>
+      <p:sp>
+        <p:nvSpPr>
+          <p:cNvPr id="28" name="TextBox 27"/>
+          <p:cNvSpPr txBox="1"/>
+          <p:nvPr/>
+        </p:nvSpPr>
+        <p:spPr>
+          <a:xfrm>
+            <a:off x="4069080" y="2999232"/>
+            <a:ext cx="3703320" cy="749808"/>
+          </a:xfrm>
+          <a:prstGeom prst="rect">
+            <a:avLst/>
+          </a:prstGeom>
+          <a:noFill/>
+        </p:spPr>
+        <p:txBody>
+          <a:bodyPr wrap="square" anchor="ctr">
+            <a:spAutoFit/>
+          </a:bodyPr>
+          <a:lstStyle/>
+          <a:p>
+            <a:pPr algn="l"/>
+            <a:r>
+              <a:rPr sz="1100" b="0">
+                <a:solidFill>
+                  <a:srgbClr val="1C202B"/>
+                </a:solidFill>
+                <a:latin typeface="Calibri"/>
+              </a:rPr>
+              <a:t>A partage une partie du trajet avec B, puis A reste seul sur une longue distance.
+→ A : abattement ramené à 5 %.
+→ B : abattement normal.
+⚠ Seuil local, minimum national 30 km.</a:t>
+            </a:r>
+          </a:p>
+        </p:txBody>
+      </p:sp>
+      <p:sp>
+        <p:nvSpPr>
+          <p:cNvPr id="29" name="TextBox 28"/>
+          <p:cNvSpPr txBox="1"/>
+          <p:nvPr/>
+        </p:nvSpPr>
+        <p:spPr>
+          <a:xfrm>
+            <a:off x="411480" y="4407408"/>
+            <a:ext cx="7498079" cy="164592"/>
+          </a:xfrm>
+          <a:prstGeom prst="rect">
+            <a:avLst/>
+          </a:prstGeom>
+          <a:noFill/>
+        </p:spPr>
+        <p:txBody>
+          <a:bodyPr wrap="square" anchor="ctr">
+            <a:spAutoFit/>
+          </a:bodyPr>
+          <a:lstStyle/>
+          <a:p>
+            <a:pPr algn="l"/>
+            <a:r>
+              <a:rPr sz="800" b="0">
+                <a:solidFill>
+                  <a:srgbClr val="465269"/>
+                </a:solidFill>
+                <a:latin typeface="Calibri"/>
+              </a:rPr>
+              <a:t>FTRANSPORT - SERVICES PRO  •  Convention CPAM — exemples pédagogiques</a:t>
+            </a:r>
+          </a:p>
+        </p:txBody>
+      </p:sp>
+      <p:sp>
+        <p:nvSpPr>
+          <p:cNvPr id="30" name="TextBox 29"/>
+          <p:cNvSpPr txBox="1"/>
+          <p:nvPr/>
+        </p:nvSpPr>
+        <p:spPr>
+          <a:xfrm>
+            <a:off x="7882127" y="4389120"/>
+            <a:ext cx="228600" cy="182880"/>
+          </a:xfrm>
+          <a:prstGeom prst="rect">
+            <a:avLst/>
+          </a:prstGeom>
+          <a:noFill/>
+        </p:spPr>
+        <p:txBody>
+          <a:bodyPr wrap="square" anchor="ctr">
+            <a:spAutoFit/>
+          </a:bodyPr>
+          <a:lstStyle/>
+          <a:p>
+            <a:pPr algn="r"/>
+            <a:r>
+              <a:rPr sz="800" b="0">
+                <a:solidFill>
+                  <a:srgbClr val="465269"/>
+                </a:solidFill>
+                <a:latin typeface="Calibri"/>
               </a:rPr>
               <a:t>5</a:t>
             </a:r>
-            <a:endParaRPr lang="en-US" sz="800" dirty="0"/>
           </a:p>
         </p:txBody>
       </p:sp>
@@ -7205,119 +8174,84 @@
       </p:grpSpPr>
       <p:sp>
         <p:nvSpPr>
-          <p:cNvPr id="2" name="Shape 0"/>
-          <p:cNvSpPr/>
-          <p:nvPr/>
-        </p:nvSpPr>
-        <p:spPr>
-          <a:xfrm>
-            <a:off x="0" y="0"/>
-            <a:ext cx="9144000" cy="502920"/>
-          </a:xfrm>
-          <a:prstGeom prst="rect">
-            <a:avLst/>
-          </a:prstGeom>
-          <a:solidFill>
-            <a:srgbClr val="283A5E"/>
-          </a:solidFill>
-          <a:ln/>
-        </p:spPr>
-        <p:txBody>
-          <a:bodyPr/>
-          <a:lstStyle/>
-          <a:p>
-            <a:endParaRPr lang="fr-FR"/>
-          </a:p>
-        </p:txBody>
-      </p:sp>
-      <p:sp>
-        <p:nvSpPr>
-          <p:cNvPr id="3" name="Text 1"/>
-          <p:cNvSpPr/>
-          <p:nvPr/>
-        </p:nvSpPr>
-        <p:spPr>
-          <a:xfrm>
-            <a:off x="457200" y="0"/>
-            <a:ext cx="8229600" cy="502920"/>
-          </a:xfrm>
-          <a:prstGeom prst="rect">
-            <a:avLst/>
-          </a:prstGeom>
-          <a:noFill/>
-          <a:ln/>
-        </p:spPr>
-        <p:txBody>
-          <a:bodyPr wrap="square" rtlCol="0" anchor="ctr"/>
-          <a:lstStyle/>
-          <a:p>
-            <a:pPr marL="0" indent="0">
-              <a:buNone/>
-            </a:pPr>
-            <a:r>
-              <a:rPr lang="en-US" sz="900" b="1" kern="0" spc="200" dirty="0">
-                <a:solidFill>
-                  <a:srgbClr val="D4A843"/>
-                </a:solidFill>
-                <a:latin typeface="Calibri" pitchFamily="34" charset="0"/>
-                <a:ea typeface="Calibri" pitchFamily="34" charset="-122"/>
-                <a:cs typeface="Calibri" pitchFamily="34" charset="-120"/>
+          <p:cNvPr id="2" name="TextBox 1"/>
+          <p:cNvSpPr txBox="1"/>
+          <p:nvPr/>
+        </p:nvSpPr>
+        <p:spPr>
+          <a:xfrm>
+            <a:off x="438912" y="164592"/>
+            <a:ext cx="2926080" cy="274320"/>
+          </a:xfrm>
+          <a:prstGeom prst="rect">
+            <a:avLst/>
+          </a:prstGeom>
+          <a:noFill/>
+        </p:spPr>
+        <p:txBody>
+          <a:bodyPr wrap="square" anchor="ctr">
+            <a:spAutoFit/>
+          </a:bodyPr>
+          <a:lstStyle/>
+          <a:p>
+            <a:pPr algn="l"/>
+            <a:r>
+              <a:rPr sz="1100" b="1">
+                <a:solidFill>
+                  <a:srgbClr val="E8B22D"/>
+                </a:solidFill>
+                <a:latin typeface="Calibri"/>
               </a:rPr>
               <a:t>PARTIE 3 — COURS</a:t>
             </a:r>
-            <a:endParaRPr lang="en-US" sz="900" dirty="0"/>
-          </a:p>
-        </p:txBody>
-      </p:sp>
-      <p:sp>
-        <p:nvSpPr>
-          <p:cNvPr id="4" name="Text 2"/>
-          <p:cNvSpPr/>
-          <p:nvPr/>
-        </p:nvSpPr>
-        <p:spPr>
-          <a:xfrm>
-            <a:off x="457200" y="640080"/>
-            <a:ext cx="8229600" cy="411480"/>
-          </a:xfrm>
-          <a:prstGeom prst="rect">
-            <a:avLst/>
-          </a:prstGeom>
-          <a:noFill/>
-          <a:ln/>
-        </p:spPr>
-        <p:txBody>
-          <a:bodyPr wrap="square" rtlCol="0" anchor="ctr"/>
-          <a:lstStyle/>
-          <a:p>
-            <a:pPr marL="0" indent="0">
-              <a:buNone/>
-            </a:pPr>
-            <a:r>
-              <a:rPr lang="en-US" sz="1700" b="1" dirty="0">
-                <a:solidFill>
-                  <a:srgbClr val="1A202C"/>
-                </a:solidFill>
-                <a:latin typeface="Georgia" pitchFamily="34" charset="0"/>
-                <a:ea typeface="Georgia" pitchFamily="34" charset="-122"/>
-                <a:cs typeface="Georgia" pitchFamily="34" charset="-120"/>
-              </a:rPr>
-              <a:t>Majorations hospitalisation &amp; supplément PMR</a:t>
-            </a:r>
-            <a:endParaRPr lang="en-US" sz="1700" dirty="0"/>
-          </a:p>
-        </p:txBody>
-      </p:sp>
-      <p:sp>
-        <p:nvSpPr>
-          <p:cNvPr id="5" name="Shape 3"/>
-          <p:cNvSpPr/>
-          <p:nvPr/>
-        </p:nvSpPr>
-        <p:spPr>
-          <a:xfrm>
-            <a:off x="457200" y="1188720"/>
-            <a:ext cx="2606040" cy="2011680"/>
+          </a:p>
+        </p:txBody>
+      </p:sp>
+      <p:sp>
+        <p:nvSpPr>
+          <p:cNvPr id="3" name="TextBox 2"/>
+          <p:cNvSpPr txBox="1"/>
+          <p:nvPr/>
+        </p:nvSpPr>
+        <p:spPr>
+          <a:xfrm>
+            <a:off x="438912" y="530352"/>
+            <a:ext cx="7498079" cy="502920"/>
+          </a:xfrm>
+          <a:prstGeom prst="rect">
+            <a:avLst/>
+          </a:prstGeom>
+          <a:noFill/>
+        </p:spPr>
+        <p:txBody>
+          <a:bodyPr wrap="square" anchor="ctr">
+            <a:spAutoFit/>
+          </a:bodyPr>
+          <a:lstStyle/>
+          <a:p>
+            <a:pPr algn="l"/>
+            <a:r>
+              <a:rPr sz="2500" b="1">
+                <a:solidFill>
+                  <a:srgbClr val="1C202B"/>
+                </a:solidFill>
+                <a:latin typeface="Georgia"/>
+              </a:rPr>
+              <a:t>Hospitalisation — +25 % / +50 % : ce que cela signifie</a:t>
+            </a:r>
+          </a:p>
+        </p:txBody>
+      </p:sp>
+      <p:sp>
+        <p:nvSpPr>
+          <p:cNvPr id="4" name="Rectangle 3"/>
+          <p:cNvSpPr/>
+          <p:nvPr/>
+        </p:nvSpPr>
+        <p:spPr>
+          <a:xfrm>
+            <a:off x="411480" y="1234440"/>
+            <a:ext cx="3657600" cy="1143000"/>
           </a:xfrm>
           <a:prstGeom prst="rect">
             <a:avLst/>
@@ -7325,211 +8259,161 @@
           <a:solidFill>
             <a:srgbClr val="FFFFFF"/>
           </a:solidFill>
-          <a:ln/>
-          <a:effectLst>
-            <a:outerShdw blurRad="50800" dist="25400" dir="8100000" algn="bl" rotWithShape="0">
-              <a:srgbClr val="000000">
-                <a:alpha val="8000"/>
-              </a:srgbClr>
-            </a:outerShdw>
-          </a:effectLst>
-        </p:spPr>
-        <p:txBody>
-          <a:bodyPr/>
-          <a:lstStyle/>
-          <a:p>
-            <a:endParaRPr lang="fr-FR"/>
-          </a:p>
-        </p:txBody>
-      </p:sp>
-      <p:sp>
-        <p:nvSpPr>
-          <p:cNvPr id="6" name="Shape 4"/>
-          <p:cNvSpPr/>
-          <p:nvPr/>
-        </p:nvSpPr>
-        <p:spPr>
-          <a:xfrm>
-            <a:off x="457200" y="1188720"/>
-            <a:ext cx="2606040" cy="54864"/>
+          <a:ln>
+            <a:solidFill>
+              <a:srgbClr val="FFFFFF"/>
+            </a:solidFill>
+          </a:ln>
+        </p:spPr>
+        <p:style>
+          <a:lnRef idx="1">
+            <a:schemeClr val="accent1"/>
+          </a:lnRef>
+          <a:fillRef idx="3">
+            <a:schemeClr val="accent1"/>
+          </a:fillRef>
+          <a:effectRef idx="2">
+            <a:schemeClr val="accent1"/>
+          </a:effectRef>
+          <a:fontRef idx="minor">
+            <a:schemeClr val="lt1"/>
+          </a:fontRef>
+        </p:style>
+        <p:txBody>
+          <a:bodyPr rtlCol="0" anchor="ctr"/>
+          <a:lstStyle/>
+          <a:p>
+            <a:pPr algn="ctr"/>
+            <a:endParaRPr/>
+          </a:p>
+        </p:txBody>
+      </p:sp>
+      <p:sp>
+        <p:nvSpPr>
+          <p:cNvPr id="5" name="Rectangle 4"/>
+          <p:cNvSpPr/>
+          <p:nvPr/>
+        </p:nvSpPr>
+        <p:spPr>
+          <a:xfrm>
+            <a:off x="411480" y="1234440"/>
+            <a:ext cx="3657600" cy="64008"/>
           </a:xfrm>
           <a:prstGeom prst="rect">
             <a:avLst/>
           </a:prstGeom>
           <a:solidFill>
-            <a:srgbClr val="2B6CB0"/>
+            <a:srgbClr val="2B6FB8"/>
           </a:solidFill>
-          <a:ln/>
-        </p:spPr>
-        <p:txBody>
-          <a:bodyPr/>
-          <a:lstStyle/>
-          <a:p>
-            <a:endParaRPr lang="fr-FR"/>
-          </a:p>
-        </p:txBody>
-      </p:sp>
-      <p:sp>
-        <p:nvSpPr>
-          <p:cNvPr id="7" name="Text 5"/>
-          <p:cNvSpPr/>
-          <p:nvPr/>
-        </p:nvSpPr>
-        <p:spPr>
-          <a:xfrm>
-            <a:off x="457200" y="1371600"/>
-            <a:ext cx="2606040" cy="640080"/>
-          </a:xfrm>
-          <a:prstGeom prst="rect">
-            <a:avLst/>
-          </a:prstGeom>
-          <a:noFill/>
-          <a:ln/>
-        </p:spPr>
-        <p:txBody>
-          <a:bodyPr wrap="square" rtlCol="0" anchor="ctr"/>
-          <a:lstStyle/>
-          <a:p>
-            <a:pPr marL="0" indent="0" algn="ctr">
-              <a:buNone/>
-            </a:pPr>
-            <a:r>
-              <a:rPr lang="en-US" sz="4000" b="1" dirty="0">
-                <a:solidFill>
-                  <a:srgbClr val="2B6CB0"/>
-                </a:solidFill>
-                <a:latin typeface="Georgia" pitchFamily="34" charset="0"/>
-                <a:ea typeface="Georgia" pitchFamily="34" charset="-122"/>
-                <a:cs typeface="Georgia" pitchFamily="34" charset="-120"/>
-              </a:rPr>
-              <a:t>+25%</a:t>
-            </a:r>
-            <a:endParaRPr lang="en-US" sz="4000" dirty="0"/>
-          </a:p>
-        </p:txBody>
-      </p:sp>
-      <p:sp>
-        <p:nvSpPr>
-          <p:cNvPr id="8" name="Text 6"/>
-          <p:cNvSpPr/>
-          <p:nvPr/>
-        </p:nvSpPr>
-        <p:spPr>
-          <a:xfrm>
-            <a:off x="548640" y="2103120"/>
-            <a:ext cx="2423160" cy="457200"/>
-          </a:xfrm>
-          <a:prstGeom prst="rect">
-            <a:avLst/>
-          </a:prstGeom>
-          <a:noFill/>
-          <a:ln/>
-        </p:spPr>
-        <p:txBody>
-          <a:bodyPr wrap="square" rtlCol="0" anchor="ctr"/>
-          <a:lstStyle/>
-          <a:p>
-            <a:pPr marL="0" indent="0" algn="ctr">
-              <a:buNone/>
-            </a:pPr>
-            <a:r>
-              <a:rPr lang="en-US" sz="1000" b="1" dirty="0">
-                <a:solidFill>
-                  <a:srgbClr val="1A202C"/>
-                </a:solidFill>
-                <a:latin typeface="Calibri" pitchFamily="34" charset="0"/>
-                <a:ea typeface="Calibri" pitchFamily="34" charset="-122"/>
-                <a:cs typeface="Calibri" pitchFamily="34" charset="-120"/>
-              </a:rPr>
-              <a:t>Distance en charge</a:t>
-            </a:r>
-            <a:endParaRPr lang="en-US" sz="1000" dirty="0"/>
-          </a:p>
-          <a:p>
-            <a:pPr marL="0" indent="0" algn="ctr">
-              <a:buNone/>
-            </a:pPr>
-            <a:r>
-              <a:rPr lang="en-US" sz="1000" b="1" dirty="0">
-                <a:solidFill>
-                  <a:srgbClr val="1A202C"/>
-                </a:solidFill>
-                <a:latin typeface="Calibri" pitchFamily="34" charset="0"/>
-                <a:ea typeface="Calibri" pitchFamily="34" charset="-122"/>
-                <a:cs typeface="Calibri" pitchFamily="34" charset="-120"/>
-              </a:rPr>
-              <a:t>&lt; 50 km</a:t>
-            </a:r>
-            <a:endParaRPr lang="en-US" sz="1000" dirty="0"/>
-          </a:p>
-        </p:txBody>
-      </p:sp>
-      <p:sp>
-        <p:nvSpPr>
-          <p:cNvPr id="9" name="Text 7"/>
-          <p:cNvSpPr/>
-          <p:nvPr/>
-        </p:nvSpPr>
-        <p:spPr>
-          <a:xfrm>
-            <a:off x="548640" y="2606040"/>
-            <a:ext cx="2423160" cy="365760"/>
-          </a:xfrm>
-          <a:prstGeom prst="rect">
-            <a:avLst/>
-          </a:prstGeom>
-          <a:noFill/>
-          <a:ln/>
-        </p:spPr>
-        <p:txBody>
-          <a:bodyPr wrap="square" rtlCol="0" anchor="ctr"/>
-          <a:lstStyle/>
-          <a:p>
-            <a:pPr marL="0" indent="0" algn="ctr">
-              <a:buNone/>
-            </a:pPr>
-            <a:r>
-              <a:rPr lang="en-US" sz="800" dirty="0">
-                <a:solidFill>
-                  <a:srgbClr val="4A5568"/>
-                </a:solidFill>
-                <a:latin typeface="Calibri" pitchFamily="34" charset="0"/>
-                <a:ea typeface="Calibri" pitchFamily="34" charset="-122"/>
-                <a:cs typeface="Calibri" pitchFamily="34" charset="-120"/>
-              </a:rPr>
-              <a:t>Hospitalisation</a:t>
-            </a:r>
-            <a:endParaRPr lang="en-US" sz="800" dirty="0"/>
-          </a:p>
-          <a:p>
-            <a:pPr marL="0" indent="0" algn="ctr">
-              <a:buNone/>
-            </a:pPr>
-            <a:r>
-              <a:rPr lang="en-US" sz="800" dirty="0">
-                <a:solidFill>
-                  <a:srgbClr val="4A5568"/>
-                </a:solidFill>
-                <a:latin typeface="Calibri" pitchFamily="34" charset="0"/>
-                <a:ea typeface="Calibri" pitchFamily="34" charset="-122"/>
-                <a:cs typeface="Calibri" pitchFamily="34" charset="-120"/>
-              </a:rPr>
-              <a:t>avec retour à vide</a:t>
-            </a:r>
-            <a:endParaRPr lang="en-US" sz="800" dirty="0"/>
-          </a:p>
-        </p:txBody>
-      </p:sp>
-      <p:sp>
-        <p:nvSpPr>
-          <p:cNvPr id="10" name="Shape 8"/>
-          <p:cNvSpPr/>
-          <p:nvPr/>
-        </p:nvSpPr>
-        <p:spPr>
-          <a:xfrm>
-            <a:off x="3246120" y="1188720"/>
-            <a:ext cx="2606040" cy="2011680"/>
+          <a:ln>
+            <a:solidFill>
+              <a:srgbClr val="2B6FB8"/>
+            </a:solidFill>
+          </a:ln>
+        </p:spPr>
+        <p:style>
+          <a:lnRef idx="1">
+            <a:schemeClr val="accent1"/>
+          </a:lnRef>
+          <a:fillRef idx="3">
+            <a:schemeClr val="accent1"/>
+          </a:fillRef>
+          <a:effectRef idx="2">
+            <a:schemeClr val="accent1"/>
+          </a:effectRef>
+          <a:fontRef idx="minor">
+            <a:schemeClr val="lt1"/>
+          </a:fontRef>
+        </p:style>
+        <p:txBody>
+          <a:bodyPr rtlCol="0" anchor="ctr"/>
+          <a:lstStyle/>
+          <a:p>
+            <a:pPr algn="ctr"/>
+            <a:endParaRPr/>
+          </a:p>
+        </p:txBody>
+      </p:sp>
+      <p:sp>
+        <p:nvSpPr>
+          <p:cNvPr id="6" name="TextBox 5"/>
+          <p:cNvSpPr txBox="1"/>
+          <p:nvPr/>
+        </p:nvSpPr>
+        <p:spPr>
+          <a:xfrm>
+            <a:off x="594360" y="1435608"/>
+            <a:ext cx="3291840" cy="320040"/>
+          </a:xfrm>
+          <a:prstGeom prst="rect">
+            <a:avLst/>
+          </a:prstGeom>
+          <a:noFill/>
+        </p:spPr>
+        <p:txBody>
+          <a:bodyPr wrap="square" anchor="ctr">
+            <a:spAutoFit/>
+          </a:bodyPr>
+          <a:lstStyle/>
+          <a:p>
+            <a:pPr algn="ctr"/>
+            <a:r>
+              <a:rPr sz="3000" b="1">
+                <a:solidFill>
+                  <a:srgbClr val="2B6FB8"/>
+                </a:solidFill>
+                <a:latin typeface="Calibri"/>
+              </a:rPr>
+              <a:t>+25 %</a:t>
+            </a:r>
+          </a:p>
+        </p:txBody>
+      </p:sp>
+      <p:sp>
+        <p:nvSpPr>
+          <p:cNvPr id="7" name="TextBox 6"/>
+          <p:cNvSpPr txBox="1"/>
+          <p:nvPr/>
+        </p:nvSpPr>
+        <p:spPr>
+          <a:xfrm>
+            <a:off x="594360" y="1810512"/>
+            <a:ext cx="3291840" cy="320040"/>
+          </a:xfrm>
+          <a:prstGeom prst="rect">
+            <a:avLst/>
+          </a:prstGeom>
+          <a:noFill/>
+        </p:spPr>
+        <p:txBody>
+          <a:bodyPr wrap="square" anchor="ctr">
+            <a:spAutoFit/>
+          </a:bodyPr>
+          <a:lstStyle/>
+          <a:p>
+            <a:pPr algn="ctr"/>
+            <a:r>
+              <a:rPr sz="1400" b="1">
+                <a:solidFill>
+                  <a:srgbClr val="1C202B"/>
+                </a:solidFill>
+                <a:latin typeface="Calibri"/>
+              </a:rPr>
+              <a:t>trajet EN CHARGE &lt; 50 km</a:t>
+            </a:r>
+          </a:p>
+        </p:txBody>
+      </p:sp>
+      <p:sp>
+        <p:nvSpPr>
+          <p:cNvPr id="8" name="Rectangle 7"/>
+          <p:cNvSpPr/>
+          <p:nvPr/>
+        </p:nvSpPr>
+        <p:spPr>
+          <a:xfrm>
+            <a:off x="4251960" y="1234440"/>
+            <a:ext cx="3657600" cy="1143000"/>
           </a:xfrm>
           <a:prstGeom prst="rect">
             <a:avLst/>
@@ -7537,708 +8421,407 @@
           <a:solidFill>
             <a:srgbClr val="FFFFFF"/>
           </a:solidFill>
-          <a:ln/>
-          <a:effectLst>
-            <a:outerShdw blurRad="50800" dist="25400" dir="8100000" algn="bl" rotWithShape="0">
-              <a:srgbClr val="000000">
-                <a:alpha val="8000"/>
-              </a:srgbClr>
-            </a:outerShdw>
-          </a:effectLst>
-        </p:spPr>
-        <p:txBody>
-          <a:bodyPr/>
-          <a:lstStyle/>
-          <a:p>
-            <a:endParaRPr lang="fr-FR"/>
-          </a:p>
-        </p:txBody>
-      </p:sp>
-      <p:sp>
-        <p:nvSpPr>
-          <p:cNvPr id="11" name="Shape 9"/>
-          <p:cNvSpPr/>
-          <p:nvPr/>
-        </p:nvSpPr>
-        <p:spPr>
-          <a:xfrm>
-            <a:off x="3246120" y="1188720"/>
-            <a:ext cx="2606040" cy="54864"/>
+          <a:ln>
+            <a:solidFill>
+              <a:srgbClr val="FFFFFF"/>
+            </a:solidFill>
+          </a:ln>
+        </p:spPr>
+        <p:style>
+          <a:lnRef idx="1">
+            <a:schemeClr val="accent1"/>
+          </a:lnRef>
+          <a:fillRef idx="3">
+            <a:schemeClr val="accent1"/>
+          </a:fillRef>
+          <a:effectRef idx="2">
+            <a:schemeClr val="accent1"/>
+          </a:effectRef>
+          <a:fontRef idx="minor">
+            <a:schemeClr val="lt1"/>
+          </a:fontRef>
+        </p:style>
+        <p:txBody>
+          <a:bodyPr rtlCol="0" anchor="ctr"/>
+          <a:lstStyle/>
+          <a:p>
+            <a:pPr algn="ctr"/>
+            <a:endParaRPr/>
+          </a:p>
+        </p:txBody>
+      </p:sp>
+      <p:sp>
+        <p:nvSpPr>
+          <p:cNvPr id="9" name="Rectangle 8"/>
+          <p:cNvSpPr/>
+          <p:nvPr/>
+        </p:nvSpPr>
+        <p:spPr>
+          <a:xfrm>
+            <a:off x="4251960" y="1234440"/>
+            <a:ext cx="3657600" cy="64008"/>
           </a:xfrm>
           <a:prstGeom prst="rect">
             <a:avLst/>
           </a:prstGeom>
           <a:solidFill>
-            <a:srgbClr val="C53030"/>
+            <a:srgbClr val="C92B30"/>
           </a:solidFill>
-          <a:ln/>
-        </p:spPr>
-        <p:txBody>
-          <a:bodyPr/>
-          <a:lstStyle/>
-          <a:p>
-            <a:endParaRPr lang="fr-FR"/>
-          </a:p>
-        </p:txBody>
-      </p:sp>
-      <p:sp>
-        <p:nvSpPr>
-          <p:cNvPr id="12" name="Text 10"/>
-          <p:cNvSpPr/>
-          <p:nvPr/>
-        </p:nvSpPr>
-        <p:spPr>
-          <a:xfrm>
-            <a:off x="3246120" y="1371600"/>
-            <a:ext cx="2606040" cy="640080"/>
-          </a:xfrm>
-          <a:prstGeom prst="rect">
-            <a:avLst/>
-          </a:prstGeom>
-          <a:noFill/>
-          <a:ln/>
-        </p:spPr>
-        <p:txBody>
-          <a:bodyPr wrap="square" rtlCol="0" anchor="ctr"/>
-          <a:lstStyle/>
-          <a:p>
-            <a:pPr marL="0" indent="0" algn="ctr">
-              <a:buNone/>
-            </a:pPr>
-            <a:r>
-              <a:rPr lang="en-US" sz="4000" b="1" dirty="0">
-                <a:solidFill>
-                  <a:srgbClr val="C53030"/>
-                </a:solidFill>
-                <a:latin typeface="Georgia" pitchFamily="34" charset="0"/>
-                <a:ea typeface="Georgia" pitchFamily="34" charset="-122"/>
-                <a:cs typeface="Georgia" pitchFamily="34" charset="-120"/>
-              </a:rPr>
-              <a:t>+50%</a:t>
-            </a:r>
-            <a:endParaRPr lang="en-US" sz="4000" dirty="0"/>
-          </a:p>
-        </p:txBody>
-      </p:sp>
-      <p:sp>
-        <p:nvSpPr>
-          <p:cNvPr id="13" name="Text 11"/>
-          <p:cNvSpPr/>
-          <p:nvPr/>
-        </p:nvSpPr>
-        <p:spPr>
-          <a:xfrm>
-            <a:off x="3337560" y="2103120"/>
-            <a:ext cx="2423160" cy="457200"/>
-          </a:xfrm>
-          <a:prstGeom prst="rect">
-            <a:avLst/>
-          </a:prstGeom>
-          <a:noFill/>
-          <a:ln/>
-        </p:spPr>
-        <p:txBody>
-          <a:bodyPr wrap="square" rtlCol="0" anchor="ctr"/>
-          <a:lstStyle/>
-          <a:p>
-            <a:pPr marL="0" indent="0" algn="ctr">
-              <a:buNone/>
-            </a:pPr>
-            <a:r>
-              <a:rPr lang="en-US" sz="1000" b="1" dirty="0">
-                <a:solidFill>
-                  <a:srgbClr val="1A202C"/>
-                </a:solidFill>
-                <a:latin typeface="Calibri" pitchFamily="34" charset="0"/>
-                <a:ea typeface="Calibri" pitchFamily="34" charset="-122"/>
-                <a:cs typeface="Calibri" pitchFamily="34" charset="-120"/>
-              </a:rPr>
-              <a:t>Distance en charge</a:t>
-            </a:r>
-            <a:endParaRPr lang="en-US" sz="1000" dirty="0"/>
-          </a:p>
-          <a:p>
-            <a:pPr marL="0" indent="0" algn="ctr">
-              <a:buNone/>
-            </a:pPr>
-            <a:r>
-              <a:rPr lang="en-US" sz="1000" b="1" dirty="0">
-                <a:solidFill>
-                  <a:srgbClr val="1A202C"/>
-                </a:solidFill>
-                <a:latin typeface="Calibri" pitchFamily="34" charset="0"/>
-                <a:ea typeface="Calibri" pitchFamily="34" charset="-122"/>
-                <a:cs typeface="Calibri" pitchFamily="34" charset="-120"/>
-              </a:rPr>
-              <a:t>≥ 50 km</a:t>
-            </a:r>
-            <a:endParaRPr lang="en-US" sz="1000" dirty="0"/>
-          </a:p>
-        </p:txBody>
-      </p:sp>
-      <p:sp>
-        <p:nvSpPr>
-          <p:cNvPr id="14" name="Text 12"/>
-          <p:cNvSpPr/>
-          <p:nvPr/>
-        </p:nvSpPr>
-        <p:spPr>
-          <a:xfrm>
-            <a:off x="3337560" y="2606040"/>
-            <a:ext cx="2423160" cy="365760"/>
-          </a:xfrm>
-          <a:prstGeom prst="rect">
-            <a:avLst/>
-          </a:prstGeom>
-          <a:noFill/>
-          <a:ln/>
-        </p:spPr>
-        <p:txBody>
-          <a:bodyPr wrap="square" rtlCol="0" anchor="ctr"/>
-          <a:lstStyle/>
-          <a:p>
-            <a:pPr marL="0" indent="0" algn="ctr">
-              <a:buNone/>
-            </a:pPr>
-            <a:r>
-              <a:rPr lang="en-US" sz="800" dirty="0">
-                <a:solidFill>
-                  <a:srgbClr val="4A5568"/>
-                </a:solidFill>
-                <a:latin typeface="Calibri" pitchFamily="34" charset="0"/>
-                <a:ea typeface="Calibri" pitchFamily="34" charset="-122"/>
-                <a:cs typeface="Calibri" pitchFamily="34" charset="-120"/>
-              </a:rPr>
-              <a:t>Hospitalisation</a:t>
-            </a:r>
-            <a:endParaRPr lang="en-US" sz="800" dirty="0"/>
-          </a:p>
-          <a:p>
-            <a:pPr marL="0" indent="0" algn="ctr">
-              <a:buNone/>
-            </a:pPr>
-            <a:r>
-              <a:rPr lang="en-US" sz="800" dirty="0">
-                <a:solidFill>
-                  <a:srgbClr val="4A5568"/>
-                </a:solidFill>
-                <a:latin typeface="Calibri" pitchFamily="34" charset="0"/>
-                <a:ea typeface="Calibri" pitchFamily="34" charset="-122"/>
-                <a:cs typeface="Calibri" pitchFamily="34" charset="-120"/>
-              </a:rPr>
-              <a:t>avec retour à vide</a:t>
-            </a:r>
-            <a:endParaRPr lang="en-US" sz="800" dirty="0"/>
-          </a:p>
-        </p:txBody>
-      </p:sp>
-      <p:sp>
-        <p:nvSpPr>
-          <p:cNvPr id="15" name="Shape 13"/>
-          <p:cNvSpPr/>
-          <p:nvPr/>
-        </p:nvSpPr>
-        <p:spPr>
-          <a:xfrm>
-            <a:off x="6035040" y="1188720"/>
-            <a:ext cx="2651760" cy="2011680"/>
+          <a:ln>
+            <a:solidFill>
+              <a:srgbClr val="C92B30"/>
+            </a:solidFill>
+          </a:ln>
+        </p:spPr>
+        <p:style>
+          <a:lnRef idx="1">
+            <a:schemeClr val="accent1"/>
+          </a:lnRef>
+          <a:fillRef idx="3">
+            <a:schemeClr val="accent1"/>
+          </a:fillRef>
+          <a:effectRef idx="2">
+            <a:schemeClr val="accent1"/>
+          </a:effectRef>
+          <a:fontRef idx="minor">
+            <a:schemeClr val="lt1"/>
+          </a:fontRef>
+        </p:style>
+        <p:txBody>
+          <a:bodyPr rtlCol="0" anchor="ctr"/>
+          <a:lstStyle/>
+          <a:p>
+            <a:pPr algn="ctr"/>
+            <a:endParaRPr/>
+          </a:p>
+        </p:txBody>
+      </p:sp>
+      <p:sp>
+        <p:nvSpPr>
+          <p:cNvPr id="10" name="TextBox 9"/>
+          <p:cNvSpPr txBox="1"/>
+          <p:nvPr/>
+        </p:nvSpPr>
+        <p:spPr>
+          <a:xfrm>
+            <a:off x="4434840" y="1435608"/>
+            <a:ext cx="3291840" cy="320040"/>
+          </a:xfrm>
+          <a:prstGeom prst="rect">
+            <a:avLst/>
+          </a:prstGeom>
+          <a:noFill/>
+        </p:spPr>
+        <p:txBody>
+          <a:bodyPr wrap="square" anchor="ctr">
+            <a:spAutoFit/>
+          </a:bodyPr>
+          <a:lstStyle/>
+          <a:p>
+            <a:pPr algn="ctr"/>
+            <a:r>
+              <a:rPr sz="3000" b="1">
+                <a:solidFill>
+                  <a:srgbClr val="C92B30"/>
+                </a:solidFill>
+                <a:latin typeface="Calibri"/>
+              </a:rPr>
+              <a:t>+50 %</a:t>
+            </a:r>
+          </a:p>
+        </p:txBody>
+      </p:sp>
+      <p:sp>
+        <p:nvSpPr>
+          <p:cNvPr id="11" name="TextBox 10"/>
+          <p:cNvSpPr txBox="1"/>
+          <p:nvPr/>
+        </p:nvSpPr>
+        <p:spPr>
+          <a:xfrm>
+            <a:off x="4434840" y="1810512"/>
+            <a:ext cx="3291840" cy="320040"/>
+          </a:xfrm>
+          <a:prstGeom prst="rect">
+            <a:avLst/>
+          </a:prstGeom>
+          <a:noFill/>
+        </p:spPr>
+        <p:txBody>
+          <a:bodyPr wrap="square" anchor="ctr">
+            <a:spAutoFit/>
+          </a:bodyPr>
+          <a:lstStyle/>
+          <a:p>
+            <a:pPr algn="ctr"/>
+            <a:r>
+              <a:rPr sz="1400" b="1">
+                <a:solidFill>
+                  <a:srgbClr val="1C202B"/>
+                </a:solidFill>
+                <a:latin typeface="Calibri"/>
+              </a:rPr>
+              <a:t>trajet EN CHARGE ≥ 50 km</a:t>
+            </a:r>
+          </a:p>
+        </p:txBody>
+      </p:sp>
+      <p:sp>
+        <p:nvSpPr>
+          <p:cNvPr id="12" name="Rectangle 11"/>
+          <p:cNvSpPr/>
+          <p:nvPr/>
+        </p:nvSpPr>
+        <p:spPr>
+          <a:xfrm>
+            <a:off x="411480" y="2578608"/>
+            <a:ext cx="7498079" cy="1417320"/>
           </a:xfrm>
           <a:prstGeom prst="rect">
             <a:avLst/>
           </a:prstGeom>
           <a:solidFill>
-            <a:srgbClr val="FFFFFF"/>
+            <a:srgbClr val="FDF2EA"/>
           </a:solidFill>
-          <a:ln/>
-          <a:effectLst>
-            <a:outerShdw blurRad="50800" dist="25400" dir="8100000" algn="bl" rotWithShape="0">
-              <a:srgbClr val="000000">
-                <a:alpha val="8000"/>
-              </a:srgbClr>
-            </a:outerShdw>
-          </a:effectLst>
-        </p:spPr>
-        <p:txBody>
-          <a:bodyPr/>
-          <a:lstStyle/>
-          <a:p>
-            <a:endParaRPr lang="fr-FR"/>
-          </a:p>
-        </p:txBody>
-      </p:sp>
-      <p:sp>
-        <p:nvSpPr>
-          <p:cNvPr id="16" name="Shape 14"/>
-          <p:cNvSpPr/>
-          <p:nvPr/>
-        </p:nvSpPr>
-        <p:spPr>
-          <a:xfrm>
-            <a:off x="6035040" y="1188720"/>
-            <a:ext cx="2651760" cy="54864"/>
-          </a:xfrm>
-          <a:prstGeom prst="rect">
-            <a:avLst/>
-          </a:prstGeom>
-          <a:solidFill>
-            <a:srgbClr val="276749"/>
-          </a:solidFill>
-          <a:ln/>
-        </p:spPr>
-        <p:txBody>
-          <a:bodyPr/>
-          <a:lstStyle/>
-          <a:p>
-            <a:endParaRPr lang="fr-FR"/>
-          </a:p>
-        </p:txBody>
-      </p:sp>
-      <p:sp>
-        <p:nvSpPr>
-          <p:cNvPr id="17" name="Text 15"/>
-          <p:cNvSpPr/>
-          <p:nvPr/>
-        </p:nvSpPr>
-        <p:spPr>
-          <a:xfrm>
-            <a:off x="6035040" y="1371600"/>
-            <a:ext cx="2651760" cy="640080"/>
-          </a:xfrm>
-          <a:prstGeom prst="rect">
-            <a:avLst/>
-          </a:prstGeom>
-          <a:noFill/>
-          <a:ln/>
-        </p:spPr>
-        <p:txBody>
-          <a:bodyPr wrap="square" rtlCol="0" anchor="ctr"/>
-          <a:lstStyle/>
-          <a:p>
-            <a:pPr marL="0" indent="0" algn="ctr">
-              <a:buNone/>
-            </a:pPr>
-            <a:r>
-              <a:rPr lang="en-US" sz="4000" b="1" dirty="0">
-                <a:solidFill>
-                  <a:srgbClr val="276749"/>
-                </a:solidFill>
-                <a:latin typeface="Georgia" pitchFamily="34" charset="0"/>
-                <a:ea typeface="Georgia" pitchFamily="34" charset="-122"/>
-                <a:cs typeface="Georgia" pitchFamily="34" charset="-120"/>
-              </a:rPr>
-              <a:t>30 €</a:t>
-            </a:r>
-            <a:endParaRPr lang="en-US" sz="4000" dirty="0"/>
-          </a:p>
-        </p:txBody>
-      </p:sp>
-      <p:sp>
-        <p:nvSpPr>
-          <p:cNvPr id="18" name="Text 16"/>
-          <p:cNvSpPr/>
-          <p:nvPr/>
-        </p:nvSpPr>
-        <p:spPr>
-          <a:xfrm>
-            <a:off x="6126480" y="2103120"/>
-            <a:ext cx="2468880" cy="457200"/>
-          </a:xfrm>
-          <a:prstGeom prst="rect">
-            <a:avLst/>
-          </a:prstGeom>
-          <a:noFill/>
-          <a:ln/>
-        </p:spPr>
-        <p:txBody>
-          <a:bodyPr wrap="square" rtlCol="0" anchor="ctr"/>
-          <a:lstStyle/>
-          <a:p>
-            <a:pPr marL="0" indent="0" algn="ctr">
-              <a:buNone/>
-            </a:pPr>
-            <a:r>
-              <a:rPr lang="en-US" sz="1000" b="1" dirty="0">
-                <a:solidFill>
-                  <a:srgbClr val="1A202C"/>
-                </a:solidFill>
-                <a:latin typeface="Calibri" pitchFamily="34" charset="0"/>
-                <a:ea typeface="Calibri" pitchFamily="34" charset="-122"/>
-                <a:cs typeface="Calibri" pitchFamily="34" charset="-120"/>
-              </a:rPr>
-              <a:t>Supplément PMR</a:t>
-            </a:r>
-            <a:endParaRPr lang="en-US" sz="1000" dirty="0"/>
-          </a:p>
-        </p:txBody>
-      </p:sp>
-      <p:sp>
-        <p:nvSpPr>
-          <p:cNvPr id="19" name="Text 17"/>
-          <p:cNvSpPr/>
-          <p:nvPr/>
-        </p:nvSpPr>
-        <p:spPr>
-          <a:xfrm>
-            <a:off x="6126480" y="2606040"/>
-            <a:ext cx="2468880" cy="365760"/>
-          </a:xfrm>
-          <a:prstGeom prst="rect">
-            <a:avLst/>
-          </a:prstGeom>
-          <a:noFill/>
-          <a:ln/>
-        </p:spPr>
-        <p:txBody>
-          <a:bodyPr wrap="square" rtlCol="0" anchor="ctr"/>
-          <a:lstStyle/>
-          <a:p>
-            <a:pPr marL="0" indent="0" algn="ctr">
-              <a:buNone/>
-            </a:pPr>
-            <a:r>
-              <a:rPr lang="en-US" sz="800" dirty="0">
-                <a:solidFill>
-                  <a:srgbClr val="4A5568"/>
-                </a:solidFill>
-                <a:latin typeface="Calibri" pitchFamily="34" charset="0"/>
-                <a:ea typeface="Calibri" pitchFamily="34" charset="-122"/>
-                <a:cs typeface="Calibri" pitchFamily="34" charset="-120"/>
-              </a:rPr>
-              <a:t>Personne à</a:t>
-            </a:r>
-            <a:endParaRPr lang="en-US" sz="800" dirty="0"/>
-          </a:p>
-          <a:p>
-            <a:pPr marL="0" indent="0" algn="ctr">
-              <a:buNone/>
-            </a:pPr>
-            <a:r>
-              <a:rPr lang="en-US" sz="800" dirty="0">
-                <a:solidFill>
-                  <a:srgbClr val="4A5568"/>
-                </a:solidFill>
-                <a:latin typeface="Calibri" pitchFamily="34" charset="0"/>
-                <a:ea typeface="Calibri" pitchFamily="34" charset="-122"/>
-                <a:cs typeface="Calibri" pitchFamily="34" charset="-120"/>
-              </a:rPr>
-              <a:t>mobilité réduite</a:t>
-            </a:r>
-            <a:endParaRPr lang="en-US" sz="800" dirty="0"/>
-          </a:p>
-        </p:txBody>
-      </p:sp>
-      <p:sp>
-        <p:nvSpPr>
-          <p:cNvPr id="20" name="Shape 18"/>
-          <p:cNvSpPr/>
-          <p:nvPr/>
-        </p:nvSpPr>
-        <p:spPr>
-          <a:xfrm>
-            <a:off x="457200" y="3429000"/>
-            <a:ext cx="3931920" cy="1005840"/>
-          </a:xfrm>
-          <a:prstGeom prst="rect">
-            <a:avLst/>
-          </a:prstGeom>
-          <a:solidFill>
-            <a:srgbClr val="EBF4FF"/>
-          </a:solidFill>
-          <a:ln/>
-        </p:spPr>
-        <p:txBody>
-          <a:bodyPr/>
-          <a:lstStyle/>
-          <a:p>
-            <a:endParaRPr lang="fr-FR"/>
-          </a:p>
-        </p:txBody>
-      </p:sp>
-      <p:sp>
-        <p:nvSpPr>
-          <p:cNvPr id="21" name="Text 19"/>
-          <p:cNvSpPr/>
-          <p:nvPr/>
-        </p:nvSpPr>
-        <p:spPr>
-          <a:xfrm>
-            <a:off x="548640" y="3474720"/>
-            <a:ext cx="3749040" cy="228600"/>
-          </a:xfrm>
-          <a:prstGeom prst="rect">
-            <a:avLst/>
-          </a:prstGeom>
-          <a:noFill/>
-          <a:ln/>
-        </p:spPr>
-        <p:txBody>
-          <a:bodyPr wrap="square" rtlCol="0" anchor="ctr"/>
-          <a:lstStyle/>
-          <a:p>
-            <a:pPr marL="0" indent="0">
-              <a:buNone/>
-            </a:pPr>
-            <a:r>
-              <a:rPr lang="en-US" sz="1000" b="1" dirty="0">
-                <a:solidFill>
-                  <a:srgbClr val="283A5E"/>
-                </a:solidFill>
-                <a:latin typeface="Calibri" pitchFamily="34" charset="0"/>
-                <a:ea typeface="Calibri" pitchFamily="34" charset="-122"/>
-                <a:cs typeface="Calibri" pitchFamily="34" charset="-120"/>
-              </a:rPr>
-              <a:t>🛣️ Frais de péage</a:t>
-            </a:r>
-            <a:endParaRPr lang="en-US" sz="1000" dirty="0"/>
-          </a:p>
-        </p:txBody>
-      </p:sp>
-      <p:sp>
-        <p:nvSpPr>
-          <p:cNvPr id="22" name="Text 20"/>
-          <p:cNvSpPr/>
-          <p:nvPr/>
-        </p:nvSpPr>
-        <p:spPr>
-          <a:xfrm>
-            <a:off x="548640" y="3749040"/>
-            <a:ext cx="3749040" cy="548640"/>
-          </a:xfrm>
-          <a:prstGeom prst="rect">
-            <a:avLst/>
-          </a:prstGeom>
-          <a:noFill/>
-          <a:ln/>
-        </p:spPr>
-        <p:txBody>
-          <a:bodyPr wrap="square" rtlCol="0" anchor="ctr"/>
-          <a:lstStyle/>
-          <a:p>
-            <a:pPr marL="0" indent="0">
-              <a:buNone/>
-            </a:pPr>
-            <a:r>
-              <a:rPr lang="en-US" sz="800" dirty="0">
-                <a:solidFill>
-                  <a:srgbClr val="4A5568"/>
-                </a:solidFill>
-                <a:latin typeface="Calibri" pitchFamily="34" charset="0"/>
-                <a:ea typeface="Calibri" pitchFamily="34" charset="-122"/>
-                <a:cs typeface="Calibri" pitchFamily="34" charset="-120"/>
-              </a:rPr>
-              <a:t>Remboursement sur justificatifs de passage. Relevés conservés 33 mois par le transporteur (à disposition assurance maladie).</a:t>
-            </a:r>
-            <a:endParaRPr lang="en-US" sz="800" dirty="0"/>
-          </a:p>
-        </p:txBody>
-      </p:sp>
-      <p:sp>
-        <p:nvSpPr>
-          <p:cNvPr id="23" name="Shape 21"/>
-          <p:cNvSpPr/>
-          <p:nvPr/>
-        </p:nvSpPr>
-        <p:spPr>
-          <a:xfrm>
-            <a:off x="4663440" y="3429000"/>
-            <a:ext cx="4023360" cy="1005840"/>
-          </a:xfrm>
-          <a:prstGeom prst="rect">
-            <a:avLst/>
-          </a:prstGeom>
-          <a:solidFill>
-            <a:srgbClr val="FFF5EB"/>
-          </a:solidFill>
-          <a:ln/>
-        </p:spPr>
-        <p:txBody>
-          <a:bodyPr/>
-          <a:lstStyle/>
-          <a:p>
-            <a:endParaRPr lang="fr-FR"/>
-          </a:p>
-        </p:txBody>
-      </p:sp>
-      <p:sp>
-        <p:nvSpPr>
-          <p:cNvPr id="24" name="Text 22"/>
-          <p:cNvSpPr/>
-          <p:nvPr/>
-        </p:nvSpPr>
-        <p:spPr>
-          <a:xfrm>
-            <a:off x="4754880" y="3474720"/>
-            <a:ext cx="3840480" cy="228600"/>
-          </a:xfrm>
-          <a:prstGeom prst="rect">
-            <a:avLst/>
-          </a:prstGeom>
-          <a:noFill/>
-          <a:ln/>
-        </p:spPr>
-        <p:txBody>
-          <a:bodyPr wrap="square" rtlCol="0" anchor="ctr"/>
-          <a:lstStyle/>
-          <a:p>
-            <a:pPr marL="0" indent="0">
-              <a:buNone/>
-            </a:pPr>
-            <a:r>
-              <a:rPr lang="en-US" sz="1000" b="1" dirty="0">
-                <a:solidFill>
-                  <a:srgbClr val="C05621"/>
-                </a:solidFill>
-                <a:latin typeface="Calibri" pitchFamily="34" charset="0"/>
-                <a:ea typeface="Calibri" pitchFamily="34" charset="-122"/>
-                <a:cs typeface="Calibri" pitchFamily="34" charset="-120"/>
-              </a:rPr>
-              <a:t>📌 Cas d'application</a:t>
-            </a:r>
-            <a:endParaRPr lang="en-US" sz="1000" dirty="0"/>
-          </a:p>
-        </p:txBody>
-      </p:sp>
-      <p:sp>
-        <p:nvSpPr>
-          <p:cNvPr id="25" name="Text 23"/>
-          <p:cNvSpPr/>
-          <p:nvPr/>
-        </p:nvSpPr>
-        <p:spPr>
-          <a:xfrm>
-            <a:off x="4754880" y="3749040"/>
-            <a:ext cx="3840480" cy="548640"/>
-          </a:xfrm>
-          <a:prstGeom prst="rect">
-            <a:avLst/>
-          </a:prstGeom>
-          <a:noFill/>
-          <a:ln/>
-        </p:spPr>
-        <p:txBody>
-          <a:bodyPr wrap="square" rtlCol="0" anchor="ctr"/>
-          <a:lstStyle/>
-          <a:p>
-            <a:pPr marL="0" indent="0">
-              <a:buNone/>
-            </a:pPr>
-            <a:r>
-              <a:rPr lang="en-US" sz="800" dirty="0">
-                <a:solidFill>
-                  <a:srgbClr val="4A5568"/>
-                </a:solidFill>
-                <a:latin typeface="Calibri" pitchFamily="34" charset="0"/>
-                <a:ea typeface="Calibri" pitchFamily="34" charset="-122"/>
-                <a:cs typeface="Calibri" pitchFamily="34" charset="-120"/>
-              </a:rPr>
-              <a:t>Hospitalisations complètes, partielles ou ambulatoires. Séances de chimiothérapie, radiothérapie et hémodialyse. La distance retenue = distance en charge (pas le retour à vide).</a:t>
-            </a:r>
-            <a:endParaRPr lang="en-US" sz="800" dirty="0"/>
-          </a:p>
-        </p:txBody>
-      </p:sp>
-      <p:sp>
-        <p:nvSpPr>
-          <p:cNvPr id="26" name="Shape 24"/>
-          <p:cNvSpPr/>
-          <p:nvPr/>
-        </p:nvSpPr>
-        <p:spPr>
-          <a:xfrm>
-            <a:off x="0" y="4823460"/>
-            <a:ext cx="9144000" cy="320040"/>
-          </a:xfrm>
-          <a:prstGeom prst="rect">
-            <a:avLst/>
-          </a:prstGeom>
-          <a:solidFill>
-            <a:srgbClr val="1E2A3A"/>
-          </a:solidFill>
-          <a:ln/>
-        </p:spPr>
-        <p:txBody>
-          <a:bodyPr/>
-          <a:lstStyle/>
-          <a:p>
-            <a:endParaRPr lang="fr-FR"/>
-          </a:p>
-        </p:txBody>
-      </p:sp>
-      <p:sp>
-        <p:nvSpPr>
-          <p:cNvPr id="27" name="Text 25"/>
-          <p:cNvSpPr/>
-          <p:nvPr/>
-        </p:nvSpPr>
-        <p:spPr>
-          <a:xfrm>
-            <a:off x="457200" y="4823460"/>
-            <a:ext cx="7315200" cy="320040"/>
-          </a:xfrm>
-          <a:prstGeom prst="rect">
-            <a:avLst/>
-          </a:prstGeom>
-          <a:noFill/>
-          <a:ln/>
-        </p:spPr>
-        <p:txBody>
-          <a:bodyPr wrap="square" rtlCol="0" anchor="ctr"/>
-          <a:lstStyle/>
-          <a:p>
-            <a:pPr marL="0" indent="0">
-              <a:buNone/>
-            </a:pPr>
-            <a:r>
-              <a:rPr lang="en-US" sz="700" dirty="0">
-                <a:solidFill>
-                  <a:srgbClr val="718096"/>
-                </a:solidFill>
-                <a:latin typeface="Calibri" pitchFamily="34" charset="0"/>
-                <a:ea typeface="Calibri" pitchFamily="34" charset="-122"/>
-                <a:cs typeface="Calibri" pitchFamily="34" charset="-120"/>
-              </a:rPr>
-              <a:t>FTRANSPORT - SERVICES PRO  •  Formation certifiée Qualiopi  •  Éligible CPF  •  Lyon</a:t>
-            </a:r>
-            <a:endParaRPr lang="en-US" sz="700" dirty="0"/>
-          </a:p>
-        </p:txBody>
-      </p:sp>
-      <p:sp>
-        <p:nvSpPr>
-          <p:cNvPr id="28" name="Text 26"/>
-          <p:cNvSpPr/>
-          <p:nvPr/>
-        </p:nvSpPr>
-        <p:spPr>
-          <a:xfrm>
-            <a:off x="8229600" y="4823460"/>
-            <a:ext cx="640080" cy="320040"/>
-          </a:xfrm>
-          <a:prstGeom prst="rect">
-            <a:avLst/>
-          </a:prstGeom>
-          <a:noFill/>
-          <a:ln/>
-        </p:spPr>
-        <p:txBody>
-          <a:bodyPr wrap="square" rtlCol="0" anchor="ctr"/>
-          <a:lstStyle/>
-          <a:p>
-            <a:pPr marL="0" indent="0" algn="r">
-              <a:buNone/>
-            </a:pPr>
-            <a:r>
-              <a:rPr lang="en-US" sz="800" b="1" dirty="0">
-                <a:solidFill>
-                  <a:srgbClr val="FFFFFF"/>
-                </a:solidFill>
-                <a:latin typeface="Calibri" pitchFamily="34" charset="0"/>
-                <a:ea typeface="Calibri" pitchFamily="34" charset="-122"/>
-                <a:cs typeface="Calibri" pitchFamily="34" charset="-120"/>
+          <a:ln>
+            <a:solidFill>
+              <a:srgbClr val="FDF2EA"/>
+            </a:solidFill>
+          </a:ln>
+        </p:spPr>
+        <p:style>
+          <a:lnRef idx="1">
+            <a:schemeClr val="accent1"/>
+          </a:lnRef>
+          <a:fillRef idx="3">
+            <a:schemeClr val="accent1"/>
+          </a:fillRef>
+          <a:effectRef idx="2">
+            <a:schemeClr val="accent1"/>
+          </a:effectRef>
+          <a:fontRef idx="minor">
+            <a:schemeClr val="lt1"/>
+          </a:fontRef>
+        </p:style>
+        <p:txBody>
+          <a:bodyPr rtlCol="0" anchor="ctr"/>
+          <a:lstStyle/>
+          <a:p>
+            <a:pPr algn="ctr"/>
+            <a:endParaRPr/>
+          </a:p>
+        </p:txBody>
+      </p:sp>
+      <p:sp>
+        <p:nvSpPr>
+          <p:cNvPr id="13" name="TextBox 12"/>
+          <p:cNvSpPr txBox="1"/>
+          <p:nvPr/>
+        </p:nvSpPr>
+        <p:spPr>
+          <a:xfrm>
+            <a:off x="594360" y="2697480"/>
+            <a:ext cx="3337560" cy="256032"/>
+          </a:xfrm>
+          <a:prstGeom prst="rect">
+            <a:avLst/>
+          </a:prstGeom>
+          <a:noFill/>
+        </p:spPr>
+        <p:txBody>
+          <a:bodyPr wrap="square" anchor="ctr">
+            <a:spAutoFit/>
+          </a:bodyPr>
+          <a:lstStyle/>
+          <a:p>
+            <a:pPr algn="l"/>
+            <a:r>
+              <a:rPr sz="1300" b="1">
+                <a:solidFill>
+                  <a:srgbClr val="CA521E"/>
+                </a:solidFill>
+                <a:latin typeface="Calibri"/>
+              </a:rPr>
+              <a:t>EXEMPLE 1 — 40 km</a:t>
+            </a:r>
+          </a:p>
+        </p:txBody>
+      </p:sp>
+      <p:sp>
+        <p:nvSpPr>
+          <p:cNvPr id="14" name="TextBox 13"/>
+          <p:cNvSpPr txBox="1"/>
+          <p:nvPr/>
+        </p:nvSpPr>
+        <p:spPr>
+          <a:xfrm>
+            <a:off x="594360" y="2971800"/>
+            <a:ext cx="3337560" cy="786384"/>
+          </a:xfrm>
+          <a:prstGeom prst="rect">
+            <a:avLst/>
+          </a:prstGeom>
+          <a:noFill/>
+        </p:spPr>
+        <p:txBody>
+          <a:bodyPr wrap="square" anchor="ctr">
+            <a:spAutoFit/>
+          </a:bodyPr>
+          <a:lstStyle/>
+          <a:p>
+            <a:pPr algn="l"/>
+            <a:r>
+              <a:rPr sz="1100" b="0">
+                <a:solidFill>
+                  <a:srgbClr val="1C202B"/>
+                </a:solidFill>
+                <a:latin typeface="Calibri"/>
+              </a:rPr>
+              <a:t>Tu vas à vide à l’hôpital, prends le patient puis fais 40 km avec lui.
+→ Hospitalisation + trajet à vide + 40 km en charge = +25 % sur le tarif kilométrique.</a:t>
+            </a:r>
+          </a:p>
+        </p:txBody>
+      </p:sp>
+      <p:sp>
+        <p:nvSpPr>
+          <p:cNvPr id="15" name="TextBox 14"/>
+          <p:cNvSpPr txBox="1"/>
+          <p:nvPr/>
+        </p:nvSpPr>
+        <p:spPr>
+          <a:xfrm>
+            <a:off x="4160520" y="2697480"/>
+            <a:ext cx="3337560" cy="256032"/>
+          </a:xfrm>
+          <a:prstGeom prst="rect">
+            <a:avLst/>
+          </a:prstGeom>
+          <a:noFill/>
+        </p:spPr>
+        <p:txBody>
+          <a:bodyPr wrap="square" anchor="ctr">
+            <a:spAutoFit/>
+          </a:bodyPr>
+          <a:lstStyle/>
+          <a:p>
+            <a:pPr algn="l"/>
+            <a:r>
+              <a:rPr sz="1300" b="1">
+                <a:solidFill>
+                  <a:srgbClr val="C92B30"/>
+                </a:solidFill>
+                <a:latin typeface="Calibri"/>
+              </a:rPr>
+              <a:t>EXEMPLE 2 — 65 km</a:t>
+            </a:r>
+          </a:p>
+        </p:txBody>
+      </p:sp>
+      <p:sp>
+        <p:nvSpPr>
+          <p:cNvPr id="16" name="TextBox 15"/>
+          <p:cNvSpPr txBox="1"/>
+          <p:nvPr/>
+        </p:nvSpPr>
+        <p:spPr>
+          <a:xfrm>
+            <a:off x="4160520" y="2971800"/>
+            <a:ext cx="3337560" cy="786384"/>
+          </a:xfrm>
+          <a:prstGeom prst="rect">
+            <a:avLst/>
+          </a:prstGeom>
+          <a:noFill/>
+        </p:spPr>
+        <p:txBody>
+          <a:bodyPr wrap="square" anchor="ctr">
+            <a:spAutoFit/>
+          </a:bodyPr>
+          <a:lstStyle/>
+          <a:p>
+            <a:pPr algn="l"/>
+            <a:r>
+              <a:rPr sz="1100" b="0">
+                <a:solidFill>
+                  <a:srgbClr val="1C202B"/>
+                </a:solidFill>
+                <a:latin typeface="Calibri"/>
+              </a:rPr>
+              <a:t>Même situation, mais 65 km avec le patient.
+→ Hospitalisation + trajet à vide + 65 km en charge = +50 % sur le tarif kilométrique.
+⚠ Ce n’est pas le −5 % du transport partagé.</a:t>
+            </a:r>
+          </a:p>
+        </p:txBody>
+      </p:sp>
+      <p:sp>
+        <p:nvSpPr>
+          <p:cNvPr id="17" name="TextBox 16"/>
+          <p:cNvSpPr txBox="1"/>
+          <p:nvPr/>
+        </p:nvSpPr>
+        <p:spPr>
+          <a:xfrm>
+            <a:off x="411480" y="4407408"/>
+            <a:ext cx="7498079" cy="164592"/>
+          </a:xfrm>
+          <a:prstGeom prst="rect">
+            <a:avLst/>
+          </a:prstGeom>
+          <a:noFill/>
+        </p:spPr>
+        <p:txBody>
+          <a:bodyPr wrap="square" anchor="ctr">
+            <a:spAutoFit/>
+          </a:bodyPr>
+          <a:lstStyle/>
+          <a:p>
+            <a:pPr algn="l"/>
+            <a:r>
+              <a:rPr sz="800" b="0">
+                <a:solidFill>
+                  <a:srgbClr val="465269"/>
+                </a:solidFill>
+                <a:latin typeface="Calibri"/>
+              </a:rPr>
+              <a:t>FTRANSPORT - SERVICES PRO  •  Convention CPAM — exemples pédagogiques</a:t>
+            </a:r>
+          </a:p>
+        </p:txBody>
+      </p:sp>
+      <p:sp>
+        <p:nvSpPr>
+          <p:cNvPr id="18" name="TextBox 17"/>
+          <p:cNvSpPr txBox="1"/>
+          <p:nvPr/>
+        </p:nvSpPr>
+        <p:spPr>
+          <a:xfrm>
+            <a:off x="7882127" y="4389120"/>
+            <a:ext cx="228600" cy="182880"/>
+          </a:xfrm>
+          <a:prstGeom prst="rect">
+            <a:avLst/>
+          </a:prstGeom>
+          <a:noFill/>
+        </p:spPr>
+        <p:txBody>
+          <a:bodyPr wrap="square" anchor="ctr">
+            <a:spAutoFit/>
+          </a:bodyPr>
+          <a:lstStyle/>
+          <a:p>
+            <a:pPr algn="r"/>
+            <a:r>
+              <a:rPr sz="800" b="0">
+                <a:solidFill>
+                  <a:srgbClr val="465269"/>
+                </a:solidFill>
+                <a:latin typeface="Calibri"/>
               </a:rPr>
               <a:t>6</a:t>
             </a:r>
-            <a:endParaRPr lang="en-US" sz="800" dirty="0"/>
           </a:p>
         </p:txBody>
       </p:sp>
@@ -8277,119 +8860,84 @@
       </p:grpSpPr>
       <p:sp>
         <p:nvSpPr>
-          <p:cNvPr id="2" name="Shape 0"/>
-          <p:cNvSpPr/>
-          <p:nvPr/>
-        </p:nvSpPr>
-        <p:spPr>
-          <a:xfrm>
-            <a:off x="0" y="0"/>
-            <a:ext cx="9144000" cy="502920"/>
-          </a:xfrm>
-          <a:prstGeom prst="rect">
-            <a:avLst/>
-          </a:prstGeom>
-          <a:solidFill>
-            <a:srgbClr val="283A5E"/>
-          </a:solidFill>
-          <a:ln/>
-        </p:spPr>
-        <p:txBody>
-          <a:bodyPr/>
-          <a:lstStyle/>
-          <a:p>
-            <a:endParaRPr lang="fr-FR"/>
-          </a:p>
-        </p:txBody>
-      </p:sp>
-      <p:sp>
-        <p:nvSpPr>
-          <p:cNvPr id="3" name="Text 1"/>
-          <p:cNvSpPr/>
-          <p:nvPr/>
-        </p:nvSpPr>
-        <p:spPr>
-          <a:xfrm>
-            <a:off x="457200" y="0"/>
-            <a:ext cx="8229600" cy="502920"/>
-          </a:xfrm>
-          <a:prstGeom prst="rect">
-            <a:avLst/>
-          </a:prstGeom>
-          <a:noFill/>
-          <a:ln/>
-        </p:spPr>
-        <p:txBody>
-          <a:bodyPr wrap="square" rtlCol="0" anchor="ctr"/>
-          <a:lstStyle/>
-          <a:p>
-            <a:pPr marL="0" indent="0">
-              <a:buNone/>
-            </a:pPr>
-            <a:r>
-              <a:rPr lang="en-US" sz="900" b="1" kern="0" spc="200" dirty="0">
-                <a:solidFill>
-                  <a:srgbClr val="D4A843"/>
-                </a:solidFill>
-                <a:latin typeface="Calibri" pitchFamily="34" charset="0"/>
-                <a:ea typeface="Calibri" pitchFamily="34" charset="-122"/>
-                <a:cs typeface="Calibri" pitchFamily="34" charset="-120"/>
+          <p:cNvPr id="2" name="TextBox 1"/>
+          <p:cNvSpPr txBox="1"/>
+          <p:nvPr/>
+        </p:nvSpPr>
+        <p:spPr>
+          <a:xfrm>
+            <a:off x="438912" y="164592"/>
+            <a:ext cx="2926080" cy="274320"/>
+          </a:xfrm>
+          <a:prstGeom prst="rect">
+            <a:avLst/>
+          </a:prstGeom>
+          <a:noFill/>
+        </p:spPr>
+        <p:txBody>
+          <a:bodyPr wrap="square" anchor="ctr">
+            <a:spAutoFit/>
+          </a:bodyPr>
+          <a:lstStyle/>
+          <a:p>
+            <a:pPr algn="l"/>
+            <a:r>
+              <a:rPr sz="1100" b="1">
+                <a:solidFill>
+                  <a:srgbClr val="E8B22D"/>
+                </a:solidFill>
+                <a:latin typeface="Calibri"/>
               </a:rPr>
               <a:t>PARTIE 3 — COURS</a:t>
             </a:r>
-            <a:endParaRPr lang="en-US" sz="900" dirty="0"/>
-          </a:p>
-        </p:txBody>
-      </p:sp>
-      <p:sp>
-        <p:nvSpPr>
-          <p:cNvPr id="4" name="Text 2"/>
-          <p:cNvSpPr/>
-          <p:nvPr/>
-        </p:nvSpPr>
-        <p:spPr>
-          <a:xfrm>
-            <a:off x="457200" y="640080"/>
-            <a:ext cx="8229600" cy="411480"/>
-          </a:xfrm>
-          <a:prstGeom prst="rect">
-            <a:avLst/>
-          </a:prstGeom>
-          <a:noFill/>
-          <a:ln/>
-        </p:spPr>
-        <p:txBody>
-          <a:bodyPr wrap="square" rtlCol="0" anchor="ctr"/>
-          <a:lstStyle/>
-          <a:p>
-            <a:pPr marL="0" indent="0">
-              <a:buNone/>
-            </a:pPr>
-            <a:r>
-              <a:rPr lang="en-US" sz="1800" b="1" dirty="0">
-                <a:solidFill>
-                  <a:srgbClr val="1A202C"/>
-                </a:solidFill>
-                <a:latin typeface="Georgia" pitchFamily="34" charset="0"/>
-                <a:ea typeface="Georgia" pitchFamily="34" charset="-122"/>
-                <a:cs typeface="Georgia" pitchFamily="34" charset="-120"/>
-              </a:rPr>
-              <a:t>Accord préalable CPAM &amp; signature facture</a:t>
-            </a:r>
-            <a:endParaRPr lang="en-US" sz="1800" dirty="0"/>
-          </a:p>
-        </p:txBody>
-      </p:sp>
-      <p:sp>
-        <p:nvSpPr>
-          <p:cNvPr id="5" name="Shape 3"/>
-          <p:cNvSpPr/>
-          <p:nvPr/>
-        </p:nvSpPr>
-        <p:spPr>
-          <a:xfrm>
-            <a:off x="457200" y="1188720"/>
-            <a:ext cx="3931920" cy="2286000"/>
+          </a:p>
+        </p:txBody>
+      </p:sp>
+      <p:sp>
+        <p:nvSpPr>
+          <p:cNvPr id="3" name="TextBox 2"/>
+          <p:cNvSpPr txBox="1"/>
+          <p:nvPr/>
+        </p:nvSpPr>
+        <p:spPr>
+          <a:xfrm>
+            <a:off x="438912" y="530352"/>
+            <a:ext cx="7498079" cy="502920"/>
+          </a:xfrm>
+          <a:prstGeom prst="rect">
+            <a:avLst/>
+          </a:prstGeom>
+          <a:noFill/>
+        </p:spPr>
+        <p:txBody>
+          <a:bodyPr wrap="square" anchor="ctr">
+            <a:spAutoFit/>
+          </a:bodyPr>
+          <a:lstStyle/>
+          <a:p>
+            <a:pPr algn="l"/>
+            <a:r>
+              <a:rPr sz="2500" b="1">
+                <a:solidFill>
+                  <a:srgbClr val="1C202B"/>
+                </a:solidFill>
+                <a:latin typeface="Georgia"/>
+              </a:rPr>
+              <a:t>Quand l’Assurance Maladie peut prendre en charge le transport ?</a:t>
+            </a:r>
+          </a:p>
+        </p:txBody>
+      </p:sp>
+      <p:sp>
+        <p:nvSpPr>
+          <p:cNvPr id="4" name="Rectangle 3"/>
+          <p:cNvSpPr/>
+          <p:nvPr/>
+        </p:nvSpPr>
+        <p:spPr>
+          <a:xfrm>
+            <a:off x="411480" y="1170432"/>
+            <a:ext cx="3566160" cy="594360"/>
           </a:xfrm>
           <a:prstGeom prst="rect">
             <a:avLst/>
@@ -8397,189 +8945,115 @@
           <a:solidFill>
             <a:srgbClr val="FFFFFF"/>
           </a:solidFill>
-          <a:ln/>
-          <a:effectLst>
-            <a:outerShdw blurRad="50800" dist="25400" dir="8100000" algn="bl" rotWithShape="0">
-              <a:srgbClr val="000000">
-                <a:alpha val="8000"/>
-              </a:srgbClr>
-            </a:outerShdw>
-          </a:effectLst>
-        </p:spPr>
-        <p:txBody>
-          <a:bodyPr/>
-          <a:lstStyle/>
-          <a:p>
-            <a:endParaRPr lang="fr-FR"/>
-          </a:p>
-        </p:txBody>
-      </p:sp>
-      <p:pic>
-        <p:nvPicPr>
-          <p:cNvPr id="6" name="Image 0" descr="preencoded.png"/>
-          <p:cNvPicPr>
-            <a:picLocks noChangeAspect="1"/>
-          </p:cNvPicPr>
-          <p:nvPr/>
-        </p:nvPicPr>
-        <p:blipFill>
-          <a:blip r:embed="rId3"/>
-          <a:stretch>
-            <a:fillRect/>
-          </a:stretch>
-        </p:blipFill>
-        <p:spPr>
-          <a:xfrm>
-            <a:off x="640080" y="1325880"/>
-            <a:ext cx="274320" cy="274320"/>
-          </a:xfrm>
-          <a:prstGeom prst="rect">
-            <a:avLst/>
-          </a:prstGeom>
-        </p:spPr>
-      </p:pic>
-      <p:sp>
-        <p:nvSpPr>
-          <p:cNvPr id="7" name="Text 4"/>
-          <p:cNvSpPr/>
-          <p:nvPr/>
-        </p:nvSpPr>
-        <p:spPr>
-          <a:xfrm>
-            <a:off x="1005840" y="1280160"/>
-            <a:ext cx="3200400" cy="320040"/>
-          </a:xfrm>
-          <a:prstGeom prst="rect">
-            <a:avLst/>
-          </a:prstGeom>
-          <a:noFill/>
-          <a:ln/>
-        </p:spPr>
-        <p:txBody>
-          <a:bodyPr wrap="square" lIns="0" tIns="0" rIns="0" bIns="0" rtlCol="0" anchor="ctr"/>
-          <a:lstStyle/>
-          <a:p>
-            <a:pPr marL="0" indent="0">
-              <a:buNone/>
-            </a:pPr>
-            <a:r>
-              <a:rPr lang="en-US" sz="1100" b="1" dirty="0">
-                <a:solidFill>
-                  <a:srgbClr val="2B6CB0"/>
-                </a:solidFill>
-                <a:latin typeface="Calibri" pitchFamily="34" charset="0"/>
-                <a:ea typeface="Calibri" pitchFamily="34" charset="-122"/>
-                <a:cs typeface="Calibri" pitchFamily="34" charset="-120"/>
-              </a:rPr>
-              <a:t>Transports soumis à accord préalable</a:t>
-            </a:r>
-            <a:endParaRPr lang="en-US" sz="1100" dirty="0"/>
-          </a:p>
-        </p:txBody>
-      </p:sp>
-      <p:sp>
-        <p:nvSpPr>
-          <p:cNvPr id="8" name="Text 5"/>
-          <p:cNvSpPr/>
-          <p:nvPr/>
-        </p:nvSpPr>
-        <p:spPr>
-          <a:xfrm>
-            <a:off x="640080" y="1691640"/>
-            <a:ext cx="3566160" cy="1554480"/>
-          </a:xfrm>
-          <a:prstGeom prst="rect">
-            <a:avLst/>
-          </a:prstGeom>
-          <a:noFill/>
-          <a:ln/>
-        </p:spPr>
-        <p:txBody>
-          <a:bodyPr wrap="square" rtlCol="0" anchor="ctr"/>
-          <a:lstStyle/>
-          <a:p>
-            <a:pPr marL="0" indent="0">
-              <a:buNone/>
-            </a:pPr>
-            <a:r>
-              <a:rPr lang="en-US" sz="900" b="1" dirty="0">
-                <a:solidFill>
-                  <a:srgbClr val="1A202C"/>
-                </a:solidFill>
-                <a:latin typeface="Calibri" pitchFamily="34" charset="0"/>
-                <a:ea typeface="Calibri" pitchFamily="34" charset="-122"/>
-                <a:cs typeface="Calibri" pitchFamily="34" charset="-120"/>
-              </a:rPr>
-              <a:t>Transports en série :
-</a:t>
-            </a:r>
-            <a:endParaRPr lang="en-US" sz="900" dirty="0"/>
-          </a:p>
-          <a:p>
-            <a:pPr marL="0" indent="0">
-              <a:buNone/>
-            </a:pPr>
-            <a:r>
-              <a:rPr lang="en-US" sz="850" dirty="0">
-                <a:solidFill>
-                  <a:srgbClr val="4A5568"/>
-                </a:solidFill>
-                <a:latin typeface="Calibri" pitchFamily="34" charset="0"/>
-                <a:ea typeface="Calibri" pitchFamily="34" charset="-122"/>
-                <a:cs typeface="Calibri" pitchFamily="34" charset="-120"/>
-              </a:rPr>
-              <a:t>Minimum 4 transports d'une distance &gt; 50 km aller, au cours d'une période de 2 mois, pour le même traitement
-</a:t>
-            </a:r>
-            <a:endParaRPr lang="en-US" sz="900" dirty="0"/>
-          </a:p>
-          <a:p>
-            <a:pPr marL="0" indent="0">
-              <a:buNone/>
-            </a:pPr>
-            <a:r>
-              <a:rPr lang="en-US" sz="900" b="1" dirty="0">
-                <a:solidFill>
-                  <a:srgbClr val="1A202C"/>
-                </a:solidFill>
-                <a:latin typeface="Calibri" pitchFamily="34" charset="0"/>
-                <a:ea typeface="Calibri" pitchFamily="34" charset="-122"/>
-                <a:cs typeface="Calibri" pitchFamily="34" charset="-120"/>
-              </a:rPr>
-              <a:t>Transports longue distance :
-</a:t>
-            </a:r>
-            <a:endParaRPr lang="en-US" sz="900" dirty="0"/>
-          </a:p>
-          <a:p>
-            <a:pPr marL="0" indent="0">
-              <a:buNone/>
-            </a:pPr>
-            <a:r>
-              <a:rPr lang="en-US" sz="850" dirty="0">
-                <a:solidFill>
-                  <a:srgbClr val="4A5568"/>
-                </a:solidFill>
-                <a:latin typeface="Calibri" pitchFamily="34" charset="0"/>
-                <a:ea typeface="Calibri" pitchFamily="34" charset="-122"/>
-                <a:cs typeface="Calibri" pitchFamily="34" charset="-120"/>
-              </a:rPr>
-              <a:t>En un lieu distant de plus de 150 km aller</a:t>
-            </a:r>
-            <a:endParaRPr lang="en-US" sz="900" dirty="0"/>
-          </a:p>
-        </p:txBody>
-      </p:sp>
-      <p:sp>
-        <p:nvSpPr>
-          <p:cNvPr id="9" name="Shape 6"/>
-          <p:cNvSpPr/>
-          <p:nvPr/>
-        </p:nvSpPr>
-        <p:spPr>
-          <a:xfrm>
-            <a:off x="4663440" y="1188720"/>
-            <a:ext cx="4023360" cy="2286000"/>
+          <a:ln>
+            <a:solidFill>
+              <a:srgbClr val="FFFFFF"/>
+            </a:solidFill>
+          </a:ln>
+        </p:spPr>
+        <p:style>
+          <a:lnRef idx="1">
+            <a:schemeClr val="accent1"/>
+          </a:lnRef>
+          <a:fillRef idx="3">
+            <a:schemeClr val="accent1"/>
+          </a:fillRef>
+          <a:effectRef idx="2">
+            <a:schemeClr val="accent1"/>
+          </a:effectRef>
+          <a:fontRef idx="minor">
+            <a:schemeClr val="lt1"/>
+          </a:fontRef>
+        </p:style>
+        <p:txBody>
+          <a:bodyPr rtlCol="0" anchor="ctr"/>
+          <a:lstStyle/>
+          <a:p>
+            <a:pPr algn="ctr"/>
+            <a:endParaRPr/>
+          </a:p>
+        </p:txBody>
+      </p:sp>
+      <p:sp>
+        <p:nvSpPr>
+          <p:cNvPr id="5" name="TextBox 4"/>
+          <p:cNvSpPr txBox="1"/>
+          <p:nvPr/>
+        </p:nvSpPr>
+        <p:spPr>
+          <a:xfrm>
+            <a:off x="539496" y="1243584"/>
+            <a:ext cx="1325880" cy="201168"/>
+          </a:xfrm>
+          <a:prstGeom prst="rect">
+            <a:avLst/>
+          </a:prstGeom>
+          <a:noFill/>
+        </p:spPr>
+        <p:txBody>
+          <a:bodyPr wrap="square" anchor="ctr">
+            <a:spAutoFit/>
+          </a:bodyPr>
+          <a:lstStyle/>
+          <a:p>
+            <a:pPr algn="l"/>
+            <a:r>
+              <a:rPr sz="1050" b="1">
+                <a:solidFill>
+                  <a:srgbClr val="2B6FB8"/>
+                </a:solidFill>
+                <a:latin typeface="Calibri"/>
+              </a:rPr>
+              <a:t>Hospitalisation</a:t>
+            </a:r>
+          </a:p>
+        </p:txBody>
+      </p:sp>
+      <p:sp>
+        <p:nvSpPr>
+          <p:cNvPr id="6" name="TextBox 5"/>
+          <p:cNvSpPr txBox="1"/>
+          <p:nvPr/>
+        </p:nvSpPr>
+        <p:spPr>
+          <a:xfrm>
+            <a:off x="1856232" y="1225296"/>
+            <a:ext cx="1965960" cy="438912"/>
+          </a:xfrm>
+          <a:prstGeom prst="rect">
+            <a:avLst/>
+          </a:prstGeom>
+          <a:noFill/>
+        </p:spPr>
+        <p:txBody>
+          <a:bodyPr wrap="square" anchor="ctr">
+            <a:spAutoFit/>
+          </a:bodyPr>
+          <a:lstStyle/>
+          <a:p>
+            <a:pPr algn="l"/>
+            <a:r>
+              <a:rPr sz="900" b="0">
+                <a:solidFill>
+                  <a:srgbClr val="1C202B"/>
+                </a:solidFill>
+                <a:latin typeface="Calibri"/>
+              </a:rPr>
+              <a:t>Entrée/sortie : complète, partielle ou ambulatoire.</a:t>
+            </a:r>
+          </a:p>
+        </p:txBody>
+      </p:sp>
+      <p:sp>
+        <p:nvSpPr>
+          <p:cNvPr id="7" name="Rectangle 6"/>
+          <p:cNvSpPr/>
+          <p:nvPr/>
+        </p:nvSpPr>
+        <p:spPr>
+          <a:xfrm>
+            <a:off x="411480" y="1883664"/>
+            <a:ext cx="3566160" cy="594360"/>
           </a:xfrm>
           <a:prstGeom prst="rect">
             <a:avLst/>
@@ -8587,263 +9061,949 @@
           <a:solidFill>
             <a:srgbClr val="FFFFFF"/>
           </a:solidFill>
-          <a:ln/>
-          <a:effectLst>
-            <a:outerShdw blurRad="50800" dist="25400" dir="8100000" algn="bl" rotWithShape="0">
-              <a:srgbClr val="000000">
-                <a:alpha val="8000"/>
-              </a:srgbClr>
-            </a:outerShdw>
-          </a:effectLst>
-        </p:spPr>
-        <p:txBody>
-          <a:bodyPr/>
-          <a:lstStyle/>
-          <a:p>
-            <a:endParaRPr lang="fr-FR"/>
-          </a:p>
-        </p:txBody>
-      </p:sp>
-      <p:pic>
-        <p:nvPicPr>
-          <p:cNvPr id="10" name="Image 1" descr="preencoded.png"/>
-          <p:cNvPicPr>
-            <a:picLocks noChangeAspect="1"/>
-          </p:cNvPicPr>
-          <p:nvPr/>
-        </p:nvPicPr>
-        <p:blipFill>
-          <a:blip r:embed="rId4"/>
-          <a:stretch>
-            <a:fillRect/>
-          </a:stretch>
-        </p:blipFill>
-        <p:spPr>
-          <a:xfrm>
-            <a:off x="4846320" y="1325880"/>
-            <a:ext cx="274320" cy="274320"/>
-          </a:xfrm>
-          <a:prstGeom prst="rect">
-            <a:avLst/>
-          </a:prstGeom>
-        </p:spPr>
-      </p:pic>
-      <p:sp>
-        <p:nvSpPr>
-          <p:cNvPr id="11" name="Text 7"/>
-          <p:cNvSpPr/>
-          <p:nvPr/>
-        </p:nvSpPr>
-        <p:spPr>
-          <a:xfrm>
-            <a:off x="5212080" y="1280160"/>
-            <a:ext cx="3200400" cy="320040"/>
-          </a:xfrm>
-          <a:prstGeom prst="rect">
-            <a:avLst/>
-          </a:prstGeom>
-          <a:noFill/>
-          <a:ln/>
-        </p:spPr>
-        <p:txBody>
-          <a:bodyPr wrap="square" lIns="0" tIns="0" rIns="0" bIns="0" rtlCol="0" anchor="ctr"/>
-          <a:lstStyle/>
-          <a:p>
-            <a:pPr marL="0" indent="0">
-              <a:buNone/>
-            </a:pPr>
-            <a:r>
-              <a:rPr lang="en-US" sz="1100" b="1" dirty="0">
-                <a:solidFill>
-                  <a:srgbClr val="C05621"/>
-                </a:solidFill>
-                <a:latin typeface="Calibri" pitchFamily="34" charset="0"/>
-                <a:ea typeface="Calibri" pitchFamily="34" charset="-122"/>
-                <a:cs typeface="Calibri" pitchFamily="34" charset="-120"/>
-              </a:rPr>
-              <a:t>Signature de la facture</a:t>
-            </a:r>
-            <a:endParaRPr lang="en-US" sz="1100" dirty="0"/>
-          </a:p>
-        </p:txBody>
-      </p:sp>
-      <p:sp>
-        <p:nvSpPr>
-          <p:cNvPr id="12" name="Text 8"/>
-          <p:cNvSpPr/>
-          <p:nvPr/>
-        </p:nvSpPr>
-        <p:spPr>
-          <a:xfrm>
-            <a:off x="4846320" y="1691640"/>
-            <a:ext cx="3657600" cy="1554480"/>
-          </a:xfrm>
-          <a:prstGeom prst="rect">
-            <a:avLst/>
-          </a:prstGeom>
-          <a:noFill/>
-          <a:ln/>
-        </p:spPr>
-        <p:txBody>
-          <a:bodyPr wrap="square" rtlCol="0" anchor="ctr"/>
-          <a:lstStyle/>
-          <a:p>
-            <a:pPr marL="0" indent="0">
-              <a:buNone/>
-            </a:pPr>
-            <a:r>
-              <a:rPr lang="en-US" sz="850" dirty="0">
-                <a:solidFill>
-                  <a:srgbClr val="1A202C"/>
-                </a:solidFill>
-                <a:latin typeface="Calibri" pitchFamily="34" charset="0"/>
-                <a:ea typeface="Calibri" pitchFamily="34" charset="-122"/>
-                <a:cs typeface="Calibri" pitchFamily="34" charset="-120"/>
-              </a:rPr>
-              <a:t>Facture signée par le patient (ou représentant légal) : atteste l'exactitude des renseignements.
-</a:t>
-            </a:r>
-            <a:endParaRPr lang="en-US" sz="850" dirty="0"/>
-          </a:p>
-          <a:p>
-            <a:pPr marL="0" indent="0">
-              <a:buNone/>
-            </a:pPr>
-            <a:r>
-              <a:rPr lang="en-US" sz="850" b="1" dirty="0">
-                <a:solidFill>
-                  <a:srgbClr val="1A202C"/>
-                </a:solidFill>
-                <a:latin typeface="Calibri" pitchFamily="34" charset="0"/>
-                <a:ea typeface="Calibri" pitchFamily="34" charset="-122"/>
-                <a:cs typeface="Calibri" pitchFamily="34" charset="-120"/>
-              </a:rPr>
-              <a:t>Si la personne n'est pas en état de signer :
-</a:t>
-            </a:r>
-            <a:endParaRPr lang="en-US" sz="850" dirty="0"/>
-          </a:p>
-          <a:p>
-            <a:pPr marL="0" indent="0">
-              <a:buNone/>
-            </a:pPr>
-            <a:r>
-              <a:rPr lang="en-US" sz="850" b="1" dirty="0">
-                <a:solidFill>
-                  <a:srgbClr val="C53030"/>
-                </a:solidFill>
-                <a:latin typeface="Calibri" pitchFamily="34" charset="0"/>
-                <a:ea typeface="Calibri" pitchFamily="34" charset="-122"/>
-                <a:cs typeface="Calibri" pitchFamily="34" charset="-120"/>
-              </a:rPr>
-              <a:t>Le transporteur porte sur la facture : « impossibilité physique ou mentale de signer »</a:t>
-            </a:r>
-            <a:endParaRPr lang="en-US" sz="850" dirty="0"/>
-          </a:p>
-        </p:txBody>
-      </p:sp>
-      <p:sp>
-        <p:nvSpPr>
-          <p:cNvPr id="13" name="Shape 9"/>
-          <p:cNvSpPr/>
-          <p:nvPr/>
-        </p:nvSpPr>
-        <p:spPr>
-          <a:xfrm>
-            <a:off x="0" y="4823460"/>
-            <a:ext cx="9144000" cy="320040"/>
+          <a:ln>
+            <a:solidFill>
+              <a:srgbClr val="FFFFFF"/>
+            </a:solidFill>
+          </a:ln>
+        </p:spPr>
+        <p:style>
+          <a:lnRef idx="1">
+            <a:schemeClr val="accent1"/>
+          </a:lnRef>
+          <a:fillRef idx="3">
+            <a:schemeClr val="accent1"/>
+          </a:fillRef>
+          <a:effectRef idx="2">
+            <a:schemeClr val="accent1"/>
+          </a:effectRef>
+          <a:fontRef idx="minor">
+            <a:schemeClr val="lt1"/>
+          </a:fontRef>
+        </p:style>
+        <p:txBody>
+          <a:bodyPr rtlCol="0" anchor="ctr"/>
+          <a:lstStyle/>
+          <a:p>
+            <a:pPr algn="ctr"/>
+            <a:endParaRPr/>
+          </a:p>
+        </p:txBody>
+      </p:sp>
+      <p:sp>
+        <p:nvSpPr>
+          <p:cNvPr id="8" name="TextBox 7"/>
+          <p:cNvSpPr txBox="1"/>
+          <p:nvPr/>
+        </p:nvSpPr>
+        <p:spPr>
+          <a:xfrm>
+            <a:off x="539496" y="1956816"/>
+            <a:ext cx="1325880" cy="201168"/>
+          </a:xfrm>
+          <a:prstGeom prst="rect">
+            <a:avLst/>
+          </a:prstGeom>
+          <a:noFill/>
+        </p:spPr>
+        <p:txBody>
+          <a:bodyPr wrap="square" anchor="ctr">
+            <a:spAutoFit/>
+          </a:bodyPr>
+          <a:lstStyle/>
+          <a:p>
+            <a:pPr algn="l"/>
+            <a:r>
+              <a:rPr sz="1050" b="1">
+                <a:solidFill>
+                  <a:srgbClr val="2B6FB8"/>
+                </a:solidFill>
+                <a:latin typeface="Calibri"/>
+              </a:rPr>
+              <a:t>ALD</a:t>
+            </a:r>
+          </a:p>
+        </p:txBody>
+      </p:sp>
+      <p:sp>
+        <p:nvSpPr>
+          <p:cNvPr id="9" name="TextBox 8"/>
+          <p:cNvSpPr txBox="1"/>
+          <p:nvPr/>
+        </p:nvSpPr>
+        <p:spPr>
+          <a:xfrm>
+            <a:off x="1856232" y="1938528"/>
+            <a:ext cx="1965960" cy="438912"/>
+          </a:xfrm>
+          <a:prstGeom prst="rect">
+            <a:avLst/>
+          </a:prstGeom>
+          <a:noFill/>
+        </p:spPr>
+        <p:txBody>
+          <a:bodyPr wrap="square" anchor="ctr">
+            <a:spAutoFit/>
+          </a:bodyPr>
+          <a:lstStyle/>
+          <a:p>
+            <a:pPr algn="l"/>
+            <a:r>
+              <a:rPr sz="900" b="0">
+                <a:solidFill>
+                  <a:srgbClr val="1C202B"/>
+                </a:solidFill>
+                <a:latin typeface="Calibri"/>
+              </a:rPr>
+              <a:t>Lié à l’ALD + incapacité/déficience prévue au référentiel.</a:t>
+            </a:r>
+          </a:p>
+        </p:txBody>
+      </p:sp>
+      <p:sp>
+        <p:nvSpPr>
+          <p:cNvPr id="10" name="Rectangle 9"/>
+          <p:cNvSpPr/>
+          <p:nvPr/>
+        </p:nvSpPr>
+        <p:spPr>
+          <a:xfrm>
+            <a:off x="411480" y="2596896"/>
+            <a:ext cx="3566160" cy="594360"/>
           </a:xfrm>
           <a:prstGeom prst="rect">
             <a:avLst/>
           </a:prstGeom>
           <a:solidFill>
-            <a:srgbClr val="1E2A3A"/>
+            <a:srgbClr val="FFFFFF"/>
           </a:solidFill>
-          <a:ln/>
-        </p:spPr>
-        <p:txBody>
-          <a:bodyPr/>
-          <a:lstStyle/>
-          <a:p>
-            <a:endParaRPr lang="fr-FR"/>
-          </a:p>
-        </p:txBody>
-      </p:sp>
-      <p:sp>
-        <p:nvSpPr>
-          <p:cNvPr id="14" name="Text 10"/>
-          <p:cNvSpPr/>
-          <p:nvPr/>
-        </p:nvSpPr>
-        <p:spPr>
-          <a:xfrm>
-            <a:off x="457200" y="4823460"/>
-            <a:ext cx="7315200" cy="320040"/>
-          </a:xfrm>
-          <a:prstGeom prst="rect">
-            <a:avLst/>
-          </a:prstGeom>
-          <a:noFill/>
-          <a:ln/>
-        </p:spPr>
-        <p:txBody>
-          <a:bodyPr wrap="square" rtlCol="0" anchor="ctr"/>
-          <a:lstStyle/>
-          <a:p>
-            <a:pPr marL="0" indent="0">
-              <a:buNone/>
-            </a:pPr>
-            <a:r>
-              <a:rPr lang="en-US" sz="700" dirty="0">
-                <a:solidFill>
-                  <a:srgbClr val="718096"/>
-                </a:solidFill>
-                <a:latin typeface="Calibri" pitchFamily="34" charset="0"/>
-                <a:ea typeface="Calibri" pitchFamily="34" charset="-122"/>
-                <a:cs typeface="Calibri" pitchFamily="34" charset="-120"/>
-              </a:rPr>
-              <a:t>FTRANSPORT - SERVICES PRO  •  Formation certifiée Qualiopi  •  Éligible CPF  •  Lyon</a:t>
-            </a:r>
-            <a:endParaRPr lang="en-US" sz="700" dirty="0"/>
-          </a:p>
-        </p:txBody>
-      </p:sp>
-      <p:sp>
-        <p:nvSpPr>
-          <p:cNvPr id="15" name="Text 11"/>
-          <p:cNvSpPr/>
-          <p:nvPr/>
-        </p:nvSpPr>
-        <p:spPr>
-          <a:xfrm>
-            <a:off x="8229600" y="4823460"/>
-            <a:ext cx="640080" cy="320040"/>
-          </a:xfrm>
-          <a:prstGeom prst="rect">
-            <a:avLst/>
-          </a:prstGeom>
-          <a:noFill/>
-          <a:ln/>
-        </p:spPr>
-        <p:txBody>
-          <a:bodyPr wrap="square" rtlCol="0" anchor="ctr"/>
-          <a:lstStyle/>
-          <a:p>
-            <a:pPr marL="0" indent="0" algn="r">
-              <a:buNone/>
-            </a:pPr>
-            <a:r>
-              <a:rPr lang="en-US" sz="800" b="1" dirty="0">
-                <a:solidFill>
-                  <a:srgbClr val="FFFFFF"/>
-                </a:solidFill>
-                <a:latin typeface="Calibri" pitchFamily="34" charset="0"/>
-                <a:ea typeface="Calibri" pitchFamily="34" charset="-122"/>
-                <a:cs typeface="Calibri" pitchFamily="34" charset="-120"/>
+          <a:ln>
+            <a:solidFill>
+              <a:srgbClr val="FFFFFF"/>
+            </a:solidFill>
+          </a:ln>
+        </p:spPr>
+        <p:style>
+          <a:lnRef idx="1">
+            <a:schemeClr val="accent1"/>
+          </a:lnRef>
+          <a:fillRef idx="3">
+            <a:schemeClr val="accent1"/>
+          </a:fillRef>
+          <a:effectRef idx="2">
+            <a:schemeClr val="accent1"/>
+          </a:effectRef>
+          <a:fontRef idx="minor">
+            <a:schemeClr val="lt1"/>
+          </a:fontRef>
+        </p:style>
+        <p:txBody>
+          <a:bodyPr rtlCol="0" anchor="ctr"/>
+          <a:lstStyle/>
+          <a:p>
+            <a:pPr algn="ctr"/>
+            <a:endParaRPr/>
+          </a:p>
+        </p:txBody>
+      </p:sp>
+      <p:sp>
+        <p:nvSpPr>
+          <p:cNvPr id="11" name="TextBox 10"/>
+          <p:cNvSpPr txBox="1"/>
+          <p:nvPr/>
+        </p:nvSpPr>
+        <p:spPr>
+          <a:xfrm>
+            <a:off x="539496" y="2670048"/>
+            <a:ext cx="1325880" cy="201168"/>
+          </a:xfrm>
+          <a:prstGeom prst="rect">
+            <a:avLst/>
+          </a:prstGeom>
+          <a:noFill/>
+        </p:spPr>
+        <p:txBody>
+          <a:bodyPr wrap="square" anchor="ctr">
+            <a:spAutoFit/>
+          </a:bodyPr>
+          <a:lstStyle/>
+          <a:p>
+            <a:pPr algn="l"/>
+            <a:r>
+              <a:rPr sz="1050" b="1">
+                <a:solidFill>
+                  <a:srgbClr val="2B6FB8"/>
+                </a:solidFill>
+                <a:latin typeface="Calibri"/>
+              </a:rPr>
+              <a:t>AT / maladie pro.</a:t>
+            </a:r>
+          </a:p>
+        </p:txBody>
+      </p:sp>
+      <p:sp>
+        <p:nvSpPr>
+          <p:cNvPr id="12" name="TextBox 11"/>
+          <p:cNvSpPr txBox="1"/>
+          <p:nvPr/>
+        </p:nvSpPr>
+        <p:spPr>
+          <a:xfrm>
+            <a:off x="1856232" y="2651760"/>
+            <a:ext cx="1965960" cy="438912"/>
+          </a:xfrm>
+          <a:prstGeom prst="rect">
+            <a:avLst/>
+          </a:prstGeom>
+          <a:noFill/>
+        </p:spPr>
+        <p:txBody>
+          <a:bodyPr wrap="square" anchor="ctr">
+            <a:spAutoFit/>
+          </a:bodyPr>
+          <a:lstStyle/>
+          <a:p>
+            <a:pPr algn="l"/>
+            <a:r>
+              <a:rPr sz="900" b="0">
+                <a:solidFill>
+                  <a:srgbClr val="1C202B"/>
+                </a:solidFill>
+                <a:latin typeface="Calibri"/>
+              </a:rPr>
+              <a:t>Transport lié aux soins ou examens de l’AT/MP.</a:t>
+            </a:r>
+          </a:p>
+        </p:txBody>
+      </p:sp>
+      <p:sp>
+        <p:nvSpPr>
+          <p:cNvPr id="13" name="Rectangle 12"/>
+          <p:cNvSpPr/>
+          <p:nvPr/>
+        </p:nvSpPr>
+        <p:spPr>
+          <a:xfrm>
+            <a:off x="411480" y="3310128"/>
+            <a:ext cx="3566160" cy="594360"/>
+          </a:xfrm>
+          <a:prstGeom prst="rect">
+            <a:avLst/>
+          </a:prstGeom>
+          <a:solidFill>
+            <a:srgbClr val="FFFFFF"/>
+          </a:solidFill>
+          <a:ln>
+            <a:solidFill>
+              <a:srgbClr val="FFFFFF"/>
+            </a:solidFill>
+          </a:ln>
+        </p:spPr>
+        <p:style>
+          <a:lnRef idx="1">
+            <a:schemeClr val="accent1"/>
+          </a:lnRef>
+          <a:fillRef idx="3">
+            <a:schemeClr val="accent1"/>
+          </a:fillRef>
+          <a:effectRef idx="2">
+            <a:schemeClr val="accent1"/>
+          </a:effectRef>
+          <a:fontRef idx="minor">
+            <a:schemeClr val="lt1"/>
+          </a:fontRef>
+        </p:style>
+        <p:txBody>
+          <a:bodyPr rtlCol="0" anchor="ctr"/>
+          <a:lstStyle/>
+          <a:p>
+            <a:pPr algn="ctr"/>
+            <a:endParaRPr/>
+          </a:p>
+        </p:txBody>
+      </p:sp>
+      <p:sp>
+        <p:nvSpPr>
+          <p:cNvPr id="14" name="TextBox 13"/>
+          <p:cNvSpPr txBox="1"/>
+          <p:nvPr/>
+        </p:nvSpPr>
+        <p:spPr>
+          <a:xfrm>
+            <a:off x="539496" y="3383280"/>
+            <a:ext cx="1325880" cy="201168"/>
+          </a:xfrm>
+          <a:prstGeom prst="rect">
+            <a:avLst/>
+          </a:prstGeom>
+          <a:noFill/>
+        </p:spPr>
+        <p:txBody>
+          <a:bodyPr wrap="square" anchor="ctr">
+            <a:spAutoFit/>
+          </a:bodyPr>
+          <a:lstStyle/>
+          <a:p>
+            <a:pPr algn="l"/>
+            <a:r>
+              <a:rPr sz="1050" b="1">
+                <a:solidFill>
+                  <a:srgbClr val="2B6FB8"/>
+                </a:solidFill>
+                <a:latin typeface="Calibri"/>
+              </a:rPr>
+              <a:t>Ambulance nécessaire</a:t>
+            </a:r>
+          </a:p>
+        </p:txBody>
+      </p:sp>
+      <p:sp>
+        <p:nvSpPr>
+          <p:cNvPr id="15" name="TextBox 14"/>
+          <p:cNvSpPr txBox="1"/>
+          <p:nvPr/>
+        </p:nvSpPr>
+        <p:spPr>
+          <a:xfrm>
+            <a:off x="1856232" y="3364992"/>
+            <a:ext cx="1965960" cy="438912"/>
+          </a:xfrm>
+          <a:prstGeom prst="rect">
+            <a:avLst/>
+          </a:prstGeom>
+          <a:noFill/>
+        </p:spPr>
+        <p:txBody>
+          <a:bodyPr wrap="square" anchor="ctr">
+            <a:spAutoFit/>
+          </a:bodyPr>
+          <a:lstStyle/>
+          <a:p>
+            <a:pPr algn="l"/>
+            <a:r>
+              <a:rPr sz="900" b="0">
+                <a:solidFill>
+                  <a:srgbClr val="1C202B"/>
+                </a:solidFill>
+                <a:latin typeface="Calibri"/>
+              </a:rPr>
+              <a:t>État nécessitant notamment d’être allongé ou surveillé.</a:t>
+            </a:r>
+          </a:p>
+        </p:txBody>
+      </p:sp>
+      <p:sp>
+        <p:nvSpPr>
+          <p:cNvPr id="16" name="Rectangle 15"/>
+          <p:cNvSpPr/>
+          <p:nvPr/>
+        </p:nvSpPr>
+        <p:spPr>
+          <a:xfrm>
+            <a:off x="4187952" y="1170432"/>
+            <a:ext cx="3566160" cy="594360"/>
+          </a:xfrm>
+          <a:prstGeom prst="rect">
+            <a:avLst/>
+          </a:prstGeom>
+          <a:solidFill>
+            <a:srgbClr val="FFFFFF"/>
+          </a:solidFill>
+          <a:ln>
+            <a:solidFill>
+              <a:srgbClr val="FFFFFF"/>
+            </a:solidFill>
+          </a:ln>
+        </p:spPr>
+        <p:style>
+          <a:lnRef idx="1">
+            <a:schemeClr val="accent1"/>
+          </a:lnRef>
+          <a:fillRef idx="3">
+            <a:schemeClr val="accent1"/>
+          </a:fillRef>
+          <a:effectRef idx="2">
+            <a:schemeClr val="accent1"/>
+          </a:effectRef>
+          <a:fontRef idx="minor">
+            <a:schemeClr val="lt1"/>
+          </a:fontRef>
+        </p:style>
+        <p:txBody>
+          <a:bodyPr rtlCol="0" anchor="ctr"/>
+          <a:lstStyle/>
+          <a:p>
+            <a:pPr algn="ctr"/>
+            <a:endParaRPr/>
+          </a:p>
+        </p:txBody>
+      </p:sp>
+      <p:sp>
+        <p:nvSpPr>
+          <p:cNvPr id="17" name="TextBox 16"/>
+          <p:cNvSpPr txBox="1"/>
+          <p:nvPr/>
+        </p:nvSpPr>
+        <p:spPr>
+          <a:xfrm>
+            <a:off x="4315968" y="1243584"/>
+            <a:ext cx="1325880" cy="201168"/>
+          </a:xfrm>
+          <a:prstGeom prst="rect">
+            <a:avLst/>
+          </a:prstGeom>
+          <a:noFill/>
+        </p:spPr>
+        <p:txBody>
+          <a:bodyPr wrap="square" anchor="ctr">
+            <a:spAutoFit/>
+          </a:bodyPr>
+          <a:lstStyle/>
+          <a:p>
+            <a:pPr algn="l"/>
+            <a:r>
+              <a:rPr sz="1050" b="1">
+                <a:solidFill>
+                  <a:srgbClr val="266F4C"/>
+                </a:solidFill>
+                <a:latin typeface="Calibri"/>
+              </a:rPr>
+              <a:t>&gt; 150 km aller</a:t>
+            </a:r>
+          </a:p>
+        </p:txBody>
+      </p:sp>
+      <p:sp>
+        <p:nvSpPr>
+          <p:cNvPr id="18" name="TextBox 17"/>
+          <p:cNvSpPr txBox="1"/>
+          <p:nvPr/>
+        </p:nvSpPr>
+        <p:spPr>
+          <a:xfrm>
+            <a:off x="5632704" y="1225296"/>
+            <a:ext cx="1965960" cy="438912"/>
+          </a:xfrm>
+          <a:prstGeom prst="rect">
+            <a:avLst/>
+          </a:prstGeom>
+          <a:noFill/>
+        </p:spPr>
+        <p:txBody>
+          <a:bodyPr wrap="square" anchor="ctr">
+            <a:spAutoFit/>
+          </a:bodyPr>
+          <a:lstStyle/>
+          <a:p>
+            <a:pPr algn="l"/>
+            <a:r>
+              <a:rPr sz="900" b="0">
+                <a:solidFill>
+                  <a:srgbClr val="1C202B"/>
+                </a:solidFill>
+                <a:latin typeface="Calibri"/>
+              </a:rPr>
+              <a:t>Prise en charge possible + accord préalable.</a:t>
+            </a:r>
+          </a:p>
+        </p:txBody>
+      </p:sp>
+      <p:sp>
+        <p:nvSpPr>
+          <p:cNvPr id="19" name="Rectangle 18"/>
+          <p:cNvSpPr/>
+          <p:nvPr/>
+        </p:nvSpPr>
+        <p:spPr>
+          <a:xfrm>
+            <a:off x="4187952" y="1883664"/>
+            <a:ext cx="3566160" cy="594360"/>
+          </a:xfrm>
+          <a:prstGeom prst="rect">
+            <a:avLst/>
+          </a:prstGeom>
+          <a:solidFill>
+            <a:srgbClr val="FFFFFF"/>
+          </a:solidFill>
+          <a:ln>
+            <a:solidFill>
+              <a:srgbClr val="FFFFFF"/>
+            </a:solidFill>
+          </a:ln>
+        </p:spPr>
+        <p:style>
+          <a:lnRef idx="1">
+            <a:schemeClr val="accent1"/>
+          </a:lnRef>
+          <a:fillRef idx="3">
+            <a:schemeClr val="accent1"/>
+          </a:fillRef>
+          <a:effectRef idx="2">
+            <a:schemeClr val="accent1"/>
+          </a:effectRef>
+          <a:fontRef idx="minor">
+            <a:schemeClr val="lt1"/>
+          </a:fontRef>
+        </p:style>
+        <p:txBody>
+          <a:bodyPr rtlCol="0" anchor="ctr"/>
+          <a:lstStyle/>
+          <a:p>
+            <a:pPr algn="ctr"/>
+            <a:endParaRPr/>
+          </a:p>
+        </p:txBody>
+      </p:sp>
+      <p:sp>
+        <p:nvSpPr>
+          <p:cNvPr id="20" name="TextBox 19"/>
+          <p:cNvSpPr txBox="1"/>
+          <p:nvPr/>
+        </p:nvSpPr>
+        <p:spPr>
+          <a:xfrm>
+            <a:off x="4315968" y="1956816"/>
+            <a:ext cx="1325880" cy="201168"/>
+          </a:xfrm>
+          <a:prstGeom prst="rect">
+            <a:avLst/>
+          </a:prstGeom>
+          <a:noFill/>
+        </p:spPr>
+        <p:txBody>
+          <a:bodyPr wrap="square" anchor="ctr">
+            <a:spAutoFit/>
+          </a:bodyPr>
+          <a:lstStyle/>
+          <a:p>
+            <a:pPr algn="l"/>
+            <a:r>
+              <a:rPr sz="1050" b="1">
+                <a:solidFill>
+                  <a:srgbClr val="266F4C"/>
+                </a:solidFill>
+                <a:latin typeface="Calibri"/>
+              </a:rPr>
+              <a:t>Transports en série</a:t>
+            </a:r>
+          </a:p>
+        </p:txBody>
+      </p:sp>
+      <p:sp>
+        <p:nvSpPr>
+          <p:cNvPr id="21" name="TextBox 20"/>
+          <p:cNvSpPr txBox="1"/>
+          <p:nvPr/>
+        </p:nvSpPr>
+        <p:spPr>
+          <a:xfrm>
+            <a:off x="5632704" y="1938528"/>
+            <a:ext cx="1965960" cy="438912"/>
+          </a:xfrm>
+          <a:prstGeom prst="rect">
+            <a:avLst/>
+          </a:prstGeom>
+          <a:noFill/>
+        </p:spPr>
+        <p:txBody>
+          <a:bodyPr wrap="square" anchor="ctr">
+            <a:spAutoFit/>
+          </a:bodyPr>
+          <a:lstStyle/>
+          <a:p>
+            <a:pPr algn="l"/>
+            <a:r>
+              <a:rPr sz="900" b="0">
+                <a:solidFill>
+                  <a:srgbClr val="1C202B"/>
+                </a:solidFill>
+                <a:latin typeface="Calibri"/>
+              </a:rPr>
+              <a:t>≥4 transports de &gt;50 km aller / 2 mois / même traitement.</a:t>
+            </a:r>
+          </a:p>
+        </p:txBody>
+      </p:sp>
+      <p:sp>
+        <p:nvSpPr>
+          <p:cNvPr id="22" name="Rectangle 21"/>
+          <p:cNvSpPr/>
+          <p:nvPr/>
+        </p:nvSpPr>
+        <p:spPr>
+          <a:xfrm>
+            <a:off x="4187952" y="2596896"/>
+            <a:ext cx="3566160" cy="594360"/>
+          </a:xfrm>
+          <a:prstGeom prst="rect">
+            <a:avLst/>
+          </a:prstGeom>
+          <a:solidFill>
+            <a:srgbClr val="FFFFFF"/>
+          </a:solidFill>
+          <a:ln>
+            <a:solidFill>
+              <a:srgbClr val="FFFFFF"/>
+            </a:solidFill>
+          </a:ln>
+        </p:spPr>
+        <p:style>
+          <a:lnRef idx="1">
+            <a:schemeClr val="accent1"/>
+          </a:lnRef>
+          <a:fillRef idx="3">
+            <a:schemeClr val="accent1"/>
+          </a:fillRef>
+          <a:effectRef idx="2">
+            <a:schemeClr val="accent1"/>
+          </a:effectRef>
+          <a:fontRef idx="minor">
+            <a:schemeClr val="lt1"/>
+          </a:fontRef>
+        </p:style>
+        <p:txBody>
+          <a:bodyPr rtlCol="0" anchor="ctr"/>
+          <a:lstStyle/>
+          <a:p>
+            <a:pPr algn="ctr"/>
+            <a:endParaRPr/>
+          </a:p>
+        </p:txBody>
+      </p:sp>
+      <p:sp>
+        <p:nvSpPr>
+          <p:cNvPr id="23" name="TextBox 22"/>
+          <p:cNvSpPr txBox="1"/>
+          <p:nvPr/>
+        </p:nvSpPr>
+        <p:spPr>
+          <a:xfrm>
+            <a:off x="4315968" y="2670048"/>
+            <a:ext cx="1325880" cy="201168"/>
+          </a:xfrm>
+          <a:prstGeom prst="rect">
+            <a:avLst/>
+          </a:prstGeom>
+          <a:noFill/>
+        </p:spPr>
+        <p:txBody>
+          <a:bodyPr wrap="square" anchor="ctr">
+            <a:spAutoFit/>
+          </a:bodyPr>
+          <a:lstStyle/>
+          <a:p>
+            <a:pPr algn="l"/>
+            <a:r>
+              <a:rPr sz="1050" b="1">
+                <a:solidFill>
+                  <a:srgbClr val="266F4C"/>
+                </a:solidFill>
+                <a:latin typeface="Calibri"/>
+              </a:rPr>
+              <a:t>Convocation / expertise</a:t>
+            </a:r>
+          </a:p>
+        </p:txBody>
+      </p:sp>
+      <p:sp>
+        <p:nvSpPr>
+          <p:cNvPr id="24" name="TextBox 23"/>
+          <p:cNvSpPr txBox="1"/>
+          <p:nvPr/>
+        </p:nvSpPr>
+        <p:spPr>
+          <a:xfrm>
+            <a:off x="5632704" y="2651760"/>
+            <a:ext cx="1965960" cy="438912"/>
+          </a:xfrm>
+          <a:prstGeom prst="rect">
+            <a:avLst/>
+          </a:prstGeom>
+          <a:noFill/>
+        </p:spPr>
+        <p:txBody>
+          <a:bodyPr wrap="square" anchor="ctr">
+            <a:spAutoFit/>
+          </a:bodyPr>
+          <a:lstStyle/>
+          <a:p>
+            <a:pPr algn="l"/>
+            <a:r>
+              <a:rPr sz="900" b="0">
+                <a:solidFill>
+                  <a:srgbClr val="1C202B"/>
+                </a:solidFill>
+                <a:latin typeface="Calibri"/>
+              </a:rPr>
+              <a:t>Contrôle médical, expert, appareillage agréé.</a:t>
+            </a:r>
+          </a:p>
+        </p:txBody>
+      </p:sp>
+      <p:sp>
+        <p:nvSpPr>
+          <p:cNvPr id="25" name="Rectangle 24"/>
+          <p:cNvSpPr/>
+          <p:nvPr/>
+        </p:nvSpPr>
+        <p:spPr>
+          <a:xfrm>
+            <a:off x="4187952" y="3310128"/>
+            <a:ext cx="3566160" cy="594360"/>
+          </a:xfrm>
+          <a:prstGeom prst="rect">
+            <a:avLst/>
+          </a:prstGeom>
+          <a:solidFill>
+            <a:srgbClr val="FFFFFF"/>
+          </a:solidFill>
+          <a:ln>
+            <a:solidFill>
+              <a:srgbClr val="FFFFFF"/>
+            </a:solidFill>
+          </a:ln>
+        </p:spPr>
+        <p:style>
+          <a:lnRef idx="1">
+            <a:schemeClr val="accent1"/>
+          </a:lnRef>
+          <a:fillRef idx="3">
+            <a:schemeClr val="accent1"/>
+          </a:fillRef>
+          <a:effectRef idx="2">
+            <a:schemeClr val="accent1"/>
+          </a:effectRef>
+          <a:fontRef idx="minor">
+            <a:schemeClr val="lt1"/>
+          </a:fontRef>
+        </p:style>
+        <p:txBody>
+          <a:bodyPr rtlCol="0" anchor="ctr"/>
+          <a:lstStyle/>
+          <a:p>
+            <a:pPr algn="ctr"/>
+            <a:endParaRPr/>
+          </a:p>
+        </p:txBody>
+      </p:sp>
+      <p:sp>
+        <p:nvSpPr>
+          <p:cNvPr id="26" name="TextBox 25"/>
+          <p:cNvSpPr txBox="1"/>
+          <p:nvPr/>
+        </p:nvSpPr>
+        <p:spPr>
+          <a:xfrm>
+            <a:off x="4315968" y="3383280"/>
+            <a:ext cx="1325880" cy="201168"/>
+          </a:xfrm>
+          <a:prstGeom prst="rect">
+            <a:avLst/>
+          </a:prstGeom>
+          <a:noFill/>
+        </p:spPr>
+        <p:txBody>
+          <a:bodyPr wrap="square" anchor="ctr">
+            <a:spAutoFit/>
+          </a:bodyPr>
+          <a:lstStyle/>
+          <a:p>
+            <a:pPr algn="l"/>
+            <a:r>
+              <a:rPr sz="1050" b="1">
+                <a:solidFill>
+                  <a:srgbClr val="266F4C"/>
+                </a:solidFill>
+                <a:latin typeface="Calibri"/>
+              </a:rPr>
+              <a:t>CAMSP / CMPP…</a:t>
+            </a:r>
+          </a:p>
+        </p:txBody>
+      </p:sp>
+      <p:sp>
+        <p:nvSpPr>
+          <p:cNvPr id="27" name="TextBox 26"/>
+          <p:cNvSpPr txBox="1"/>
+          <p:nvPr/>
+        </p:nvSpPr>
+        <p:spPr>
+          <a:xfrm>
+            <a:off x="5632704" y="3364992"/>
+            <a:ext cx="1965960" cy="438912"/>
+          </a:xfrm>
+          <a:prstGeom prst="rect">
+            <a:avLst/>
+          </a:prstGeom>
+          <a:noFill/>
+        </p:spPr>
+        <p:txBody>
+          <a:bodyPr wrap="square" anchor="ctr">
+            <a:spAutoFit/>
+          </a:bodyPr>
+          <a:lstStyle/>
+          <a:p>
+            <a:pPr algn="l"/>
+            <a:r>
+              <a:rPr sz="900" b="0">
+                <a:solidFill>
+                  <a:srgbClr val="1C202B"/>
+                </a:solidFill>
+                <a:latin typeface="Calibri"/>
+              </a:rPr>
+              <a:t>Autres situations prévues avec règles spécifiques.</a:t>
+            </a:r>
+          </a:p>
+        </p:txBody>
+      </p:sp>
+      <p:sp>
+        <p:nvSpPr>
+          <p:cNvPr id="28" name="Rectangle 27"/>
+          <p:cNvSpPr/>
+          <p:nvPr/>
+        </p:nvSpPr>
+        <p:spPr>
+          <a:xfrm>
+            <a:off x="411480" y="4050791"/>
+            <a:ext cx="7342631" cy="301752"/>
+          </a:xfrm>
+          <a:prstGeom prst="rect">
+            <a:avLst/>
+          </a:prstGeom>
+          <a:solidFill>
+            <a:srgbClr val="FDF2EA"/>
+          </a:solidFill>
+          <a:ln>
+            <a:solidFill>
+              <a:srgbClr val="FDF2EA"/>
+            </a:solidFill>
+          </a:ln>
+        </p:spPr>
+        <p:style>
+          <a:lnRef idx="1">
+            <a:schemeClr val="accent1"/>
+          </a:lnRef>
+          <a:fillRef idx="3">
+            <a:schemeClr val="accent1"/>
+          </a:fillRef>
+          <a:effectRef idx="2">
+            <a:schemeClr val="accent1"/>
+          </a:effectRef>
+          <a:fontRef idx="minor">
+            <a:schemeClr val="lt1"/>
+          </a:fontRef>
+        </p:style>
+        <p:txBody>
+          <a:bodyPr rtlCol="0" anchor="ctr"/>
+          <a:lstStyle/>
+          <a:p>
+            <a:pPr algn="ctr"/>
+            <a:endParaRPr/>
+          </a:p>
+        </p:txBody>
+      </p:sp>
+      <p:sp>
+        <p:nvSpPr>
+          <p:cNvPr id="29" name="TextBox 28"/>
+          <p:cNvSpPr txBox="1"/>
+          <p:nvPr/>
+        </p:nvSpPr>
+        <p:spPr>
+          <a:xfrm>
+            <a:off x="438912" y="4025000"/>
+            <a:ext cx="7498079" cy="320040"/>
+          </a:xfrm>
+          <a:prstGeom prst="rect">
+            <a:avLst/>
+          </a:prstGeom>
+          <a:noFill/>
+        </p:spPr>
+        <p:txBody>
+          <a:bodyPr wrap="square" anchor="ctr">
+            <a:spAutoFit/>
+          </a:bodyPr>
+          <a:lstStyle/>
+          <a:p>
+            <a:pPr algn="l"/>
+            <a:r>
+              <a:rPr sz="1050" b="1">
+                <a:solidFill>
+                  <a:srgbClr val="CA521E"/>
+                </a:solidFill>
+                <a:latin typeface="Calibri"/>
+              </a:rPr>
+              <a:t>Une ordonnance seule ne rend pas automatiquement n’importe quelle course remboursable.</a:t>
+            </a:r>
+          </a:p>
+        </p:txBody>
+      </p:sp>
+      <p:sp>
+        <p:nvSpPr>
+          <p:cNvPr id="30" name="TextBox 29"/>
+          <p:cNvSpPr txBox="1"/>
+          <p:nvPr/>
+        </p:nvSpPr>
+        <p:spPr>
+          <a:xfrm>
+            <a:off x="411480" y="4407408"/>
+            <a:ext cx="7498079" cy="164592"/>
+          </a:xfrm>
+          <a:prstGeom prst="rect">
+            <a:avLst/>
+          </a:prstGeom>
+          <a:noFill/>
+        </p:spPr>
+        <p:txBody>
+          <a:bodyPr wrap="square" anchor="ctr">
+            <a:spAutoFit/>
+          </a:bodyPr>
+          <a:lstStyle/>
+          <a:p>
+            <a:pPr algn="l"/>
+            <a:r>
+              <a:rPr sz="800" b="0">
+                <a:solidFill>
+                  <a:srgbClr val="465269"/>
+                </a:solidFill>
+                <a:latin typeface="Calibri"/>
+              </a:rPr>
+              <a:t>FTRANSPORT - SERVICES PRO  •  Convention CPAM — exemples pédagogiques</a:t>
+            </a:r>
+          </a:p>
+        </p:txBody>
+      </p:sp>
+      <p:sp>
+        <p:nvSpPr>
+          <p:cNvPr id="31" name="TextBox 30"/>
+          <p:cNvSpPr txBox="1"/>
+          <p:nvPr/>
+        </p:nvSpPr>
+        <p:spPr>
+          <a:xfrm>
+            <a:off x="7882127" y="4389120"/>
+            <a:ext cx="228600" cy="182880"/>
+          </a:xfrm>
+          <a:prstGeom prst="rect">
+            <a:avLst/>
+          </a:prstGeom>
+          <a:noFill/>
+        </p:spPr>
+        <p:txBody>
+          <a:bodyPr wrap="square" anchor="ctr">
+            <a:spAutoFit/>
+          </a:bodyPr>
+          <a:lstStyle/>
+          <a:p>
+            <a:pPr algn="r"/>
+            <a:r>
+              <a:rPr sz="800" b="0">
+                <a:solidFill>
+                  <a:srgbClr val="465269"/>
+                </a:solidFill>
+                <a:latin typeface="Calibri"/>
               </a:rPr>
               <a:t>7</a:t>
             </a:r>
-            <a:endParaRPr lang="en-US" sz="800" dirty="0"/>
           </a:p>
         </p:txBody>
       </p:sp>
